--- a/entregables/Pruebas_Madrid_TORSA.pptx
+++ b/entregables/Pruebas_Madrid_TORSA.pptx
@@ -124,13 +124,13 @@
   <p:extLst>
     <p:ext uri="{521415D9-36F7-43E2-AB2F-B90AF26B5E84}">
       <p14:sectionLst xmlns:p14="http://schemas.microsoft.com/office/powerpoint/2010/main">
-        <p14:section name="Inicio" id="{4c5e42bd-30b0-a113-5666-d356990ef848}">
+        <p14:section name="Inicio" id="{e6ff1a2e-508e-cff9-e930-0569fcd82e02}">
           <p14:sldIdLst>
             <p14:sldId id="256"/>
             <p14:sldId id="257"/>
           </p14:sldIdLst>
         </p14:section>
-        <p14:section name="Seguridad en la zona de pruebas" id="{13995984-a3f6-f2e9-12da-689aa8c51d08}">
+        <p14:section name="Seguridad en la zona de pruebas" id="{749b4f1c-3006-efeb-51ad-cc6e12403515}">
           <p14:sldIdLst>
             <p14:sldId id="258"/>
             <p14:sldId id="259"/>
@@ -141,7 +141,7 @@
             <p14:sldId id="264"/>
           </p14:sldIdLst>
         </p14:section>
-        <p14:section name="Plan de pruebas" id="{a98947f2-7569-c615-f537-16883670a8d9}">
+        <p14:section name="Plan de pruebas" id="{ae4255e8-a7bd-5cdb-64a1-c320fcb23880}">
           <p14:sldIdLst>
             <p14:sldId id="265"/>
             <p14:sldId id="266"/>
@@ -734,7 +734,7 @@
           <a:p>
             <a:r>
               <a:rPr lang="en-US" dirty="0"/>
-              <a:t>Portafolio de Operación Aumentada (lámina 11 de la presentación corporativa). En esta prueba se demuestran cuatro productos instalados en los camiones: CMS (análisis de interacción), ISA (intervención), Whole Body Vibration Monitor (condiciones del operador) y FAS (fatiga).</a:t>
+              <a:t>Portafolio de Operación Aumentada (lámina 11 de la presentación corporativa). En esta prueba se demuestran tres productos activos instalados en los camiones, CMS (análisis de interacción), ISA (intervención) y FAS (fatiga), y uno pasivo, Whole Body Vibration Monitor, que registra datos durante todas las pruebas sin alertar ni intervenir.</a:t>
             </a:r>
             <a:endParaRPr lang="en-US" dirty="0"/>
           </a:p>
@@ -822,7 +822,7 @@
           <a:p>
             <a:r>
               <a:rPr lang="en-US" dirty="0"/>
-              <a:t>En todas las pruebas se respeta el carril de cada camión, para que la interacción sea segura: no hay enfrentamientos directos y se dejan espacios para que cada camión maniobre. Ante cualquier imprevisto, la prueba se detiene. Las pruebas, en orden: enfrentamiento, cruce en diferentes carriles, seguimiento, cruce en intersección y, finalmente, una prueba recta para la validación final.</a:t>
+              <a:t>La historia que contamos: primero una base, así funciona el sistema anticolisión, con un cruce sin riesgo en el que CMS solo informa. Después, escenarios con confrontación real, enfrentamiento, seguimiento e intersección, en los que es necesario intervenir el vehículo y actúa ISA. Finalmente, el operador: FAS detecta fatiga y uso del móvil con el camión detenido. Durante toda la sesión, WBV registra datos de vibración en segundo plano, sin alertar ni intervenir.</a:t>
             </a:r>
             <a:endParaRPr lang="en-US" dirty="0"/>
           </a:p>
@@ -910,7 +910,7 @@
           <a:p>
             <a:r>
               <a:rPr lang="en-US" dirty="0"/>
-              <a:t>Prueba de enfrentamiento: los camiones se aproximan de frente, cada uno en su carril. Se respeta el carril de cada camión para que la interacción sea segura, sin enfrentamiento directo.</a:t>
+              <a:t>Prueba 1, la base: los camiones se cruzan circulando en sentidos opuestos, cada uno por su carril. CMS detecta la interacción e informa al operador; como no hay riesgo, no hay intervención. Sirve para explicar cómo funciona el sistema anticolisión antes de pasar a los escenarios con confrontación.</a:t>
             </a:r>
             <a:endParaRPr lang="en-US" dirty="0"/>
           </a:p>
@@ -998,7 +998,7 @@
           <a:p>
             <a:r>
               <a:rPr lang="en-US" dirty="0"/>
-              <a:t>Prueba de cruce en diferentes carriles: los camiones se cruzan circulando en sentidos opuestos, cada uno por su carril.</a:t>
+              <a:t>Prueba de enfrentamiento: los camiones se aproximan de frente. El sistema alerta y, cuando la distancia baja del umbral, ISA interviene los vehículos. Aquí empieza la parte de la historia en la que hay confrontación real y es necesaria la intervención.</a:t>
             </a:r>
             <a:endParaRPr lang="en-US" dirty="0"/>
           </a:p>
@@ -1262,7 +1262,7 @@
           <a:p>
             <a:r>
               <a:rPr lang="en-US" dirty="0"/>
-              <a:t>Finalmente, una prueba recta para hacer la validación final del sistema. Confirmar con el equipo técnico qué se valida exactamente en esta prueba (el audio original no era claro en este punto); se propone usarla para validar WBV Monitor y FAS en marcha, sin interacción entre camiones.</a:t>
+              <a:t>Prueba 5: detección de fatiga y uso del móvil con FAS. El camión permanece detenido y el operador reproduce en cabina los gestos que identifican los eventos. En operación normal las alertas están definidas para la marcha.</a:t>
             </a:r>
             <a:endParaRPr lang="en-US" dirty="0"/>
           </a:p>
@@ -3049,7 +3049,7 @@
         <p:spPr>
           <a:xfrm>
             <a:off x="1920240" y="274320"/>
-            <a:ext cx="5760720" cy="502920"/>
+            <a:ext cx="5394960" cy="502920"/>
           </a:xfrm>
           <a:prstGeom prst="rect">
             <a:avLst/>
@@ -3110,7 +3110,7 @@
           <a:solidFill>
             <a:srgbClr val="D9D9D9"/>
           </a:solidFill>
-          <a:ln w="12700">
+          <a:ln w="9525">
             <a:solidFill>
               <a:srgbClr val="D9D9D9"/>
             </a:solidFill>
@@ -3159,7 +3159,7 @@
       </p:sp>
       <p:pic>
         <p:nvPicPr>
-          <p:cNvPr id="5" name="anillo portafolio" descr="/tmp/claude-0/-home-user-MITREPO/21d91df9-1cfc-5dbc-823a-a27b9a33fab4/scratchpad/deck/ring.png">    </p:cNvPr>
+          <p:cNvPr id="5" name="portafolio Operación Aumentada" descr="/tmp/claude-0/-home-user-MITREPO/21d91df9-1cfc-5dbc-823a-a27b9a33fab4/scratchpad/deck/user_s11_Imagen_139.png">    </p:cNvPr>
           <p:cNvPicPr>
             <a:picLocks noChangeAspect="1"/>
           </p:cNvPicPr>
@@ -3173,243 +3173,24 @@
         </p:blipFill>
         <p:spPr>
           <a:xfrm>
-            <a:off x="685800" y="1325880"/>
-            <a:ext cx="3017520" cy="3064459"/>
+            <a:off x="621792" y="1472184"/>
+            <a:ext cx="3246120" cy="2862072"/>
           </a:xfrm>
           <a:prstGeom prst="rect">
             <a:avLst/>
           </a:prstGeom>
         </p:spPr>
       </p:pic>
-      <p:pic>
-        <p:nvPicPr>
-          <p:cNvPr id="6" name="logo centro anillo" descr="/tmp/claude-0/-home-user-MITREPO/21d91df9-1cfc-5dbc-823a-a27b9a33fab4/scratchpad/deck/corp/logo_dark.png">    </p:cNvPr>
-          <p:cNvPicPr>
-            <a:picLocks noChangeAspect="1"/>
-          </p:cNvPicPr>
-          <p:nvPr/>
-        </p:nvPicPr>
-        <p:blipFill>
-          <a:blip r:embed="rId2"/>
-          <a:stretch>
-            <a:fillRect/>
-          </a:stretch>
-        </p:blipFill>
-        <p:spPr>
-          <a:xfrm>
-            <a:off x="1508760" y="2670048"/>
-            <a:ext cx="1371600" cy="368735"/>
-          </a:xfrm>
-          <a:prstGeom prst="rect">
-            <a:avLst/>
-          </a:prstGeom>
-        </p:spPr>
-      </p:pic>
-      <p:sp>
-        <p:nvSpPr>
-          <p:cNvPr id="7" name="segmento interacción"/>
-          <p:cNvSpPr txBox="1"/>
-          <p:nvPr/>
-        </p:nvSpPr>
-        <p:spPr>
-          <a:xfrm rot="18900000">
-            <a:off x="505644" y="1804092"/>
-            <a:ext cx="1554480" cy="237744"/>
-          </a:xfrm>
-          <a:prstGeom prst="rect">
-            <a:avLst/>
-          </a:prstGeom>
-          <a:noFill/>
-          <a:ln/>
-        </p:spPr>
-        <p:txBody>
-          <a:bodyPr wrap="square" lIns="0" tIns="0" rIns="0" bIns="0" rtlCol="0" anchor="ctr"/>
-          <a:lstStyle/>
-          <a:p>
-            <a:pPr algn="ctr" indent="0" marL="0">
-              <a:buNone/>
-            </a:pPr>
-            <a:r>
-              <a:rPr lang="en-US" sz="750" b="1" spc="100" kern="0" dirty="0">
-                <a:solidFill>
-                  <a:srgbClr val="FFFFFF"/>
-                </a:solidFill>
-                <a:latin typeface="Montserrat" pitchFamily="34" charset="0"/>
-                <a:ea typeface="Montserrat" pitchFamily="34" charset="-122"/>
-                <a:cs typeface="Montserrat" pitchFamily="34" charset="-120"/>
-              </a:rPr>
-              <a:t>INTERACTION ANALYSIS</a:t>
-            </a:r>
-            <a:endParaRPr lang="en-US" sz="750" dirty="0"/>
-          </a:p>
-        </p:txBody>
-      </p:sp>
-      <p:sp>
-        <p:nvSpPr>
-          <p:cNvPr id="8" name="segmento fatiga"/>
-          <p:cNvSpPr txBox="1"/>
-          <p:nvPr/>
-        </p:nvSpPr>
-        <p:spPr>
-          <a:xfrm rot="1320000">
-            <a:off x="2311782" y="1520346"/>
-            <a:ext cx="731520" cy="237744"/>
-          </a:xfrm>
-          <a:prstGeom prst="rect">
-            <a:avLst/>
-          </a:prstGeom>
-          <a:noFill/>
-          <a:ln/>
-        </p:spPr>
-        <p:txBody>
-          <a:bodyPr wrap="square" lIns="0" tIns="0" rIns="0" bIns="0" rtlCol="0" anchor="ctr"/>
-          <a:lstStyle/>
-          <a:p>
-            <a:pPr algn="ctr" indent="0" marL="0">
-              <a:buNone/>
-            </a:pPr>
-            <a:r>
-              <a:rPr lang="en-US" sz="750" b="1" spc="100" kern="0" dirty="0">
-                <a:solidFill>
-                  <a:srgbClr val="FFFFFF"/>
-                </a:solidFill>
-                <a:latin typeface="Montserrat" pitchFamily="34" charset="0"/>
-                <a:ea typeface="Montserrat" pitchFamily="34" charset="-122"/>
-                <a:cs typeface="Montserrat" pitchFamily="34" charset="-120"/>
-              </a:rPr>
-              <a:t>FATIGA</a:t>
-            </a:r>
-            <a:endParaRPr lang="en-US" sz="750" dirty="0"/>
-          </a:p>
-        </p:txBody>
-      </p:sp>
-      <p:sp>
-        <p:nvSpPr>
-          <p:cNvPr id="9" name="segmento intervención"/>
-          <p:cNvSpPr txBox="1"/>
-          <p:nvPr/>
-        </p:nvSpPr>
-        <p:spPr>
-          <a:xfrm rot="3600000">
-            <a:off x="2808210" y="2071116"/>
-            <a:ext cx="1005840" cy="237744"/>
-          </a:xfrm>
-          <a:prstGeom prst="rect">
-            <a:avLst/>
-          </a:prstGeom>
-          <a:noFill/>
-          <a:ln/>
-        </p:spPr>
-        <p:txBody>
-          <a:bodyPr wrap="square" lIns="0" tIns="0" rIns="0" bIns="0" rtlCol="0" anchor="ctr"/>
-          <a:lstStyle/>
-          <a:p>
-            <a:pPr algn="ctr" indent="0" marL="0">
-              <a:buNone/>
-            </a:pPr>
-            <a:r>
-              <a:rPr lang="en-US" sz="750" b="1" spc="100" kern="0" dirty="0">
-                <a:solidFill>
-                  <a:srgbClr val="FFFFFF"/>
-                </a:solidFill>
-                <a:latin typeface="Montserrat" pitchFamily="34" charset="0"/>
-                <a:ea typeface="Montserrat" pitchFamily="34" charset="-122"/>
-                <a:cs typeface="Montserrat" pitchFamily="34" charset="-120"/>
-              </a:rPr>
-              <a:t>INTERVENTION</a:t>
-            </a:r>
-            <a:endParaRPr lang="en-US" sz="750" dirty="0"/>
-          </a:p>
-        </p:txBody>
-      </p:sp>
-      <p:sp>
-        <p:nvSpPr>
-          <p:cNvPr id="10" name="segmento gets"/>
-          <p:cNvSpPr txBox="1"/>
-          <p:nvPr/>
-        </p:nvSpPr>
-        <p:spPr>
-          <a:xfrm rot="-4080000">
-            <a:off x="3069942" y="3198750"/>
-            <a:ext cx="640080" cy="237744"/>
-          </a:xfrm>
-          <a:prstGeom prst="rect">
-            <a:avLst/>
-          </a:prstGeom>
-          <a:noFill/>
-          <a:ln/>
-        </p:spPr>
-        <p:txBody>
-          <a:bodyPr wrap="square" lIns="0" tIns="0" rIns="0" bIns="0" rtlCol="0" anchor="ctr"/>
-          <a:lstStyle/>
-          <a:p>
-            <a:pPr algn="ctr" indent="0" marL="0">
-              <a:buNone/>
-            </a:pPr>
-            <a:r>
-              <a:rPr lang="en-US" sz="750" b="1" spc="100" kern="0" dirty="0">
-                <a:solidFill>
-                  <a:srgbClr val="FFFFFF"/>
-                </a:solidFill>
-                <a:latin typeface="Montserrat" pitchFamily="34" charset="0"/>
-                <a:ea typeface="Montserrat" pitchFamily="34" charset="-122"/>
-                <a:cs typeface="Montserrat" pitchFamily="34" charset="-120"/>
-              </a:rPr>
-              <a:t>GETS</a:t>
-            </a:r>
-            <a:endParaRPr lang="en-US" sz="750" dirty="0"/>
-          </a:p>
-        </p:txBody>
-      </p:sp>
-      <p:sp>
-        <p:nvSpPr>
-          <p:cNvPr id="11" name="segmento condiciones"/>
-          <p:cNvSpPr txBox="1"/>
-          <p:nvPr/>
-        </p:nvSpPr>
-        <p:spPr>
-          <a:xfrm rot="1200000">
-            <a:off x="976352" y="3927317"/>
-            <a:ext cx="1554480" cy="237744"/>
-          </a:xfrm>
-          <a:prstGeom prst="rect">
-            <a:avLst/>
-          </a:prstGeom>
-          <a:noFill/>
-          <a:ln/>
-        </p:spPr>
-        <p:txBody>
-          <a:bodyPr wrap="square" lIns="0" tIns="0" rIns="0" bIns="0" rtlCol="0" anchor="ctr"/>
-          <a:lstStyle/>
-          <a:p>
-            <a:pPr algn="ctr" indent="0" marL="0">
-              <a:buNone/>
-            </a:pPr>
-            <a:r>
-              <a:rPr lang="en-US" sz="750" b="1" spc="100" kern="0" dirty="0">
-                <a:solidFill>
-                  <a:srgbClr val="FFFFFF"/>
-                </a:solidFill>
-                <a:latin typeface="Montserrat" pitchFamily="34" charset="0"/>
-                <a:ea typeface="Montserrat" pitchFamily="34" charset="-122"/>
-                <a:cs typeface="Montserrat" pitchFamily="34" charset="-120"/>
-              </a:rPr>
-              <a:t>OPERATOR CONDITIONS</a:t>
-            </a:r>
-            <a:endParaRPr lang="en-US" sz="750" dirty="0"/>
-          </a:p>
-        </p:txBody>
-      </p:sp>
-      <p:sp>
-        <p:nvSpPr>
-          <p:cNvPr id="12" name="detalle segmentos"/>
-          <p:cNvSpPr txBox="1"/>
-          <p:nvPr/>
-        </p:nvSpPr>
-        <p:spPr>
-          <a:xfrm>
-            <a:off x="457200" y="4434840"/>
-            <a:ext cx="3566160" cy="274320"/>
+      <p:sp>
+        <p:nvSpPr>
+          <p:cNvPr id="6" name="etiqueta productos"/>
+          <p:cNvSpPr txBox="1"/>
+          <p:nvPr/>
+        </p:nvSpPr>
+        <p:spPr>
+          <a:xfrm>
+            <a:off x="4206240" y="1115568"/>
+            <a:ext cx="4480560" cy="201168"/>
           </a:xfrm>
           <a:prstGeom prst="rect">
             <a:avLst/>
@@ -3421,11 +3202,11 @@
           <a:bodyPr wrap="square" lIns="0" tIns="0" rIns="0" bIns="0" rtlCol="0" anchor="t"/>
           <a:lstStyle/>
           <a:p>
-            <a:pPr algn="ctr" indent="0" marL="0">
-              <a:buNone/>
-            </a:pPr>
-            <a:r>
-              <a:rPr lang="en-US" sz="750" dirty="0">
+            <a:pPr indent="0" marL="0">
+              <a:buNone/>
+            </a:pPr>
+            <a:r>
+              <a:rPr lang="en-US" sz="800" spc="250" kern="0" dirty="0">
                 <a:solidFill>
                   <a:srgbClr val="8C8C8C"/>
                 </a:solidFill>
@@ -3433,45 +3214,6 @@
                 <a:ea typeface="Arial" pitchFamily="34" charset="-122"/>
                 <a:cs typeface="Arial" pitchFamily="34" charset="-120"/>
               </a:rPr>
-              <a:t>Interaction Analysis: V2V · V2P · V2O      Operator Conditions: vibrations, dust, gas, noise, temperature, humidity</a:t>
-            </a:r>
-            <a:endParaRPr lang="en-US" sz="750" dirty="0"/>
-          </a:p>
-        </p:txBody>
-      </p:sp>
-      <p:sp>
-        <p:nvSpPr>
-          <p:cNvPr id="13" name="etiqueta productos"/>
-          <p:cNvSpPr txBox="1"/>
-          <p:nvPr/>
-        </p:nvSpPr>
-        <p:spPr>
-          <a:xfrm>
-            <a:off x="4206240" y="1115568"/>
-            <a:ext cx="4480560" cy="201168"/>
-          </a:xfrm>
-          <a:prstGeom prst="rect">
-            <a:avLst/>
-          </a:prstGeom>
-          <a:noFill/>
-          <a:ln/>
-        </p:spPr>
-        <p:txBody>
-          <a:bodyPr wrap="square" lIns="0" tIns="0" rIns="0" bIns="0" rtlCol="0" anchor="t"/>
-          <a:lstStyle/>
-          <a:p>
-            <a:pPr indent="0" marL="0">
-              <a:buNone/>
-            </a:pPr>
-            <a:r>
-              <a:rPr lang="en-US" sz="800" spc="250" kern="0" dirty="0">
-                <a:solidFill>
-                  <a:srgbClr val="8C8C8C"/>
-                </a:solidFill>
-                <a:latin typeface="Arial" pitchFamily="34" charset="0"/>
-                <a:ea typeface="Arial" pitchFamily="34" charset="-122"/>
-                <a:cs typeface="Arial" pitchFamily="34" charset="-120"/>
-              </a:rPr>
               <a:t>IMPLEMENTADOS EN LOS CAMIONES DE LA PRUEBA</a:t>
             </a:r>
             <a:endParaRPr lang="en-US" sz="800" dirty="0"/>
@@ -3480,7 +3222,7 @@
       </p:sp>
       <p:sp>
         <p:nvSpPr>
-          <p:cNvPr id="14" name="producto CMS"/>
+          <p:cNvPr id="7" name="producto CMS"/>
           <p:cNvSpPr/>
           <p:nvPr/>
         </p:nvSpPr>
@@ -3505,7 +3247,7 @@
       </p:sp>
       <p:sp>
         <p:nvSpPr>
-          <p:cNvPr id="15" name="producto CMS marca"/>
+          <p:cNvPr id="8" name="producto CMS marca"/>
           <p:cNvSpPr/>
           <p:nvPr/>
         </p:nvSpPr>
@@ -3530,7 +3272,7 @@
       </p:sp>
       <p:sp>
         <p:nvSpPr>
-          <p:cNvPr id="16" name="producto CMS sigla"/>
+          <p:cNvPr id="9" name="producto CMS sigla"/>
           <p:cNvSpPr txBox="1"/>
           <p:nvPr/>
         </p:nvSpPr>
@@ -3569,7 +3311,7 @@
       </p:sp>
       <p:sp>
         <p:nvSpPr>
-          <p:cNvPr id="17" name="producto CMS nombre fondo"/>
+          <p:cNvPr id="10" name="producto CMS nombre fondo"/>
           <p:cNvSpPr/>
           <p:nvPr/>
         </p:nvSpPr>
@@ -3577,6 +3319,173 @@
           <a:xfrm>
             <a:off x="4389120" y="1819656"/>
             <a:ext cx="2103120" cy="201168"/>
+          </a:xfrm>
+          <a:prstGeom prst="rect">
+            <a:avLst/>
+          </a:prstGeom>
+          <a:solidFill>
+            <a:srgbClr val="D40319"/>
+          </a:solidFill>
+          <a:ln w="9525">
+            <a:solidFill>
+              <a:srgbClr val="D40319"/>
+            </a:solidFill>
+            <a:prstDash val="solid"/>
+          </a:ln>
+        </p:spPr>
+      </p:sp>
+      <p:sp>
+        <p:nvSpPr>
+          <p:cNvPr id="11" name="producto CMS nombre"/>
+          <p:cNvSpPr txBox="1"/>
+          <p:nvPr/>
+        </p:nvSpPr>
+        <p:spPr>
+          <a:xfrm>
+            <a:off x="4389120" y="1819656"/>
+            <a:ext cx="2103120" cy="201168"/>
+          </a:xfrm>
+          <a:prstGeom prst="rect">
+            <a:avLst/>
+          </a:prstGeom>
+          <a:noFill/>
+          <a:ln/>
+        </p:spPr>
+        <p:txBody>
+          <a:bodyPr wrap="square" lIns="0" tIns="0" rIns="0" bIns="0" rtlCol="0" anchor="ctr"/>
+          <a:lstStyle/>
+          <a:p>
+            <a:pPr algn="ctr" indent="0" marL="0">
+              <a:buNone/>
+            </a:pPr>
+            <a:r>
+              <a:rPr lang="en-US" sz="700" b="1" spc="80" kern="0" dirty="0">
+                <a:solidFill>
+                  <a:srgbClr val="FFFFFF"/>
+                </a:solidFill>
+                <a:latin typeface="Montserrat" pitchFamily="34" charset="0"/>
+                <a:ea typeface="Montserrat" pitchFamily="34" charset="-122"/>
+                <a:cs typeface="Montserrat" pitchFamily="34" charset="-120"/>
+              </a:rPr>
+              <a:t>COLLISION MANAGEMENT SYSTEM</a:t>
+            </a:r>
+            <a:endParaRPr lang="en-US" sz="700" dirty="0"/>
+          </a:p>
+        </p:txBody>
+      </p:sp>
+      <p:sp>
+        <p:nvSpPr>
+          <p:cNvPr id="12" name="producto CMS texto"/>
+          <p:cNvSpPr txBox="1"/>
+          <p:nvPr/>
+        </p:nvSpPr>
+        <p:spPr>
+          <a:xfrm>
+            <a:off x="6629400" y="1435608"/>
+            <a:ext cx="1965960" cy="457200"/>
+          </a:xfrm>
+          <a:prstGeom prst="rect">
+            <a:avLst/>
+          </a:prstGeom>
+          <a:noFill/>
+          <a:ln/>
+        </p:spPr>
+        <p:txBody>
+          <a:bodyPr wrap="square" lIns="0" tIns="0" rIns="0" bIns="0" rtlCol="0" anchor="t"/>
+          <a:lstStyle/>
+          <a:p>
+            <a:pPr indent="0" marL="0">
+              <a:buNone/>
+            </a:pPr>
+            <a:r>
+              <a:rPr lang="en-US" sz="850" dirty="0">
+                <a:solidFill>
+                  <a:srgbClr val="5C5C5C"/>
+                </a:solidFill>
+                <a:latin typeface="Arial" pitchFamily="34" charset="0"/>
+                <a:ea typeface="Arial" pitchFamily="34" charset="-122"/>
+                <a:cs typeface="Arial" pitchFamily="34" charset="-120"/>
+              </a:rPr>
+              <a:t>Análisis de interacción entre vehículos: detecta y notifica el riesgo de colisión y actúa sobre la velocidad.</a:t>
+            </a:r>
+            <a:endParaRPr lang="en-US" sz="850" dirty="0"/>
+          </a:p>
+        </p:txBody>
+      </p:sp>
+      <p:sp>
+        <p:nvSpPr>
+          <p:cNvPr id="13" name="producto CMS segmento"/>
+          <p:cNvSpPr txBox="1"/>
+          <p:nvPr/>
+        </p:nvSpPr>
+        <p:spPr>
+          <a:xfrm>
+            <a:off x="6629400" y="1883664"/>
+            <a:ext cx="1965960" cy="182880"/>
+          </a:xfrm>
+          <a:prstGeom prst="rect">
+            <a:avLst/>
+          </a:prstGeom>
+          <a:noFill/>
+          <a:ln/>
+        </p:spPr>
+        <p:txBody>
+          <a:bodyPr wrap="square" lIns="0" tIns="0" rIns="0" bIns="0" rtlCol="0" anchor="t"/>
+          <a:lstStyle/>
+          <a:p>
+            <a:pPr indent="0" marL="0">
+              <a:buNone/>
+            </a:pPr>
+            <a:r>
+              <a:rPr lang="en-US" sz="750" dirty="0">
+                <a:solidFill>
+                  <a:srgbClr val="8C8C8C"/>
+                </a:solidFill>
+                <a:latin typeface="Arial" pitchFamily="34" charset="0"/>
+                <a:ea typeface="Arial" pitchFamily="34" charset="-122"/>
+                <a:cs typeface="Arial" pitchFamily="34" charset="-120"/>
+              </a:rPr>
+              <a:t>Segmento: Interaction Analysis</a:t>
+            </a:r>
+            <a:endParaRPr lang="en-US" sz="750" dirty="0"/>
+          </a:p>
+        </p:txBody>
+      </p:sp>
+      <p:sp>
+        <p:nvSpPr>
+          <p:cNvPr id="14" name="producto ISA"/>
+          <p:cNvSpPr/>
+          <p:nvPr/>
+        </p:nvSpPr>
+        <p:spPr>
+          <a:xfrm>
+            <a:off x="4206240" y="2157984"/>
+            <a:ext cx="4480560" cy="713232"/>
+          </a:xfrm>
+          <a:prstGeom prst="rect">
+            <a:avLst/>
+          </a:prstGeom>
+          <a:solidFill>
+            <a:srgbClr val="FFFFFF"/>
+          </a:solidFill>
+          <a:ln w="9525">
+            <a:solidFill>
+              <a:srgbClr val="E3E3E3"/>
+            </a:solidFill>
+            <a:prstDash val="solid"/>
+          </a:ln>
+        </p:spPr>
+      </p:sp>
+      <p:sp>
+        <p:nvSpPr>
+          <p:cNvPr id="15" name="producto ISA marca"/>
+          <p:cNvSpPr/>
+          <p:nvPr/>
+        </p:nvSpPr>
+        <p:spPr>
+          <a:xfrm>
+            <a:off x="4206240" y="2157984"/>
+            <a:ext cx="54864" cy="713232"/>
           </a:xfrm>
           <a:prstGeom prst="rect">
             <a:avLst/>
@@ -3594,14 +3503,14 @@
       </p:sp>
       <p:sp>
         <p:nvSpPr>
-          <p:cNvPr id="18" name="producto CMS nombre"/>
-          <p:cNvSpPr txBox="1"/>
-          <p:nvPr/>
-        </p:nvSpPr>
-        <p:spPr>
-          <a:xfrm>
-            <a:off x="4389120" y="1819656"/>
-            <a:ext cx="2103120" cy="201168"/>
+          <p:cNvPr id="16" name="producto ISA sigla"/>
+          <p:cNvSpPr txBox="1"/>
+          <p:nvPr/>
+        </p:nvSpPr>
+        <p:spPr>
+          <a:xfrm>
+            <a:off x="4389120" y="2212848"/>
+            <a:ext cx="914400" cy="365760"/>
           </a:xfrm>
           <a:prstGeom prst="rect">
             <a:avLst/>
@@ -3613,19 +3522,83 @@
           <a:bodyPr wrap="square" lIns="0" tIns="0" rIns="0" bIns="0" rtlCol="0" anchor="ctr"/>
           <a:lstStyle/>
           <a:p>
-            <a:pPr algn="ctr" indent="0" marL="0">
-              <a:buNone/>
-            </a:pPr>
-            <a:r>
-              <a:rPr lang="en-US" sz="700" b="1" spc="80" kern="0" dirty="0">
-                <a:solidFill>
-                  <a:srgbClr val="FFFFFF"/>
+            <a:pPr indent="0" marL="0">
+              <a:buNone/>
+            </a:pPr>
+            <a:r>
+              <a:rPr lang="en-US" sz="2200" b="1" dirty="0">
+                <a:solidFill>
+                  <a:srgbClr val="D40319"/>
                 </a:solidFill>
                 <a:latin typeface="Montserrat" pitchFamily="34" charset="0"/>
                 <a:ea typeface="Montserrat" pitchFamily="34" charset="-122"/>
                 <a:cs typeface="Montserrat" pitchFamily="34" charset="-120"/>
               </a:rPr>
-              <a:t>COLLISION MANAGEMENT SYSTEM</a:t>
+              <a:t>ISA</a:t>
+            </a:r>
+            <a:endParaRPr lang="en-US" sz="2200" dirty="0"/>
+          </a:p>
+        </p:txBody>
+      </p:sp>
+      <p:sp>
+        <p:nvSpPr>
+          <p:cNvPr id="17" name="producto ISA nombre fondo"/>
+          <p:cNvSpPr/>
+          <p:nvPr/>
+        </p:nvSpPr>
+        <p:spPr>
+          <a:xfrm>
+            <a:off x="4389120" y="2606040"/>
+            <a:ext cx="2103120" cy="201168"/>
+          </a:xfrm>
+          <a:prstGeom prst="rect">
+            <a:avLst/>
+          </a:prstGeom>
+          <a:solidFill>
+            <a:srgbClr val="D40319"/>
+          </a:solidFill>
+          <a:ln w="9525">
+            <a:solidFill>
+              <a:srgbClr val="D40319"/>
+            </a:solidFill>
+            <a:prstDash val="solid"/>
+          </a:ln>
+        </p:spPr>
+      </p:sp>
+      <p:sp>
+        <p:nvSpPr>
+          <p:cNvPr id="18" name="producto ISA nombre"/>
+          <p:cNvSpPr txBox="1"/>
+          <p:nvPr/>
+        </p:nvSpPr>
+        <p:spPr>
+          <a:xfrm>
+            <a:off x="4389120" y="2606040"/>
+            <a:ext cx="2103120" cy="201168"/>
+          </a:xfrm>
+          <a:prstGeom prst="rect">
+            <a:avLst/>
+          </a:prstGeom>
+          <a:noFill/>
+          <a:ln/>
+        </p:spPr>
+        <p:txBody>
+          <a:bodyPr wrap="square" lIns="0" tIns="0" rIns="0" bIns="0" rtlCol="0" anchor="ctr"/>
+          <a:lstStyle/>
+          <a:p>
+            <a:pPr algn="ctr" indent="0" marL="0">
+              <a:buNone/>
+            </a:pPr>
+            <a:r>
+              <a:rPr lang="en-US" sz="700" b="1" spc="80" kern="0" dirty="0">
+                <a:solidFill>
+                  <a:srgbClr val="FFFFFF"/>
+                </a:solidFill>
+                <a:latin typeface="Montserrat" pitchFamily="34" charset="0"/>
+                <a:ea typeface="Montserrat" pitchFamily="34" charset="-122"/>
+                <a:cs typeface="Montserrat" pitchFamily="34" charset="-120"/>
+              </a:rPr>
+              <a:t>INTERVENTION SAFETY ASSISTANT</a:t>
             </a:r>
             <a:endParaRPr lang="en-US" sz="700" dirty="0"/>
           </a:p>
@@ -3633,13 +3606,13 @@
       </p:sp>
       <p:sp>
         <p:nvSpPr>
-          <p:cNvPr id="19" name="producto CMS texto"/>
-          <p:cNvSpPr txBox="1"/>
-          <p:nvPr/>
-        </p:nvSpPr>
-        <p:spPr>
-          <a:xfrm>
-            <a:off x="6629400" y="1435608"/>
+          <p:cNvPr id="19" name="producto ISA texto"/>
+          <p:cNvSpPr txBox="1"/>
+          <p:nvPr/>
+        </p:nvSpPr>
+        <p:spPr>
+          <a:xfrm>
+            <a:off x="6629400" y="2221992"/>
             <a:ext cx="1965960" cy="457200"/>
           </a:xfrm>
           <a:prstGeom prst="rect">
@@ -3664,7 +3637,7 @@
                 <a:ea typeface="Arial" pitchFamily="34" charset="-122"/>
                 <a:cs typeface="Arial" pitchFamily="34" charset="-120"/>
               </a:rPr>
-              <a:t>Análisis de interacción entre vehículos: detecta y notifica el riesgo de colisión y actúa sobre la velocidad.</a:t>
+              <a:t>Intervención automática: reduce la velocidad o detiene el camión ante una infracción del protocolo.</a:t>
             </a:r>
             <a:endParaRPr lang="en-US" sz="850" dirty="0"/>
           </a:p>
@@ -3672,13 +3645,13 @@
       </p:sp>
       <p:sp>
         <p:nvSpPr>
-          <p:cNvPr id="20" name="producto CMS segmento"/>
-          <p:cNvSpPr txBox="1"/>
-          <p:nvPr/>
-        </p:nvSpPr>
-        <p:spPr>
-          <a:xfrm>
-            <a:off x="6629400" y="1883664"/>
+          <p:cNvPr id="20" name="producto ISA segmento"/>
+          <p:cNvSpPr txBox="1"/>
+          <p:nvPr/>
+        </p:nvSpPr>
+        <p:spPr>
+          <a:xfrm>
+            <a:off x="6629400" y="2670048"/>
             <a:ext cx="1965960" cy="182880"/>
           </a:xfrm>
           <a:prstGeom prst="rect">
@@ -3703,7 +3676,7 @@
                 <a:ea typeface="Arial" pitchFamily="34" charset="-122"/>
                 <a:cs typeface="Arial" pitchFamily="34" charset="-120"/>
               </a:rPr>
-              <a:t>Segmento: Interaction Analysis</a:t>
+              <a:t>Segmento: Intervention</a:t>
             </a:r>
             <a:endParaRPr lang="en-US" sz="750" dirty="0"/>
           </a:p>
@@ -3711,13 +3684,13 @@
       </p:sp>
       <p:sp>
         <p:nvSpPr>
-          <p:cNvPr id="21" name="producto ISA"/>
+          <p:cNvPr id="21" name="producto FAS"/>
           <p:cNvSpPr/>
           <p:nvPr/>
         </p:nvSpPr>
         <p:spPr>
           <a:xfrm>
-            <a:off x="4206240" y="2157984"/>
+            <a:off x="4206240" y="2944368"/>
             <a:ext cx="4480560" cy="713232"/>
           </a:xfrm>
           <a:prstGeom prst="rect">
@@ -3736,13 +3709,13 @@
       </p:sp>
       <p:sp>
         <p:nvSpPr>
-          <p:cNvPr id="22" name="producto ISA marca"/>
+          <p:cNvPr id="22" name="producto FAS marca"/>
           <p:cNvSpPr/>
           <p:nvPr/>
         </p:nvSpPr>
         <p:spPr>
           <a:xfrm>
-            <a:off x="4206240" y="2157984"/>
+            <a:off x="4206240" y="2944368"/>
             <a:ext cx="54864" cy="713232"/>
           </a:xfrm>
           <a:prstGeom prst="rect">
@@ -3761,13 +3734,13 @@
       </p:sp>
       <p:sp>
         <p:nvSpPr>
-          <p:cNvPr id="23" name="producto ISA sigla"/>
-          <p:cNvSpPr txBox="1"/>
-          <p:nvPr/>
-        </p:nvSpPr>
-        <p:spPr>
-          <a:xfrm>
-            <a:off x="4389120" y="2212848"/>
+          <p:cNvPr id="23" name="producto FAS sigla"/>
+          <p:cNvSpPr txBox="1"/>
+          <p:nvPr/>
+        </p:nvSpPr>
+        <p:spPr>
+          <a:xfrm>
+            <a:off x="4389120" y="2999232"/>
             <a:ext cx="914400" cy="365760"/>
           </a:xfrm>
           <a:prstGeom prst="rect">
@@ -3792,7 +3765,7 @@
                 <a:ea typeface="Montserrat" pitchFamily="34" charset="-122"/>
                 <a:cs typeface="Montserrat" pitchFamily="34" charset="-120"/>
               </a:rPr>
-              <a:t>ISA</a:t>
+              <a:t>FAS</a:t>
             </a:r>
             <a:endParaRPr lang="en-US" sz="2200" dirty="0"/>
           </a:p>
@@ -3800,13 +3773,13 @@
       </p:sp>
       <p:sp>
         <p:nvSpPr>
-          <p:cNvPr id="24" name="producto ISA nombre fondo"/>
+          <p:cNvPr id="24" name="producto FAS nombre fondo"/>
           <p:cNvSpPr/>
           <p:nvPr/>
         </p:nvSpPr>
         <p:spPr>
           <a:xfrm>
-            <a:off x="4389120" y="2606040"/>
+            <a:off x="4389120" y="3392424"/>
             <a:ext cx="2103120" cy="201168"/>
           </a:xfrm>
           <a:prstGeom prst="rect">
@@ -3815,7 +3788,7 @@
           <a:solidFill>
             <a:srgbClr val="D40319"/>
           </a:solidFill>
-          <a:ln w="12700">
+          <a:ln w="9525">
             <a:solidFill>
               <a:srgbClr val="D40319"/>
             </a:solidFill>
@@ -3825,13 +3798,13 @@
       </p:sp>
       <p:sp>
         <p:nvSpPr>
-          <p:cNvPr id="25" name="producto ISA nombre"/>
-          <p:cNvSpPr txBox="1"/>
-          <p:nvPr/>
-        </p:nvSpPr>
-        <p:spPr>
-          <a:xfrm>
-            <a:off x="4389120" y="2606040"/>
+          <p:cNvPr id="25" name="producto FAS nombre"/>
+          <p:cNvSpPr txBox="1"/>
+          <p:nvPr/>
+        </p:nvSpPr>
+        <p:spPr>
+          <a:xfrm>
+            <a:off x="4389120" y="3392424"/>
             <a:ext cx="2103120" cy="201168"/>
           </a:xfrm>
           <a:prstGeom prst="rect">
@@ -3856,7 +3829,7 @@
                 <a:ea typeface="Montserrat" pitchFamily="34" charset="-122"/>
                 <a:cs typeface="Montserrat" pitchFamily="34" charset="-120"/>
               </a:rPr>
-              <a:t>INTERVENTION SAFETY ASSISTANT</a:t>
+              <a:t>FATIGUE AWARENESS SYSTEM</a:t>
             </a:r>
             <a:endParaRPr lang="en-US" sz="700" dirty="0"/>
           </a:p>
@@ -3864,13 +3837,13 @@
       </p:sp>
       <p:sp>
         <p:nvSpPr>
-          <p:cNvPr id="26" name="producto ISA texto"/>
-          <p:cNvSpPr txBox="1"/>
-          <p:nvPr/>
-        </p:nvSpPr>
-        <p:spPr>
-          <a:xfrm>
-            <a:off x="6629400" y="2221992"/>
+          <p:cNvPr id="26" name="producto FAS texto"/>
+          <p:cNvSpPr txBox="1"/>
+          <p:nvPr/>
+        </p:nvSpPr>
+        <p:spPr>
+          <a:xfrm>
+            <a:off x="6629400" y="3008376"/>
             <a:ext cx="1965960" cy="457200"/>
           </a:xfrm>
           <a:prstGeom prst="rect">
@@ -3895,7 +3868,7 @@
                 <a:ea typeface="Arial" pitchFamily="34" charset="-122"/>
                 <a:cs typeface="Arial" pitchFamily="34" charset="-120"/>
               </a:rPr>
-              <a:t>Intervención automática: reduce la velocidad o detiene el camión ante una infracción del protocolo.</a:t>
+              <a:t>Detecta fatiga y distracción del operador: somnolencia, uso del teléfono y postura.</a:t>
             </a:r>
             <a:endParaRPr lang="en-US" sz="850" dirty="0"/>
           </a:p>
@@ -3903,13 +3876,13 @@
       </p:sp>
       <p:sp>
         <p:nvSpPr>
-          <p:cNvPr id="27" name="producto ISA segmento"/>
-          <p:cNvSpPr txBox="1"/>
-          <p:nvPr/>
-        </p:nvSpPr>
-        <p:spPr>
-          <a:xfrm>
-            <a:off x="6629400" y="2670048"/>
+          <p:cNvPr id="27" name="producto FAS segmento"/>
+          <p:cNvSpPr txBox="1"/>
+          <p:nvPr/>
+        </p:nvSpPr>
+        <p:spPr>
+          <a:xfrm>
+            <a:off x="6629400" y="3456432"/>
             <a:ext cx="1965960" cy="182880"/>
           </a:xfrm>
           <a:prstGeom prst="rect">
@@ -3934,7 +3907,7 @@
                 <a:ea typeface="Arial" pitchFamily="34" charset="-122"/>
                 <a:cs typeface="Arial" pitchFamily="34" charset="-120"/>
               </a:rPr>
-              <a:t>Segmento: Intervention</a:t>
+              <a:t>Segmento: Fatiga</a:t>
             </a:r>
             <a:endParaRPr lang="en-US" sz="750" dirty="0"/>
           </a:p>
@@ -3948,14 +3921,14 @@
         </p:nvSpPr>
         <p:spPr>
           <a:xfrm>
-            <a:off x="4206240" y="2944368"/>
+            <a:off x="4206240" y="3730752"/>
             <a:ext cx="4480560" cy="713232"/>
           </a:xfrm>
           <a:prstGeom prst="rect">
             <a:avLst/>
           </a:prstGeom>
           <a:solidFill>
-            <a:srgbClr val="FFFFFF"/>
+            <a:srgbClr val="F4F4F4"/>
           </a:solidFill>
           <a:ln w="9525">
             <a:solidFill>
@@ -3973,18 +3946,18 @@
         </p:nvSpPr>
         <p:spPr>
           <a:xfrm>
-            <a:off x="4206240" y="2944368"/>
+            <a:off x="4206240" y="3730752"/>
             <a:ext cx="54864" cy="713232"/>
           </a:xfrm>
           <a:prstGeom prst="rect">
             <a:avLst/>
           </a:prstGeom>
           <a:solidFill>
-            <a:srgbClr val="D40319"/>
+            <a:srgbClr val="0F1C2C"/>
           </a:solidFill>
           <a:ln w="12700">
             <a:solidFill>
-              <a:srgbClr val="D40319"/>
+              <a:srgbClr val="0F1C2C"/>
             </a:solidFill>
             <a:prstDash val="solid"/>
           </a:ln>
@@ -3998,7 +3971,7 @@
         </p:nvSpPr>
         <p:spPr>
           <a:xfrm>
-            <a:off x="4389120" y="2999232"/>
+            <a:off x="4389120" y="3785616"/>
             <a:ext cx="914400" cy="365760"/>
           </a:xfrm>
           <a:prstGeom prst="rect">
@@ -4017,7 +3990,7 @@
             <a:r>
               <a:rPr lang="en-US" sz="2200" b="1" dirty="0">
                 <a:solidFill>
-                  <a:srgbClr val="D40319"/>
+                  <a:srgbClr val="0F1C2C"/>
                 </a:solidFill>
                 <a:latin typeface="Montserrat" pitchFamily="34" charset="0"/>
                 <a:ea typeface="Montserrat" pitchFamily="34" charset="-122"/>
@@ -4037,18 +4010,18 @@
         </p:nvSpPr>
         <p:spPr>
           <a:xfrm>
-            <a:off x="4389120" y="3392424"/>
+            <a:off x="4389120" y="4178808"/>
             <a:ext cx="2103120" cy="201168"/>
           </a:xfrm>
           <a:prstGeom prst="rect">
             <a:avLst/>
           </a:prstGeom>
           <a:solidFill>
-            <a:srgbClr val="D40319"/>
+            <a:srgbClr val="FFFFFF"/>
           </a:solidFill>
           <a:ln w="12700">
             <a:solidFill>
-              <a:srgbClr val="D40319"/>
+              <a:srgbClr val="0F1C2C"/>
             </a:solidFill>
             <a:prstDash val="solid"/>
           </a:ln>
@@ -4062,7 +4035,7 @@
         </p:nvSpPr>
         <p:spPr>
           <a:xfrm>
-            <a:off x="4389120" y="3392424"/>
+            <a:off x="4389120" y="4178808"/>
             <a:ext cx="2103120" cy="201168"/>
           </a:xfrm>
           <a:prstGeom prst="rect">
@@ -4081,7 +4054,7 @@
             <a:r>
               <a:rPr lang="en-US" sz="700" b="1" spc="80" kern="0" dirty="0">
                 <a:solidFill>
-                  <a:srgbClr val="FFFFFF"/>
+                  <a:srgbClr val="0F1C2C"/>
                 </a:solidFill>
                 <a:latin typeface="Montserrat" pitchFamily="34" charset="0"/>
                 <a:ea typeface="Montserrat" pitchFamily="34" charset="-122"/>
@@ -4101,7 +4074,7 @@
         </p:nvSpPr>
         <p:spPr>
           <a:xfrm>
-            <a:off x="6629400" y="3008376"/>
+            <a:off x="6629400" y="3794760"/>
             <a:ext cx="1965960" cy="457200"/>
           </a:xfrm>
           <a:prstGeom prst="rect">
@@ -4126,7 +4099,7 @@
                 <a:ea typeface="Arial" pitchFamily="34" charset="-122"/>
                 <a:cs typeface="Arial" pitchFamily="34" charset="-120"/>
               </a:rPr>
-              <a:t>Monitoriza la vibración de cuerpo entero que recibe el operador durante la marcha.</a:t>
+              <a:t>Sistema pasivo: no alerta ni interviene. Registra la vibración de cuerpo entero del operador en todas las pruebas.</a:t>
             </a:r>
             <a:endParaRPr lang="en-US" sz="850" dirty="0"/>
           </a:p>
@@ -4140,7 +4113,7 @@
         </p:nvSpPr>
         <p:spPr>
           <a:xfrm>
-            <a:off x="6629400" y="3456432"/>
+            <a:off x="6629400" y="4242816"/>
             <a:ext cx="1965960" cy="182880"/>
           </a:xfrm>
           <a:prstGeom prst="rect">
@@ -4159,244 +4132,13 @@
             <a:r>
               <a:rPr lang="en-US" sz="750" dirty="0">
                 <a:solidFill>
-                  <a:srgbClr val="8C8C8C"/>
+                  <a:srgbClr val="0F1C2C"/>
                 </a:solidFill>
                 <a:latin typeface="Arial" pitchFamily="34" charset="0"/>
                 <a:ea typeface="Arial" pitchFamily="34" charset="-122"/>
                 <a:cs typeface="Arial" pitchFamily="34" charset="-120"/>
               </a:rPr>
-              <a:t>Segmento: Operator Conditions</a:t>
-            </a:r>
-            <a:endParaRPr lang="en-US" sz="750" dirty="0"/>
-          </a:p>
-        </p:txBody>
-      </p:sp>
-      <p:sp>
-        <p:nvSpPr>
-          <p:cNvPr id="35" name="producto FAS"/>
-          <p:cNvSpPr/>
-          <p:nvPr/>
-        </p:nvSpPr>
-        <p:spPr>
-          <a:xfrm>
-            <a:off x="4206240" y="3730752"/>
-            <a:ext cx="4480560" cy="713232"/>
-          </a:xfrm>
-          <a:prstGeom prst="rect">
-            <a:avLst/>
-          </a:prstGeom>
-          <a:solidFill>
-            <a:srgbClr val="FFFFFF"/>
-          </a:solidFill>
-          <a:ln w="9525">
-            <a:solidFill>
-              <a:srgbClr val="E3E3E3"/>
-            </a:solidFill>
-            <a:prstDash val="solid"/>
-          </a:ln>
-        </p:spPr>
-      </p:sp>
-      <p:sp>
-        <p:nvSpPr>
-          <p:cNvPr id="36" name="producto FAS marca"/>
-          <p:cNvSpPr/>
-          <p:nvPr/>
-        </p:nvSpPr>
-        <p:spPr>
-          <a:xfrm>
-            <a:off x="4206240" y="3730752"/>
-            <a:ext cx="54864" cy="713232"/>
-          </a:xfrm>
-          <a:prstGeom prst="rect">
-            <a:avLst/>
-          </a:prstGeom>
-          <a:solidFill>
-            <a:srgbClr val="D40319"/>
-          </a:solidFill>
-          <a:ln w="12700">
-            <a:solidFill>
-              <a:srgbClr val="D40319"/>
-            </a:solidFill>
-            <a:prstDash val="solid"/>
-          </a:ln>
-        </p:spPr>
-      </p:sp>
-      <p:sp>
-        <p:nvSpPr>
-          <p:cNvPr id="37" name="producto FAS sigla"/>
-          <p:cNvSpPr txBox="1"/>
-          <p:nvPr/>
-        </p:nvSpPr>
-        <p:spPr>
-          <a:xfrm>
-            <a:off x="4389120" y="3785616"/>
-            <a:ext cx="914400" cy="365760"/>
-          </a:xfrm>
-          <a:prstGeom prst="rect">
-            <a:avLst/>
-          </a:prstGeom>
-          <a:noFill/>
-          <a:ln/>
-        </p:spPr>
-        <p:txBody>
-          <a:bodyPr wrap="square" lIns="0" tIns="0" rIns="0" bIns="0" rtlCol="0" anchor="ctr"/>
-          <a:lstStyle/>
-          <a:p>
-            <a:pPr indent="0" marL="0">
-              <a:buNone/>
-            </a:pPr>
-            <a:r>
-              <a:rPr lang="en-US" sz="2200" b="1" dirty="0">
-                <a:solidFill>
-                  <a:srgbClr val="D40319"/>
-                </a:solidFill>
-                <a:latin typeface="Montserrat" pitchFamily="34" charset="0"/>
-                <a:ea typeface="Montserrat" pitchFamily="34" charset="-122"/>
-                <a:cs typeface="Montserrat" pitchFamily="34" charset="-120"/>
-              </a:rPr>
-              <a:t>FAS</a:t>
-            </a:r>
-            <a:endParaRPr lang="en-US" sz="2200" dirty="0"/>
-          </a:p>
-        </p:txBody>
-      </p:sp>
-      <p:sp>
-        <p:nvSpPr>
-          <p:cNvPr id="38" name="producto FAS nombre fondo"/>
-          <p:cNvSpPr/>
-          <p:nvPr/>
-        </p:nvSpPr>
-        <p:spPr>
-          <a:xfrm>
-            <a:off x="4389120" y="4178808"/>
-            <a:ext cx="2103120" cy="201168"/>
-          </a:xfrm>
-          <a:prstGeom prst="rect">
-            <a:avLst/>
-          </a:prstGeom>
-          <a:solidFill>
-            <a:srgbClr val="D40319"/>
-          </a:solidFill>
-          <a:ln w="12700">
-            <a:solidFill>
-              <a:srgbClr val="D40319"/>
-            </a:solidFill>
-            <a:prstDash val="solid"/>
-          </a:ln>
-        </p:spPr>
-      </p:sp>
-      <p:sp>
-        <p:nvSpPr>
-          <p:cNvPr id="39" name="producto FAS nombre"/>
-          <p:cNvSpPr txBox="1"/>
-          <p:nvPr/>
-        </p:nvSpPr>
-        <p:spPr>
-          <a:xfrm>
-            <a:off x="4389120" y="4178808"/>
-            <a:ext cx="2103120" cy="201168"/>
-          </a:xfrm>
-          <a:prstGeom prst="rect">
-            <a:avLst/>
-          </a:prstGeom>
-          <a:noFill/>
-          <a:ln/>
-        </p:spPr>
-        <p:txBody>
-          <a:bodyPr wrap="square" lIns="0" tIns="0" rIns="0" bIns="0" rtlCol="0" anchor="ctr"/>
-          <a:lstStyle/>
-          <a:p>
-            <a:pPr algn="ctr" indent="0" marL="0">
-              <a:buNone/>
-            </a:pPr>
-            <a:r>
-              <a:rPr lang="en-US" sz="700" b="1" spc="80" kern="0" dirty="0">
-                <a:solidFill>
-                  <a:srgbClr val="FFFFFF"/>
-                </a:solidFill>
-                <a:latin typeface="Montserrat" pitchFamily="34" charset="0"/>
-                <a:ea typeface="Montserrat" pitchFamily="34" charset="-122"/>
-                <a:cs typeface="Montserrat" pitchFamily="34" charset="-120"/>
-              </a:rPr>
-              <a:t>FATIGUE AWARENESS SYSTEM</a:t>
-            </a:r>
-            <a:endParaRPr lang="en-US" sz="700" dirty="0"/>
-          </a:p>
-        </p:txBody>
-      </p:sp>
-      <p:sp>
-        <p:nvSpPr>
-          <p:cNvPr id="40" name="producto FAS texto"/>
-          <p:cNvSpPr txBox="1"/>
-          <p:nvPr/>
-        </p:nvSpPr>
-        <p:spPr>
-          <a:xfrm>
-            <a:off x="6629400" y="3794760"/>
-            <a:ext cx="1965960" cy="457200"/>
-          </a:xfrm>
-          <a:prstGeom prst="rect">
-            <a:avLst/>
-          </a:prstGeom>
-          <a:noFill/>
-          <a:ln/>
-        </p:spPr>
-        <p:txBody>
-          <a:bodyPr wrap="square" lIns="0" tIns="0" rIns="0" bIns="0" rtlCol="0" anchor="t"/>
-          <a:lstStyle/>
-          <a:p>
-            <a:pPr indent="0" marL="0">
-              <a:buNone/>
-            </a:pPr>
-            <a:r>
-              <a:rPr lang="en-US" sz="850" dirty="0">
-                <a:solidFill>
-                  <a:srgbClr val="5C5C5C"/>
-                </a:solidFill>
-                <a:latin typeface="Arial" pitchFamily="34" charset="0"/>
-                <a:ea typeface="Arial" pitchFamily="34" charset="-122"/>
-                <a:cs typeface="Arial" pitchFamily="34" charset="-120"/>
-              </a:rPr>
-              <a:t>Detecta fatiga y distracción del operador: somnolencia, uso del teléfono y postura.</a:t>
-            </a:r>
-            <a:endParaRPr lang="en-US" sz="850" dirty="0"/>
-          </a:p>
-        </p:txBody>
-      </p:sp>
-      <p:sp>
-        <p:nvSpPr>
-          <p:cNvPr id="41" name="producto FAS segmento"/>
-          <p:cNvSpPr txBox="1"/>
-          <p:nvPr/>
-        </p:nvSpPr>
-        <p:spPr>
-          <a:xfrm>
-            <a:off x="6629400" y="4242816"/>
-            <a:ext cx="1965960" cy="182880"/>
-          </a:xfrm>
-          <a:prstGeom prst="rect">
-            <a:avLst/>
-          </a:prstGeom>
-          <a:noFill/>
-          <a:ln/>
-        </p:spPr>
-        <p:txBody>
-          <a:bodyPr wrap="square" lIns="0" tIns="0" rIns="0" bIns="0" rtlCol="0" anchor="t"/>
-          <a:lstStyle/>
-          <a:p>
-            <a:pPr indent="0" marL="0">
-              <a:buNone/>
-            </a:pPr>
-            <a:r>
-              <a:rPr lang="en-US" sz="750" dirty="0">
-                <a:solidFill>
-                  <a:srgbClr val="8C8C8C"/>
-                </a:solidFill>
-                <a:latin typeface="Arial" pitchFamily="34" charset="0"/>
-                <a:ea typeface="Arial" pitchFamily="34" charset="-122"/>
-                <a:cs typeface="Arial" pitchFamily="34" charset="-120"/>
-              </a:rPr>
-              <a:t>Segmento: Fatiga</a:t>
+              <a:t>Monitorización pasiva · Operator Conditions</a:t>
             </a:r>
             <a:endParaRPr lang="en-US" sz="750" dirty="0"/>
           </a:p>
@@ -4481,7 +4223,7 @@
         <p:spPr>
           <a:xfrm>
             <a:off x="1920240" y="274320"/>
-            <a:ext cx="5760720" cy="502920"/>
+            <a:ext cx="5394960" cy="502920"/>
           </a:xfrm>
           <a:prstGeom prst="rect">
             <a:avLst/>
@@ -4505,7 +4247,7 @@
                 <a:ea typeface="Montserrat" pitchFamily="34" charset="-122"/>
                 <a:cs typeface="Montserrat" pitchFamily="34" charset="-120"/>
               </a:rPr>
-              <a:t>CÓMO SE DESARROLLAN </a:t>
+              <a:t>LA HISTORIA </a:t>
             </a:r>
             <a:pPr algn="l" indent="0" marL="0">
               <a:buNone/>
@@ -4519,7 +4261,7 @@
                 <a:ea typeface="Montserrat" pitchFamily="34" charset="-122"/>
                 <a:cs typeface="Montserrat" pitchFamily="34" charset="-120"/>
               </a:rPr>
-              <a:t>LAS PRUEBAS</a:t>
+              <a:t>DE LA PRUEBA</a:t>
             </a:r>
             <a:endParaRPr lang="en-US" sz="2000" dirty="0"/>
           </a:p>
@@ -4527,14 +4269,14 @@
       </p:sp>
       <p:sp>
         <p:nvSpPr>
-          <p:cNvPr id="3" name="principio 1"/>
+          <p:cNvPr id="3" name="etapa 1"/>
           <p:cNvSpPr/>
           <p:nvPr/>
         </p:nvSpPr>
         <p:spPr>
           <a:xfrm>
             <a:off x="457200" y="1097280"/>
-            <a:ext cx="2651760" cy="1920240"/>
+            <a:ext cx="2651760" cy="2514600"/>
           </a:xfrm>
           <a:prstGeom prst="rect">
             <a:avLst/>
@@ -4550,44 +4292,20 @@
           </a:ln>
         </p:spPr>
       </p:sp>
-      <p:pic>
-        <p:nvPicPr>
-          <p:cNvPr id="4" name="icono principio 1" descr="preencoded.png">    </p:cNvPr>
-          <p:cNvPicPr>
-            <a:picLocks noChangeAspect="1"/>
-          </p:cNvPicPr>
-          <p:nvPr/>
-        </p:nvPicPr>
-        <p:blipFill>
-          <a:blip r:embed="rId1"/>
-          <a:stretch>
-            <a:fillRect/>
-          </a:stretch>
-        </p:blipFill>
-        <p:spPr>
-          <a:xfrm>
-            <a:off x="685800" y="1325880"/>
+      <p:sp>
+        <p:nvSpPr>
+          <p:cNvPr id="4" name="etapa 1 número"/>
+          <p:cNvSpPr txBox="1"/>
+          <p:nvPr/>
+        </p:nvSpPr>
+        <p:spPr>
+          <a:xfrm>
+            <a:off x="685800" y="1234440"/>
             <a:ext cx="457200" cy="457200"/>
           </a:xfrm>
           <a:prstGeom prst="rect">
             <a:avLst/>
           </a:prstGeom>
-        </p:spPr>
-      </p:pic>
-      <p:sp>
-        <p:nvSpPr>
-          <p:cNvPr id="5" name="título principio 1"/>
-          <p:cNvSpPr txBox="1"/>
-          <p:nvPr/>
-        </p:nvSpPr>
-        <p:spPr>
-          <a:xfrm>
-            <a:off x="685800" y="1874520"/>
-            <a:ext cx="2194560" cy="457200"/>
-          </a:xfrm>
-          <a:prstGeom prst="rect">
-            <a:avLst/>
-          </a:prstGeom>
           <a:noFill/>
           <a:ln/>
         </p:spPr>
@@ -4599,30 +4317,30 @@
               <a:buNone/>
             </a:pPr>
             <a:r>
-              <a:rPr lang="en-US" sz="1000" b="1" dirty="0">
-                <a:solidFill>
-                  <a:srgbClr val="0F1C2C"/>
+              <a:rPr lang="en-US" sz="2600" b="1" dirty="0">
+                <a:solidFill>
+                  <a:srgbClr val="D40319"/>
                 </a:solidFill>
                 <a:latin typeface="Montserrat" pitchFamily="34" charset="0"/>
                 <a:ea typeface="Montserrat" pitchFamily="34" charset="-122"/>
                 <a:cs typeface="Montserrat" pitchFamily="34" charset="-120"/>
               </a:rPr>
-              <a:t>CADA CAMIÓN, EN SU CARRIL</a:t>
-            </a:r>
-            <a:endParaRPr lang="en-US" sz="1000" dirty="0"/>
-          </a:p>
-        </p:txBody>
-      </p:sp>
-      <p:sp>
-        <p:nvSpPr>
-          <p:cNvPr id="6" name="texto principio 1"/>
-          <p:cNvSpPr txBox="1"/>
-          <p:nvPr/>
-        </p:nvSpPr>
-        <p:spPr>
-          <a:xfrm>
-            <a:off x="685800" y="2359152"/>
-            <a:ext cx="2194560" cy="621792"/>
+              <a:t>1</a:t>
+            </a:r>
+            <a:endParaRPr lang="en-US" sz="2600" dirty="0"/>
+          </a:p>
+        </p:txBody>
+      </p:sp>
+      <p:sp>
+        <p:nvSpPr>
+          <p:cNvPr id="5" name="etapa 1 kicker"/>
+          <p:cNvSpPr txBox="1"/>
+          <p:nvPr/>
+        </p:nvSpPr>
+        <p:spPr>
+          <a:xfrm>
+            <a:off x="1188720" y="1298448"/>
+            <a:ext cx="1737360" cy="201168"/>
           </a:xfrm>
           <a:prstGeom prst="rect">
             <a:avLst/>
@@ -4638,15 +4356,54 @@
               <a:buNone/>
             </a:pPr>
             <a:r>
-              <a:rPr lang="en-US" sz="1000" dirty="0">
-                <a:solidFill>
-                  <a:srgbClr val="5C5C5C"/>
+              <a:rPr lang="en-US" sz="800" spc="250" kern="0" dirty="0">
+                <a:solidFill>
+                  <a:srgbClr val="8C8C8C"/>
                 </a:solidFill>
                 <a:latin typeface="Arial" pitchFamily="34" charset="0"/>
                 <a:ea typeface="Arial" pitchFamily="34" charset="-122"/>
                 <a:cs typeface="Arial" pitchFamily="34" charset="-120"/>
               </a:rPr>
-              <a:t>Se respeta el carril de cada camión en todas las pruebas. La interacción es segura: no hay enfrentamientos directos.</a:t>
+              <a:t>BASE</a:t>
+            </a:r>
+            <a:endParaRPr lang="en-US" sz="800" dirty="0"/>
+          </a:p>
+        </p:txBody>
+      </p:sp>
+      <p:sp>
+        <p:nvSpPr>
+          <p:cNvPr id="6" name="etapa 1 título"/>
+          <p:cNvSpPr txBox="1"/>
+          <p:nvPr/>
+        </p:nvSpPr>
+        <p:spPr>
+          <a:xfrm>
+            <a:off x="1188720" y="1481328"/>
+            <a:ext cx="1783080" cy="457200"/>
+          </a:xfrm>
+          <a:prstGeom prst="rect">
+            <a:avLst/>
+          </a:prstGeom>
+          <a:noFill/>
+          <a:ln/>
+        </p:spPr>
+        <p:txBody>
+          <a:bodyPr wrap="square" lIns="0" tIns="0" rIns="0" bIns="0" rtlCol="0" anchor="t"/>
+          <a:lstStyle/>
+          <a:p>
+            <a:pPr indent="0" marL="0">
+              <a:buNone/>
+            </a:pPr>
+            <a:r>
+              <a:rPr lang="en-US" sz="1000" b="1" dirty="0">
+                <a:solidFill>
+                  <a:srgbClr val="0F1C2C"/>
+                </a:solidFill>
+                <a:latin typeface="Montserrat" pitchFamily="34" charset="0"/>
+                <a:ea typeface="Montserrat" pitchFamily="34" charset="-122"/>
+                <a:cs typeface="Montserrat" pitchFamily="34" charset="-120"/>
+              </a:rPr>
+              <a:t>ASÍ FUNCIONA EL ANTICOLISIÓN</a:t>
             </a:r>
             <a:endParaRPr lang="en-US" sz="1000" dirty="0"/>
           </a:p>
@@ -4654,14 +4411,180 @@
       </p:sp>
       <p:sp>
         <p:nvSpPr>
-          <p:cNvPr id="7" name="principio 2"/>
+          <p:cNvPr id="7" name="etapa 1 texto"/>
+          <p:cNvSpPr txBox="1"/>
+          <p:nvPr/>
+        </p:nvSpPr>
+        <p:spPr>
+          <a:xfrm>
+            <a:off x="685800" y="2011680"/>
+            <a:ext cx="2194560" cy="1005840"/>
+          </a:xfrm>
+          <a:prstGeom prst="rect">
+            <a:avLst/>
+          </a:prstGeom>
+          <a:noFill/>
+          <a:ln/>
+        </p:spPr>
+        <p:txBody>
+          <a:bodyPr wrap="square" lIns="0" tIns="0" rIns="0" bIns="0" rtlCol="0" anchor="t"/>
+          <a:lstStyle/>
+          <a:p>
+            <a:pPr indent="0" marL="0">
+              <a:buNone/>
+            </a:pPr>
+            <a:r>
+              <a:rPr lang="en-US" sz="1000" dirty="0">
+                <a:solidFill>
+                  <a:srgbClr val="5C5C5C"/>
+                </a:solidFill>
+                <a:latin typeface="Arial" pitchFamily="34" charset="0"/>
+                <a:ea typeface="Arial" pitchFamily="34" charset="-122"/>
+                <a:cs typeface="Arial" pitchFamily="34" charset="-120"/>
+              </a:rPr>
+              <a:t>Los camiones se cruzan por carriles distintos. CMS detecta la interacción e informa al operador: no hay riesgo, no hay intervención.</a:t>
+            </a:r>
+            <a:endParaRPr lang="en-US" sz="1000" dirty="0"/>
+          </a:p>
+        </p:txBody>
+      </p:sp>
+      <p:sp>
+        <p:nvSpPr>
+          <p:cNvPr id="8" name="etapa 1 pruebas"/>
+          <p:cNvSpPr txBox="1"/>
+          <p:nvPr/>
+        </p:nvSpPr>
+        <p:spPr>
+          <a:xfrm>
+            <a:off x="685800" y="3035808"/>
+            <a:ext cx="1188720" cy="201168"/>
+          </a:xfrm>
+          <a:prstGeom prst="rect">
+            <a:avLst/>
+          </a:prstGeom>
+          <a:noFill/>
+          <a:ln/>
+        </p:spPr>
+        <p:txBody>
+          <a:bodyPr wrap="square" lIns="0" tIns="0" rIns="0" bIns="0" rtlCol="0" anchor="t"/>
+          <a:lstStyle/>
+          <a:p>
+            <a:pPr indent="0" marL="0">
+              <a:buNone/>
+            </a:pPr>
+            <a:r>
+              <a:rPr lang="en-US" sz="850" dirty="0">
+                <a:solidFill>
+                  <a:srgbClr val="8C8C8C"/>
+                </a:solidFill>
+                <a:latin typeface="Arial" pitchFamily="34" charset="0"/>
+                <a:ea typeface="Arial" pitchFamily="34" charset="-122"/>
+                <a:cs typeface="Arial" pitchFamily="34" charset="-120"/>
+              </a:rPr>
+              <a:t>Prueba 1</a:t>
+            </a:r>
+            <a:endParaRPr lang="en-US" sz="850" dirty="0"/>
+          </a:p>
+        </p:txBody>
+      </p:sp>
+      <p:sp>
+        <p:nvSpPr>
+          <p:cNvPr id="9" name="etapa 1 producto CMS fondo"/>
           <p:cNvSpPr/>
           <p:nvPr/>
         </p:nvSpPr>
         <p:spPr>
           <a:xfrm>
+            <a:off x="685800" y="3255264"/>
+            <a:ext cx="548640" cy="237744"/>
+          </a:xfrm>
+          <a:prstGeom prst="rect">
+            <a:avLst/>
+          </a:prstGeom>
+          <a:solidFill>
+            <a:srgbClr val="D40319"/>
+          </a:solidFill>
+          <a:ln w="9525">
+            <a:solidFill>
+              <a:srgbClr val="D40319"/>
+            </a:solidFill>
+            <a:prstDash val="solid"/>
+          </a:ln>
+        </p:spPr>
+      </p:sp>
+      <p:sp>
+        <p:nvSpPr>
+          <p:cNvPr id="10" name="etapa 1 producto CMS"/>
+          <p:cNvSpPr txBox="1"/>
+          <p:nvPr/>
+        </p:nvSpPr>
+        <p:spPr>
+          <a:xfrm>
+            <a:off x="685800" y="3255264"/>
+            <a:ext cx="548640" cy="237744"/>
+          </a:xfrm>
+          <a:prstGeom prst="rect">
+            <a:avLst/>
+          </a:prstGeom>
+          <a:noFill/>
+          <a:ln/>
+        </p:spPr>
+        <p:txBody>
+          <a:bodyPr wrap="square" lIns="0" tIns="0" rIns="0" bIns="0" rtlCol="0" anchor="ctr"/>
+          <a:lstStyle/>
+          <a:p>
+            <a:pPr algn="ctr" indent="0" marL="0">
+              <a:buNone/>
+            </a:pPr>
+            <a:r>
+              <a:rPr lang="en-US" sz="850" b="1" spc="100" kern="0" dirty="0">
+                <a:solidFill>
+                  <a:srgbClr val="FFFFFF"/>
+                </a:solidFill>
+                <a:latin typeface="Montserrat" pitchFamily="34" charset="0"/>
+                <a:ea typeface="Montserrat" pitchFamily="34" charset="-122"/>
+                <a:cs typeface="Montserrat" pitchFamily="34" charset="-120"/>
+              </a:rPr>
+              <a:t>CMS</a:t>
+            </a:r>
+            <a:endParaRPr lang="en-US" sz="850" dirty="0"/>
+          </a:p>
+        </p:txBody>
+      </p:sp>
+      <p:sp>
+        <p:nvSpPr>
+          <p:cNvPr id="11" name="flecha etapa 1"/>
+          <p:cNvSpPr/>
+          <p:nvPr/>
+        </p:nvSpPr>
+        <p:spPr>
+          <a:xfrm>
+            <a:off x="3127248" y="2354580"/>
+            <a:ext cx="100584" cy="0"/>
+          </a:xfrm>
+          <a:prstGeom prst="line">
+            <a:avLst/>
+          </a:prstGeom>
+          <a:noFill/>
+          <a:ln w="19050">
+            <a:solidFill>
+              <a:srgbClr val="D40319"/>
+            </a:solidFill>
+            <a:prstDash val="solid"/>
+            <a:tailEnd type="triangle"/>
+          </a:ln>
+        </p:spPr>
+      </p:sp>
+      <p:sp>
+        <p:nvSpPr>
+          <p:cNvPr id="12" name="etapa 2"/>
+          <p:cNvSpPr/>
+          <p:nvPr/>
+        </p:nvSpPr>
+        <p:spPr>
+          <a:xfrm>
             <a:off x="3246120" y="1097280"/>
-            <a:ext cx="2651760" cy="1920240"/>
+            <a:ext cx="2651760" cy="2514600"/>
           </a:xfrm>
           <a:prstGeom prst="rect">
             <a:avLst/>
@@ -4677,44 +4600,20 @@
           </a:ln>
         </p:spPr>
       </p:sp>
-      <p:pic>
-        <p:nvPicPr>
-          <p:cNvPr id="8" name="icono principio 2" descr="preencoded.png">    </p:cNvPr>
-          <p:cNvPicPr>
-            <a:picLocks noChangeAspect="1"/>
-          </p:cNvPicPr>
-          <p:nvPr/>
-        </p:nvPicPr>
-        <p:blipFill>
-          <a:blip r:embed="rId2"/>
-          <a:stretch>
-            <a:fillRect/>
-          </a:stretch>
-        </p:blipFill>
-        <p:spPr>
-          <a:xfrm>
-            <a:off x="3474720" y="1325880"/>
+      <p:sp>
+        <p:nvSpPr>
+          <p:cNvPr id="13" name="etapa 2 número"/>
+          <p:cNvSpPr txBox="1"/>
+          <p:nvPr/>
+        </p:nvSpPr>
+        <p:spPr>
+          <a:xfrm>
+            <a:off x="3474720" y="1234440"/>
             <a:ext cx="457200" cy="457200"/>
           </a:xfrm>
           <a:prstGeom prst="rect">
             <a:avLst/>
           </a:prstGeom>
-        </p:spPr>
-      </p:pic>
-      <p:sp>
-        <p:nvSpPr>
-          <p:cNvPr id="9" name="título principio 2"/>
-          <p:cNvSpPr txBox="1"/>
-          <p:nvPr/>
-        </p:nvSpPr>
-        <p:spPr>
-          <a:xfrm>
-            <a:off x="3474720" y="1874520"/>
-            <a:ext cx="2194560" cy="457200"/>
-          </a:xfrm>
-          <a:prstGeom prst="rect">
-            <a:avLst/>
-          </a:prstGeom>
           <a:noFill/>
           <a:ln/>
         </p:spPr>
@@ -4726,30 +4625,30 @@
               <a:buNone/>
             </a:pPr>
             <a:r>
-              <a:rPr lang="en-US" sz="1000" b="1" dirty="0">
-                <a:solidFill>
-                  <a:srgbClr val="0F1C2C"/>
+              <a:rPr lang="en-US" sz="2600" b="1" dirty="0">
+                <a:solidFill>
+                  <a:srgbClr val="D40319"/>
                 </a:solidFill>
                 <a:latin typeface="Montserrat" pitchFamily="34" charset="0"/>
                 <a:ea typeface="Montserrat" pitchFamily="34" charset="-122"/>
                 <a:cs typeface="Montserrat" pitchFamily="34" charset="-120"/>
               </a:rPr>
-              <a:t>ESPACIO PARA MANIOBRAR</a:t>
-            </a:r>
-            <a:endParaRPr lang="en-US" sz="1000" dirty="0"/>
-          </a:p>
-        </p:txBody>
-      </p:sp>
-      <p:sp>
-        <p:nvSpPr>
-          <p:cNvPr id="10" name="texto principio 2"/>
-          <p:cNvSpPr txBox="1"/>
-          <p:nvPr/>
-        </p:nvSpPr>
-        <p:spPr>
-          <a:xfrm>
-            <a:off x="3474720" y="2359152"/>
-            <a:ext cx="2194560" cy="621792"/>
+              <a:t>2</a:t>
+            </a:r>
+            <a:endParaRPr lang="en-US" sz="2600" dirty="0"/>
+          </a:p>
+        </p:txBody>
+      </p:sp>
+      <p:sp>
+        <p:nvSpPr>
+          <p:cNvPr id="14" name="etapa 2 kicker"/>
+          <p:cNvSpPr txBox="1"/>
+          <p:nvPr/>
+        </p:nvSpPr>
+        <p:spPr>
+          <a:xfrm>
+            <a:off x="3977640" y="1298448"/>
+            <a:ext cx="1737360" cy="201168"/>
           </a:xfrm>
           <a:prstGeom prst="rect">
             <a:avLst/>
@@ -4765,15 +4664,54 @@
               <a:buNone/>
             </a:pPr>
             <a:r>
-              <a:rPr lang="en-US" sz="1000" dirty="0">
-                <a:solidFill>
-                  <a:srgbClr val="5C5C5C"/>
+              <a:rPr lang="en-US" sz="800" spc="250" kern="0" dirty="0">
+                <a:solidFill>
+                  <a:srgbClr val="8C8C8C"/>
                 </a:solidFill>
                 <a:latin typeface="Arial" pitchFamily="34" charset="0"/>
                 <a:ea typeface="Arial" pitchFamily="34" charset="-122"/>
                 <a:cs typeface="Arial" pitchFamily="34" charset="-120"/>
               </a:rPr>
-              <a:t>Se dejan distancias suficientes para que cada camión pueda maniobrar sin invadir el carril del otro.</a:t>
+              <a:t>RIESGO REAL</a:t>
+            </a:r>
+            <a:endParaRPr lang="en-US" sz="800" dirty="0"/>
+          </a:p>
+        </p:txBody>
+      </p:sp>
+      <p:sp>
+        <p:nvSpPr>
+          <p:cNvPr id="15" name="etapa 2 título"/>
+          <p:cNvSpPr txBox="1"/>
+          <p:nvPr/>
+        </p:nvSpPr>
+        <p:spPr>
+          <a:xfrm>
+            <a:off x="3977640" y="1481328"/>
+            <a:ext cx="1783080" cy="457200"/>
+          </a:xfrm>
+          <a:prstGeom prst="rect">
+            <a:avLst/>
+          </a:prstGeom>
+          <a:noFill/>
+          <a:ln/>
+        </p:spPr>
+        <p:txBody>
+          <a:bodyPr wrap="square" lIns="0" tIns="0" rIns="0" bIns="0" rtlCol="0" anchor="t"/>
+          <a:lstStyle/>
+          <a:p>
+            <a:pPr indent="0" marL="0">
+              <a:buNone/>
+            </a:pPr>
+            <a:r>
+              <a:rPr lang="en-US" sz="1000" b="1" dirty="0">
+                <a:solidFill>
+                  <a:srgbClr val="0F1C2C"/>
+                </a:solidFill>
+                <a:latin typeface="Montserrat" pitchFamily="34" charset="0"/>
+                <a:ea typeface="Montserrat" pitchFamily="34" charset="-122"/>
+                <a:cs typeface="Montserrat" pitchFamily="34" charset="-120"/>
+              </a:rPr>
+              <a:t>EL SISTEMA INTERVIENE</a:t>
             </a:r>
             <a:endParaRPr lang="en-US" sz="1000" dirty="0"/>
           </a:p>
@@ -4781,14 +4719,244 @@
       </p:sp>
       <p:sp>
         <p:nvSpPr>
-          <p:cNvPr id="11" name="principio 3"/>
+          <p:cNvPr id="16" name="etapa 2 texto"/>
+          <p:cNvSpPr txBox="1"/>
+          <p:nvPr/>
+        </p:nvSpPr>
+        <p:spPr>
+          <a:xfrm>
+            <a:off x="3474720" y="2011680"/>
+            <a:ext cx="2194560" cy="1005840"/>
+          </a:xfrm>
+          <a:prstGeom prst="rect">
+            <a:avLst/>
+          </a:prstGeom>
+          <a:noFill/>
+          <a:ln/>
+        </p:spPr>
+        <p:txBody>
+          <a:bodyPr wrap="square" lIns="0" tIns="0" rIns="0" bIns="0" rtlCol="0" anchor="t"/>
+          <a:lstStyle/>
+          <a:p>
+            <a:pPr indent="0" marL="0">
+              <a:buNone/>
+            </a:pPr>
+            <a:r>
+              <a:rPr lang="en-US" sz="1000" dirty="0">
+                <a:solidFill>
+                  <a:srgbClr val="5C5C5C"/>
+                </a:solidFill>
+                <a:latin typeface="Arial" pitchFamily="34" charset="0"/>
+                <a:ea typeface="Arial" pitchFamily="34" charset="-122"/>
+                <a:cs typeface="Arial" pitchFamily="34" charset="-120"/>
+              </a:rPr>
+              <a:t>Enfrentamiento, seguimiento e intersección: cuando la distancia baja del umbral, ISA reduce la velocidad o detiene el camión.</a:t>
+            </a:r>
+            <a:endParaRPr lang="en-US" sz="1000" dirty="0"/>
+          </a:p>
+        </p:txBody>
+      </p:sp>
+      <p:sp>
+        <p:nvSpPr>
+          <p:cNvPr id="17" name="etapa 2 pruebas"/>
+          <p:cNvSpPr txBox="1"/>
+          <p:nvPr/>
+        </p:nvSpPr>
+        <p:spPr>
+          <a:xfrm>
+            <a:off x="3474720" y="3035808"/>
+            <a:ext cx="1188720" cy="201168"/>
+          </a:xfrm>
+          <a:prstGeom prst="rect">
+            <a:avLst/>
+          </a:prstGeom>
+          <a:noFill/>
+          <a:ln/>
+        </p:spPr>
+        <p:txBody>
+          <a:bodyPr wrap="square" lIns="0" tIns="0" rIns="0" bIns="0" rtlCol="0" anchor="t"/>
+          <a:lstStyle/>
+          <a:p>
+            <a:pPr indent="0" marL="0">
+              <a:buNone/>
+            </a:pPr>
+            <a:r>
+              <a:rPr lang="en-US" sz="850" dirty="0">
+                <a:solidFill>
+                  <a:srgbClr val="8C8C8C"/>
+                </a:solidFill>
+                <a:latin typeface="Arial" pitchFamily="34" charset="0"/>
+                <a:ea typeface="Arial" pitchFamily="34" charset="-122"/>
+                <a:cs typeface="Arial" pitchFamily="34" charset="-120"/>
+              </a:rPr>
+              <a:t>Pruebas 2, 3 y 4</a:t>
+            </a:r>
+            <a:endParaRPr lang="en-US" sz="850" dirty="0"/>
+          </a:p>
+        </p:txBody>
+      </p:sp>
+      <p:sp>
+        <p:nvSpPr>
+          <p:cNvPr id="18" name="etapa 2 producto CMS fondo"/>
           <p:cNvSpPr/>
           <p:nvPr/>
         </p:nvSpPr>
         <p:spPr>
           <a:xfrm>
+            <a:off x="3474720" y="3255264"/>
+            <a:ext cx="548640" cy="237744"/>
+          </a:xfrm>
+          <a:prstGeom prst="rect">
+            <a:avLst/>
+          </a:prstGeom>
+          <a:solidFill>
+            <a:srgbClr val="D40319"/>
+          </a:solidFill>
+          <a:ln w="9525">
+            <a:solidFill>
+              <a:srgbClr val="D40319"/>
+            </a:solidFill>
+            <a:prstDash val="solid"/>
+          </a:ln>
+        </p:spPr>
+      </p:sp>
+      <p:sp>
+        <p:nvSpPr>
+          <p:cNvPr id="19" name="etapa 2 producto CMS"/>
+          <p:cNvSpPr txBox="1"/>
+          <p:nvPr/>
+        </p:nvSpPr>
+        <p:spPr>
+          <a:xfrm>
+            <a:off x="3474720" y="3255264"/>
+            <a:ext cx="548640" cy="237744"/>
+          </a:xfrm>
+          <a:prstGeom prst="rect">
+            <a:avLst/>
+          </a:prstGeom>
+          <a:noFill/>
+          <a:ln/>
+        </p:spPr>
+        <p:txBody>
+          <a:bodyPr wrap="square" lIns="0" tIns="0" rIns="0" bIns="0" rtlCol="0" anchor="ctr"/>
+          <a:lstStyle/>
+          <a:p>
+            <a:pPr algn="ctr" indent="0" marL="0">
+              <a:buNone/>
+            </a:pPr>
+            <a:r>
+              <a:rPr lang="en-US" sz="850" b="1" spc="100" kern="0" dirty="0">
+                <a:solidFill>
+                  <a:srgbClr val="FFFFFF"/>
+                </a:solidFill>
+                <a:latin typeface="Montserrat" pitchFamily="34" charset="0"/>
+                <a:ea typeface="Montserrat" pitchFamily="34" charset="-122"/>
+                <a:cs typeface="Montserrat" pitchFamily="34" charset="-120"/>
+              </a:rPr>
+              <a:t>CMS</a:t>
+            </a:r>
+            <a:endParaRPr lang="en-US" sz="850" dirty="0"/>
+          </a:p>
+        </p:txBody>
+      </p:sp>
+      <p:sp>
+        <p:nvSpPr>
+          <p:cNvPr id="20" name="etapa 2 producto ISA fondo"/>
+          <p:cNvSpPr/>
+          <p:nvPr/>
+        </p:nvSpPr>
+        <p:spPr>
+          <a:xfrm>
+            <a:off x="4096512" y="3255264"/>
+            <a:ext cx="548640" cy="237744"/>
+          </a:xfrm>
+          <a:prstGeom prst="rect">
+            <a:avLst/>
+          </a:prstGeom>
+          <a:solidFill>
+            <a:srgbClr val="D40319"/>
+          </a:solidFill>
+          <a:ln w="9525">
+            <a:solidFill>
+              <a:srgbClr val="D40319"/>
+            </a:solidFill>
+            <a:prstDash val="solid"/>
+          </a:ln>
+        </p:spPr>
+      </p:sp>
+      <p:sp>
+        <p:nvSpPr>
+          <p:cNvPr id="21" name="etapa 2 producto ISA"/>
+          <p:cNvSpPr txBox="1"/>
+          <p:nvPr/>
+        </p:nvSpPr>
+        <p:spPr>
+          <a:xfrm>
+            <a:off x="4096512" y="3255264"/>
+            <a:ext cx="548640" cy="237744"/>
+          </a:xfrm>
+          <a:prstGeom prst="rect">
+            <a:avLst/>
+          </a:prstGeom>
+          <a:noFill/>
+          <a:ln/>
+        </p:spPr>
+        <p:txBody>
+          <a:bodyPr wrap="square" lIns="0" tIns="0" rIns="0" bIns="0" rtlCol="0" anchor="ctr"/>
+          <a:lstStyle/>
+          <a:p>
+            <a:pPr algn="ctr" indent="0" marL="0">
+              <a:buNone/>
+            </a:pPr>
+            <a:r>
+              <a:rPr lang="en-US" sz="850" b="1" spc="100" kern="0" dirty="0">
+                <a:solidFill>
+                  <a:srgbClr val="FFFFFF"/>
+                </a:solidFill>
+                <a:latin typeface="Montserrat" pitchFamily="34" charset="0"/>
+                <a:ea typeface="Montserrat" pitchFamily="34" charset="-122"/>
+                <a:cs typeface="Montserrat" pitchFamily="34" charset="-120"/>
+              </a:rPr>
+              <a:t>ISA</a:t>
+            </a:r>
+            <a:endParaRPr lang="en-US" sz="850" dirty="0"/>
+          </a:p>
+        </p:txBody>
+      </p:sp>
+      <p:sp>
+        <p:nvSpPr>
+          <p:cNvPr id="22" name="flecha etapa 2"/>
+          <p:cNvSpPr/>
+          <p:nvPr/>
+        </p:nvSpPr>
+        <p:spPr>
+          <a:xfrm>
+            <a:off x="5916168" y="2354580"/>
+            <a:ext cx="100584" cy="0"/>
+          </a:xfrm>
+          <a:prstGeom prst="line">
+            <a:avLst/>
+          </a:prstGeom>
+          <a:noFill/>
+          <a:ln w="19050">
+            <a:solidFill>
+              <a:srgbClr val="D40319"/>
+            </a:solidFill>
+            <a:prstDash val="solid"/>
+            <a:tailEnd type="triangle"/>
+          </a:ln>
+        </p:spPr>
+      </p:sp>
+      <p:sp>
+        <p:nvSpPr>
+          <p:cNvPr id="23" name="etapa 3"/>
+          <p:cNvSpPr/>
+          <p:nvPr/>
+        </p:nvSpPr>
+        <p:spPr>
+          <a:xfrm>
             <a:off x="6035040" y="1097280"/>
-            <a:ext cx="2651760" cy="1920240"/>
+            <a:ext cx="2651760" cy="2514600"/>
           </a:xfrm>
           <a:prstGeom prst="rect">
             <a:avLst/>
@@ -4804,44 +4972,20 @@
           </a:ln>
         </p:spPr>
       </p:sp>
-      <p:pic>
-        <p:nvPicPr>
-          <p:cNvPr id="12" name="icono principio 3" descr="preencoded.png">    </p:cNvPr>
-          <p:cNvPicPr>
-            <a:picLocks noChangeAspect="1"/>
-          </p:cNvPicPr>
-          <p:nvPr/>
-        </p:nvPicPr>
-        <p:blipFill>
-          <a:blip r:embed="rId3"/>
-          <a:stretch>
-            <a:fillRect/>
-          </a:stretch>
-        </p:blipFill>
-        <p:spPr>
-          <a:xfrm>
-            <a:off x="6263640" y="1325880"/>
+      <p:sp>
+        <p:nvSpPr>
+          <p:cNvPr id="24" name="etapa 3 número"/>
+          <p:cNvSpPr txBox="1"/>
+          <p:nvPr/>
+        </p:nvSpPr>
+        <p:spPr>
+          <a:xfrm>
+            <a:off x="6263640" y="1234440"/>
             <a:ext cx="457200" cy="457200"/>
           </a:xfrm>
           <a:prstGeom prst="rect">
             <a:avLst/>
           </a:prstGeom>
-        </p:spPr>
-      </p:pic>
-      <p:sp>
-        <p:nvSpPr>
-          <p:cNvPr id="13" name="título principio 3"/>
-          <p:cNvSpPr txBox="1"/>
-          <p:nvPr/>
-        </p:nvSpPr>
-        <p:spPr>
-          <a:xfrm>
-            <a:off x="6263640" y="1874520"/>
-            <a:ext cx="2194560" cy="457200"/>
-          </a:xfrm>
-          <a:prstGeom prst="rect">
-            <a:avLst/>
-          </a:prstGeom>
           <a:noFill/>
           <a:ln/>
         </p:spPr>
@@ -4853,30 +4997,30 @@
               <a:buNone/>
             </a:pPr>
             <a:r>
-              <a:rPr lang="en-US" sz="1000" b="1" dirty="0">
-                <a:solidFill>
-                  <a:srgbClr val="0F1C2C"/>
+              <a:rPr lang="en-US" sz="2600" b="1" dirty="0">
+                <a:solidFill>
+                  <a:srgbClr val="D40319"/>
                 </a:solidFill>
                 <a:latin typeface="Montserrat" pitchFamily="34" charset="0"/>
                 <a:ea typeface="Montserrat" pitchFamily="34" charset="-122"/>
                 <a:cs typeface="Montserrat" pitchFamily="34" charset="-120"/>
               </a:rPr>
-              <a:t>ANTE UN IMPREVISTO, SE DETIENE</a:t>
-            </a:r>
-            <a:endParaRPr lang="en-US" sz="1000" dirty="0"/>
-          </a:p>
-        </p:txBody>
-      </p:sp>
-      <p:sp>
-        <p:nvSpPr>
-          <p:cNvPr id="14" name="texto principio 3"/>
-          <p:cNvSpPr txBox="1"/>
-          <p:nvPr/>
-        </p:nvSpPr>
-        <p:spPr>
-          <a:xfrm>
-            <a:off x="6263640" y="2359152"/>
-            <a:ext cx="2194560" cy="621792"/>
+              <a:t>3</a:t>
+            </a:r>
+            <a:endParaRPr lang="en-US" sz="2600" dirty="0"/>
+          </a:p>
+        </p:txBody>
+      </p:sp>
+      <p:sp>
+        <p:nvSpPr>
+          <p:cNvPr id="25" name="etapa 3 kicker"/>
+          <p:cNvSpPr txBox="1"/>
+          <p:nvPr/>
+        </p:nvSpPr>
+        <p:spPr>
+          <a:xfrm>
+            <a:off x="6766560" y="1298448"/>
+            <a:ext cx="1737360" cy="201168"/>
           </a:xfrm>
           <a:prstGeom prst="rect">
             <a:avLst/>
@@ -4892,15 +5036,54 @@
               <a:buNone/>
             </a:pPr>
             <a:r>
-              <a:rPr lang="en-US" sz="1000" dirty="0">
-                <a:solidFill>
-                  <a:srgbClr val="5C5C5C"/>
+              <a:rPr lang="en-US" sz="800" spc="250" kern="0" dirty="0">
+                <a:solidFill>
+                  <a:srgbClr val="8C8C8C"/>
                 </a:solidFill>
                 <a:latin typeface="Arial" pitchFamily="34" charset="0"/>
                 <a:ea typeface="Arial" pitchFamily="34" charset="-122"/>
                 <a:cs typeface="Arial" pitchFamily="34" charset="-120"/>
               </a:rPr>
-              <a:t>Si surge cualquier imprevisto, la prueba se para y se retoma solo cuando vuelve a ser segura.</a:t>
+              <a:t>EL OPERADOR</a:t>
+            </a:r>
+            <a:endParaRPr lang="en-US" sz="800" dirty="0"/>
+          </a:p>
+        </p:txBody>
+      </p:sp>
+      <p:sp>
+        <p:nvSpPr>
+          <p:cNvPr id="26" name="etapa 3 título"/>
+          <p:cNvSpPr txBox="1"/>
+          <p:nvPr/>
+        </p:nvSpPr>
+        <p:spPr>
+          <a:xfrm>
+            <a:off x="6766560" y="1481328"/>
+            <a:ext cx="1783080" cy="457200"/>
+          </a:xfrm>
+          <a:prstGeom prst="rect">
+            <a:avLst/>
+          </a:prstGeom>
+          <a:noFill/>
+          <a:ln/>
+        </p:spPr>
+        <p:txBody>
+          <a:bodyPr wrap="square" lIns="0" tIns="0" rIns="0" bIns="0" rtlCol="0" anchor="t"/>
+          <a:lstStyle/>
+          <a:p>
+            <a:pPr indent="0" marL="0">
+              <a:buNone/>
+            </a:pPr>
+            <a:r>
+              <a:rPr lang="en-US" sz="1000" b="1" dirty="0">
+                <a:solidFill>
+                  <a:srgbClr val="0F1C2C"/>
+                </a:solidFill>
+                <a:latin typeface="Montserrat" pitchFamily="34" charset="0"/>
+                <a:ea typeface="Montserrat" pitchFamily="34" charset="-122"/>
+                <a:cs typeface="Montserrat" pitchFamily="34" charset="-120"/>
+              </a:rPr>
+              <a:t>FATIGA Y USO DEL MÓVIL</a:t>
             </a:r>
             <a:endParaRPr lang="en-US" sz="1000" dirty="0"/>
           </a:p>
@@ -4908,14 +5091,14 @@
       </p:sp>
       <p:sp>
         <p:nvSpPr>
-          <p:cNvPr id="15" name="etiqueta secuencia"/>
-          <p:cNvSpPr txBox="1"/>
-          <p:nvPr/>
-        </p:nvSpPr>
-        <p:spPr>
-          <a:xfrm>
-            <a:off x="457200" y="3200400"/>
-            <a:ext cx="2743200" cy="201168"/>
+          <p:cNvPr id="27" name="etapa 3 texto"/>
+          <p:cNvSpPr txBox="1"/>
+          <p:nvPr/>
+        </p:nvSpPr>
+        <p:spPr>
+          <a:xfrm>
+            <a:off x="6263640" y="2011680"/>
+            <a:ext cx="2194560" cy="1005840"/>
           </a:xfrm>
           <a:prstGeom prst="rect">
             <a:avLst/>
@@ -4931,572 +5114,133 @@
               <a:buNone/>
             </a:pPr>
             <a:r>
-              <a:rPr lang="en-US" sz="800" spc="250" kern="0" dirty="0">
-                <a:solidFill>
-                  <a:srgbClr val="8C8C8C"/>
+              <a:rPr lang="en-US" sz="1000" dirty="0">
+                <a:solidFill>
+                  <a:srgbClr val="5C5C5C"/>
                 </a:solidFill>
                 <a:latin typeface="Arial" pitchFamily="34" charset="0"/>
                 <a:ea typeface="Arial" pitchFamily="34" charset="-122"/>
                 <a:cs typeface="Arial" pitchFamily="34" charset="-120"/>
               </a:rPr>
-              <a:t>SECUENCIA</a:t>
-            </a:r>
-            <a:endParaRPr lang="en-US" sz="800" dirty="0"/>
-          </a:p>
-        </p:txBody>
-      </p:sp>
-      <p:sp>
-        <p:nvSpPr>
-          <p:cNvPr id="16" name="secuencia 1"/>
+              <a:t>Con el camión detenido, FAS reconoce somnolencia y uso del teléfono en cabina.</a:t>
+            </a:r>
+            <a:endParaRPr lang="en-US" sz="1000" dirty="0"/>
+          </a:p>
+        </p:txBody>
+      </p:sp>
+      <p:sp>
+        <p:nvSpPr>
+          <p:cNvPr id="28" name="etapa 3 pruebas"/>
+          <p:cNvSpPr txBox="1"/>
+          <p:nvPr/>
+        </p:nvSpPr>
+        <p:spPr>
+          <a:xfrm>
+            <a:off x="6263640" y="3035808"/>
+            <a:ext cx="1188720" cy="201168"/>
+          </a:xfrm>
+          <a:prstGeom prst="rect">
+            <a:avLst/>
+          </a:prstGeom>
+          <a:noFill/>
+          <a:ln/>
+        </p:spPr>
+        <p:txBody>
+          <a:bodyPr wrap="square" lIns="0" tIns="0" rIns="0" bIns="0" rtlCol="0" anchor="t"/>
+          <a:lstStyle/>
+          <a:p>
+            <a:pPr indent="0" marL="0">
+              <a:buNone/>
+            </a:pPr>
+            <a:r>
+              <a:rPr lang="en-US" sz="850" dirty="0">
+                <a:solidFill>
+                  <a:srgbClr val="8C8C8C"/>
+                </a:solidFill>
+                <a:latin typeface="Arial" pitchFamily="34" charset="0"/>
+                <a:ea typeface="Arial" pitchFamily="34" charset="-122"/>
+                <a:cs typeface="Arial" pitchFamily="34" charset="-120"/>
+              </a:rPr>
+              <a:t>Prueba 5</a:t>
+            </a:r>
+            <a:endParaRPr lang="en-US" sz="850" dirty="0"/>
+          </a:p>
+        </p:txBody>
+      </p:sp>
+      <p:sp>
+        <p:nvSpPr>
+          <p:cNvPr id="29" name="etapa 3 producto FAS fondo"/>
           <p:cNvSpPr/>
           <p:nvPr/>
         </p:nvSpPr>
         <p:spPr>
           <a:xfrm>
-            <a:off x="457200" y="3474720"/>
-            <a:ext cx="1554480" cy="960120"/>
+            <a:off x="6263640" y="3255264"/>
+            <a:ext cx="548640" cy="237744"/>
           </a:xfrm>
           <a:prstGeom prst="rect">
             <a:avLst/>
           </a:prstGeom>
           <a:solidFill>
-            <a:srgbClr val="FFFFFF"/>
+            <a:srgbClr val="D40319"/>
           </a:solidFill>
           <a:ln w="9525">
-            <a:solidFill>
-              <a:srgbClr val="E3E3E3"/>
-            </a:solidFill>
-            <a:prstDash val="solid"/>
-          </a:ln>
-        </p:spPr>
-      </p:sp>
-      <p:sp>
-        <p:nvSpPr>
-          <p:cNvPr id="17" name="número secuencia 1"/>
-          <p:cNvSpPr txBox="1"/>
-          <p:nvPr/>
-        </p:nvSpPr>
-        <p:spPr>
-          <a:xfrm>
-            <a:off x="594360" y="3566160"/>
-            <a:ext cx="457200" cy="365760"/>
-          </a:xfrm>
-          <a:prstGeom prst="rect">
-            <a:avLst/>
-          </a:prstGeom>
-          <a:noFill/>
-          <a:ln/>
-        </p:spPr>
-        <p:txBody>
-          <a:bodyPr wrap="square" lIns="0" tIns="0" rIns="0" bIns="0" rtlCol="0" anchor="t"/>
-          <a:lstStyle/>
-          <a:p>
-            <a:pPr indent="0" marL="0">
-              <a:buNone/>
-            </a:pPr>
-            <a:r>
-              <a:rPr lang="en-US" sz="2000" b="1" dirty="0">
-                <a:solidFill>
-                  <a:srgbClr val="D40319"/>
-                </a:solidFill>
-                <a:latin typeface="Montserrat" pitchFamily="34" charset="0"/>
-                <a:ea typeface="Montserrat" pitchFamily="34" charset="-122"/>
-                <a:cs typeface="Montserrat" pitchFamily="34" charset="-120"/>
-              </a:rPr>
-              <a:t>1</a:t>
-            </a:r>
-            <a:endParaRPr lang="en-US" sz="2000" dirty="0"/>
-          </a:p>
-        </p:txBody>
-      </p:sp>
-      <p:sp>
-        <p:nvSpPr>
-          <p:cNvPr id="18" name="texto secuencia 1"/>
-          <p:cNvSpPr txBox="1"/>
-          <p:nvPr/>
-        </p:nvSpPr>
-        <p:spPr>
-          <a:xfrm>
-            <a:off x="594360" y="3977640"/>
-            <a:ext cx="1280160" cy="411480"/>
-          </a:xfrm>
-          <a:prstGeom prst="rect">
-            <a:avLst/>
-          </a:prstGeom>
-          <a:noFill/>
-          <a:ln/>
-        </p:spPr>
-        <p:txBody>
-          <a:bodyPr wrap="square" lIns="0" tIns="0" rIns="0" bIns="0" rtlCol="0" anchor="t"/>
-          <a:lstStyle/>
-          <a:p>
-            <a:pPr indent="0" marL="0">
-              <a:buNone/>
-            </a:pPr>
-            <a:r>
-              <a:rPr lang="en-US" sz="850" b="1" dirty="0">
-                <a:solidFill>
-                  <a:srgbClr val="0F1C2C"/>
-                </a:solidFill>
-                <a:latin typeface="Montserrat" pitchFamily="34" charset="0"/>
-                <a:ea typeface="Montserrat" pitchFamily="34" charset="-122"/>
-                <a:cs typeface="Montserrat" pitchFamily="34" charset="-120"/>
-              </a:rPr>
-              <a:t>ENFRENTAMIENTO</a:t>
-            </a:r>
-            <a:endParaRPr lang="en-US" sz="850" dirty="0"/>
-          </a:p>
-        </p:txBody>
-      </p:sp>
-      <p:sp>
-        <p:nvSpPr>
-          <p:cNvPr id="19" name="flecha secuencia 1"/>
-          <p:cNvSpPr/>
-          <p:nvPr/>
-        </p:nvSpPr>
-        <p:spPr>
-          <a:xfrm>
-            <a:off x="2020824" y="3954780"/>
-            <a:ext cx="109728" cy="0"/>
-          </a:xfrm>
-          <a:prstGeom prst="line">
-            <a:avLst/>
-          </a:prstGeom>
-          <a:noFill/>
-          <a:ln w="19050">
             <a:solidFill>
               <a:srgbClr val="D40319"/>
             </a:solidFill>
             <a:prstDash val="solid"/>
-            <a:tailEnd type="triangle"/>
           </a:ln>
         </p:spPr>
       </p:sp>
       <p:sp>
         <p:nvSpPr>
-          <p:cNvPr id="20" name="secuencia 2"/>
-          <p:cNvSpPr/>
-          <p:nvPr/>
-        </p:nvSpPr>
-        <p:spPr>
-          <a:xfrm>
-            <a:off x="2139696" y="3474720"/>
-            <a:ext cx="1554480" cy="960120"/>
-          </a:xfrm>
-          <a:prstGeom prst="rect">
-            <a:avLst/>
-          </a:prstGeom>
-          <a:solidFill>
-            <a:srgbClr val="FFFFFF"/>
-          </a:solidFill>
-          <a:ln w="9525">
-            <a:solidFill>
-              <a:srgbClr val="E3E3E3"/>
-            </a:solidFill>
-            <a:prstDash val="solid"/>
-          </a:ln>
-        </p:spPr>
-      </p:sp>
-      <p:sp>
-        <p:nvSpPr>
-          <p:cNvPr id="21" name="número secuencia 2"/>
-          <p:cNvSpPr txBox="1"/>
-          <p:nvPr/>
-        </p:nvSpPr>
-        <p:spPr>
-          <a:xfrm>
-            <a:off x="2276856" y="3566160"/>
-            <a:ext cx="457200" cy="365760"/>
-          </a:xfrm>
-          <a:prstGeom prst="rect">
-            <a:avLst/>
-          </a:prstGeom>
-          <a:noFill/>
-          <a:ln/>
-        </p:spPr>
-        <p:txBody>
-          <a:bodyPr wrap="square" lIns="0" tIns="0" rIns="0" bIns="0" rtlCol="0" anchor="t"/>
-          <a:lstStyle/>
-          <a:p>
-            <a:pPr indent="0" marL="0">
-              <a:buNone/>
-            </a:pPr>
-            <a:r>
-              <a:rPr lang="en-US" sz="2000" b="1" dirty="0">
-                <a:solidFill>
-                  <a:srgbClr val="D40319"/>
+          <p:cNvPr id="30" name="etapa 3 producto FAS"/>
+          <p:cNvSpPr txBox="1"/>
+          <p:nvPr/>
+        </p:nvSpPr>
+        <p:spPr>
+          <a:xfrm>
+            <a:off x="6263640" y="3255264"/>
+            <a:ext cx="548640" cy="237744"/>
+          </a:xfrm>
+          <a:prstGeom prst="rect">
+            <a:avLst/>
+          </a:prstGeom>
+          <a:noFill/>
+          <a:ln/>
+        </p:spPr>
+        <p:txBody>
+          <a:bodyPr wrap="square" lIns="0" tIns="0" rIns="0" bIns="0" rtlCol="0" anchor="ctr"/>
+          <a:lstStyle/>
+          <a:p>
+            <a:pPr algn="ctr" indent="0" marL="0">
+              <a:buNone/>
+            </a:pPr>
+            <a:r>
+              <a:rPr lang="en-US" sz="850" b="1" spc="100" kern="0" dirty="0">
+                <a:solidFill>
+                  <a:srgbClr val="FFFFFF"/>
                 </a:solidFill>
                 <a:latin typeface="Montserrat" pitchFamily="34" charset="0"/>
                 <a:ea typeface="Montserrat" pitchFamily="34" charset="-122"/>
                 <a:cs typeface="Montserrat" pitchFamily="34" charset="-120"/>
               </a:rPr>
-              <a:t>2</a:t>
-            </a:r>
-            <a:endParaRPr lang="en-US" sz="2000" dirty="0"/>
-          </a:p>
-        </p:txBody>
-      </p:sp>
-      <p:sp>
-        <p:nvSpPr>
-          <p:cNvPr id="22" name="texto secuencia 2"/>
-          <p:cNvSpPr txBox="1"/>
-          <p:nvPr/>
-        </p:nvSpPr>
-        <p:spPr>
-          <a:xfrm>
-            <a:off x="2276856" y="3977640"/>
-            <a:ext cx="1280160" cy="411480"/>
-          </a:xfrm>
-          <a:prstGeom prst="rect">
-            <a:avLst/>
-          </a:prstGeom>
-          <a:noFill/>
-          <a:ln/>
-        </p:spPr>
-        <p:txBody>
-          <a:bodyPr wrap="square" lIns="0" tIns="0" rIns="0" bIns="0" rtlCol="0" anchor="t"/>
-          <a:lstStyle/>
-          <a:p>
-            <a:pPr indent="0" marL="0">
-              <a:buNone/>
-            </a:pPr>
-            <a:r>
-              <a:rPr lang="en-US" sz="850" b="1" dirty="0">
-                <a:solidFill>
-                  <a:srgbClr val="0F1C2C"/>
-                </a:solidFill>
-                <a:latin typeface="Montserrat" pitchFamily="34" charset="0"/>
-                <a:ea typeface="Montserrat" pitchFamily="34" charset="-122"/>
-                <a:cs typeface="Montserrat" pitchFamily="34" charset="-120"/>
-              </a:rPr>
-              <a:t>CRUCE EN CARRILES</a:t>
+              <a:t>FAS</a:t>
             </a:r>
             <a:endParaRPr lang="en-US" sz="850" dirty="0"/>
           </a:p>
-          <a:p>
-            <a:pPr indent="0" marL="0">
-              <a:buNone/>
-            </a:pPr>
-            <a:r>
-              <a:rPr lang="en-US" sz="850" b="1" dirty="0">
-                <a:solidFill>
-                  <a:srgbClr val="0F1C2C"/>
-                </a:solidFill>
-                <a:latin typeface="Montserrat" pitchFamily="34" charset="0"/>
-                <a:ea typeface="Montserrat" pitchFamily="34" charset="-122"/>
-                <a:cs typeface="Montserrat" pitchFamily="34" charset="-120"/>
-              </a:rPr>
-              <a:t>DISTINTOS</a:t>
-            </a:r>
-            <a:endParaRPr lang="en-US" sz="850" dirty="0"/>
-          </a:p>
-        </p:txBody>
-      </p:sp>
-      <p:sp>
-        <p:nvSpPr>
-          <p:cNvPr id="23" name="flecha secuencia 2"/>
+        </p:txBody>
+      </p:sp>
+      <p:sp>
+        <p:nvSpPr>
+          <p:cNvPr id="31" name="banda WBV"/>
           <p:cNvSpPr/>
           <p:nvPr/>
         </p:nvSpPr>
         <p:spPr>
           <a:xfrm>
-            <a:off x="3703320" y="3954780"/>
-            <a:ext cx="109728" cy="0"/>
-          </a:xfrm>
-          <a:prstGeom prst="line">
-            <a:avLst/>
-          </a:prstGeom>
-          <a:noFill/>
-          <a:ln w="19050">
-            <a:solidFill>
-              <a:srgbClr val="D40319"/>
-            </a:solidFill>
-            <a:prstDash val="solid"/>
-            <a:tailEnd type="triangle"/>
-          </a:ln>
-        </p:spPr>
-      </p:sp>
-      <p:sp>
-        <p:nvSpPr>
-          <p:cNvPr id="24" name="secuencia 3"/>
-          <p:cNvSpPr/>
-          <p:nvPr/>
-        </p:nvSpPr>
-        <p:spPr>
-          <a:xfrm>
-            <a:off x="3822192" y="3474720"/>
-            <a:ext cx="1554480" cy="960120"/>
-          </a:xfrm>
-          <a:prstGeom prst="rect">
-            <a:avLst/>
-          </a:prstGeom>
-          <a:solidFill>
-            <a:srgbClr val="FFFFFF"/>
-          </a:solidFill>
-          <a:ln w="9525">
-            <a:solidFill>
-              <a:srgbClr val="E3E3E3"/>
-            </a:solidFill>
-            <a:prstDash val="solid"/>
-          </a:ln>
-        </p:spPr>
-      </p:sp>
-      <p:sp>
-        <p:nvSpPr>
-          <p:cNvPr id="25" name="número secuencia 3"/>
-          <p:cNvSpPr txBox="1"/>
-          <p:nvPr/>
-        </p:nvSpPr>
-        <p:spPr>
-          <a:xfrm>
-            <a:off x="3959352" y="3566160"/>
-            <a:ext cx="457200" cy="365760"/>
-          </a:xfrm>
-          <a:prstGeom prst="rect">
-            <a:avLst/>
-          </a:prstGeom>
-          <a:noFill/>
-          <a:ln/>
-        </p:spPr>
-        <p:txBody>
-          <a:bodyPr wrap="square" lIns="0" tIns="0" rIns="0" bIns="0" rtlCol="0" anchor="t"/>
-          <a:lstStyle/>
-          <a:p>
-            <a:pPr indent="0" marL="0">
-              <a:buNone/>
-            </a:pPr>
-            <a:r>
-              <a:rPr lang="en-US" sz="2000" b="1" dirty="0">
-                <a:solidFill>
-                  <a:srgbClr val="D40319"/>
-                </a:solidFill>
-                <a:latin typeface="Montserrat" pitchFamily="34" charset="0"/>
-                <a:ea typeface="Montserrat" pitchFamily="34" charset="-122"/>
-                <a:cs typeface="Montserrat" pitchFamily="34" charset="-120"/>
-              </a:rPr>
-              <a:t>3</a:t>
-            </a:r>
-            <a:endParaRPr lang="en-US" sz="2000" dirty="0"/>
-          </a:p>
-        </p:txBody>
-      </p:sp>
-      <p:sp>
-        <p:nvSpPr>
-          <p:cNvPr id="26" name="texto secuencia 3"/>
-          <p:cNvSpPr txBox="1"/>
-          <p:nvPr/>
-        </p:nvSpPr>
-        <p:spPr>
-          <a:xfrm>
-            <a:off x="3959352" y="3977640"/>
-            <a:ext cx="1280160" cy="411480"/>
-          </a:xfrm>
-          <a:prstGeom prst="rect">
-            <a:avLst/>
-          </a:prstGeom>
-          <a:noFill/>
-          <a:ln/>
-        </p:spPr>
-        <p:txBody>
-          <a:bodyPr wrap="square" lIns="0" tIns="0" rIns="0" bIns="0" rtlCol="0" anchor="t"/>
-          <a:lstStyle/>
-          <a:p>
-            <a:pPr indent="0" marL="0">
-              <a:buNone/>
-            </a:pPr>
-            <a:r>
-              <a:rPr lang="en-US" sz="850" b="1" dirty="0">
-                <a:solidFill>
-                  <a:srgbClr val="0F1C2C"/>
-                </a:solidFill>
-                <a:latin typeface="Montserrat" pitchFamily="34" charset="0"/>
-                <a:ea typeface="Montserrat" pitchFamily="34" charset="-122"/>
-                <a:cs typeface="Montserrat" pitchFamily="34" charset="-120"/>
-              </a:rPr>
-              <a:t>SEGUIMIENTO</a:t>
-            </a:r>
-            <a:endParaRPr lang="en-US" sz="850" dirty="0"/>
-          </a:p>
-        </p:txBody>
-      </p:sp>
-      <p:sp>
-        <p:nvSpPr>
-          <p:cNvPr id="27" name="flecha secuencia 3"/>
-          <p:cNvSpPr/>
-          <p:nvPr/>
-        </p:nvSpPr>
-        <p:spPr>
-          <a:xfrm>
-            <a:off x="5385816" y="3954780"/>
-            <a:ext cx="109728" cy="0"/>
-          </a:xfrm>
-          <a:prstGeom prst="line">
-            <a:avLst/>
-          </a:prstGeom>
-          <a:noFill/>
-          <a:ln w="19050">
-            <a:solidFill>
-              <a:srgbClr val="D40319"/>
-            </a:solidFill>
-            <a:prstDash val="solid"/>
-            <a:tailEnd type="triangle"/>
-          </a:ln>
-        </p:spPr>
-      </p:sp>
-      <p:sp>
-        <p:nvSpPr>
-          <p:cNvPr id="28" name="secuencia 4"/>
-          <p:cNvSpPr/>
-          <p:nvPr/>
-        </p:nvSpPr>
-        <p:spPr>
-          <a:xfrm>
-            <a:off x="5504688" y="3474720"/>
-            <a:ext cx="1554480" cy="960120"/>
-          </a:xfrm>
-          <a:prstGeom prst="rect">
-            <a:avLst/>
-          </a:prstGeom>
-          <a:solidFill>
-            <a:srgbClr val="FFFFFF"/>
-          </a:solidFill>
-          <a:ln w="9525">
-            <a:solidFill>
-              <a:srgbClr val="E3E3E3"/>
-            </a:solidFill>
-            <a:prstDash val="solid"/>
-          </a:ln>
-        </p:spPr>
-      </p:sp>
-      <p:sp>
-        <p:nvSpPr>
-          <p:cNvPr id="29" name="número secuencia 4"/>
-          <p:cNvSpPr txBox="1"/>
-          <p:nvPr/>
-        </p:nvSpPr>
-        <p:spPr>
-          <a:xfrm>
-            <a:off x="5641848" y="3566160"/>
-            <a:ext cx="457200" cy="365760"/>
-          </a:xfrm>
-          <a:prstGeom prst="rect">
-            <a:avLst/>
-          </a:prstGeom>
-          <a:noFill/>
-          <a:ln/>
-        </p:spPr>
-        <p:txBody>
-          <a:bodyPr wrap="square" lIns="0" tIns="0" rIns="0" bIns="0" rtlCol="0" anchor="t"/>
-          <a:lstStyle/>
-          <a:p>
-            <a:pPr indent="0" marL="0">
-              <a:buNone/>
-            </a:pPr>
-            <a:r>
-              <a:rPr lang="en-US" sz="2000" b="1" dirty="0">
-                <a:solidFill>
-                  <a:srgbClr val="D40319"/>
-                </a:solidFill>
-                <a:latin typeface="Montserrat" pitchFamily="34" charset="0"/>
-                <a:ea typeface="Montserrat" pitchFamily="34" charset="-122"/>
-                <a:cs typeface="Montserrat" pitchFamily="34" charset="-120"/>
-              </a:rPr>
-              <a:t>4</a:t>
-            </a:r>
-            <a:endParaRPr lang="en-US" sz="2000" dirty="0"/>
-          </a:p>
-        </p:txBody>
-      </p:sp>
-      <p:sp>
-        <p:nvSpPr>
-          <p:cNvPr id="30" name="texto secuencia 4"/>
-          <p:cNvSpPr txBox="1"/>
-          <p:nvPr/>
-        </p:nvSpPr>
-        <p:spPr>
-          <a:xfrm>
-            <a:off x="5641848" y="3977640"/>
-            <a:ext cx="1280160" cy="411480"/>
-          </a:xfrm>
-          <a:prstGeom prst="rect">
-            <a:avLst/>
-          </a:prstGeom>
-          <a:noFill/>
-          <a:ln/>
-        </p:spPr>
-        <p:txBody>
-          <a:bodyPr wrap="square" lIns="0" tIns="0" rIns="0" bIns="0" rtlCol="0" anchor="t"/>
-          <a:lstStyle/>
-          <a:p>
-            <a:pPr indent="0" marL="0">
-              <a:buNone/>
-            </a:pPr>
-            <a:r>
-              <a:rPr lang="en-US" sz="850" b="1" dirty="0">
-                <a:solidFill>
-                  <a:srgbClr val="0F1C2C"/>
-                </a:solidFill>
-                <a:latin typeface="Montserrat" pitchFamily="34" charset="0"/>
-                <a:ea typeface="Montserrat" pitchFamily="34" charset="-122"/>
-                <a:cs typeface="Montserrat" pitchFamily="34" charset="-120"/>
-              </a:rPr>
-              <a:t>CRUCE EN</a:t>
-            </a:r>
-            <a:endParaRPr lang="en-US" sz="850" dirty="0"/>
-          </a:p>
-          <a:p>
-            <a:pPr indent="0" marL="0">
-              <a:buNone/>
-            </a:pPr>
-            <a:r>
-              <a:rPr lang="en-US" sz="850" b="1" dirty="0">
-                <a:solidFill>
-                  <a:srgbClr val="0F1C2C"/>
-                </a:solidFill>
-                <a:latin typeface="Montserrat" pitchFamily="34" charset="0"/>
-                <a:ea typeface="Montserrat" pitchFamily="34" charset="-122"/>
-                <a:cs typeface="Montserrat" pitchFamily="34" charset="-120"/>
-              </a:rPr>
-              <a:t>INTERSECCIÓN</a:t>
-            </a:r>
-            <a:endParaRPr lang="en-US" sz="850" dirty="0"/>
-          </a:p>
-        </p:txBody>
-      </p:sp>
-      <p:sp>
-        <p:nvSpPr>
-          <p:cNvPr id="31" name="flecha secuencia 4"/>
-          <p:cNvSpPr/>
-          <p:nvPr/>
-        </p:nvSpPr>
-        <p:spPr>
-          <a:xfrm>
-            <a:off x="7068312" y="3954780"/>
-            <a:ext cx="109728" cy="0"/>
-          </a:xfrm>
-          <a:prstGeom prst="line">
-            <a:avLst/>
-          </a:prstGeom>
-          <a:noFill/>
-          <a:ln w="19050">
-            <a:solidFill>
-              <a:srgbClr val="D40319"/>
-            </a:solidFill>
-            <a:prstDash val="solid"/>
-            <a:tailEnd type="triangle"/>
-          </a:ln>
-        </p:spPr>
-      </p:sp>
-      <p:sp>
-        <p:nvSpPr>
-          <p:cNvPr id="32" name="secuencia 5"/>
-          <p:cNvSpPr/>
-          <p:nvPr/>
-        </p:nvSpPr>
-        <p:spPr>
-          <a:xfrm>
-            <a:off x="7187184" y="3474720"/>
-            <a:ext cx="1554480" cy="960120"/>
+            <a:off x="457200" y="3749040"/>
+            <a:ext cx="8229600" cy="731520"/>
           </a:xfrm>
           <a:prstGeom prst="rect">
             <a:avLst/>
@@ -5514,69 +5258,143 @@
       </p:sp>
       <p:sp>
         <p:nvSpPr>
-          <p:cNvPr id="33" name="número secuencia 5"/>
-          <p:cNvSpPr txBox="1"/>
-          <p:nvPr/>
-        </p:nvSpPr>
-        <p:spPr>
-          <a:xfrm>
-            <a:off x="7324344" y="3566160"/>
-            <a:ext cx="457200" cy="365760"/>
-          </a:xfrm>
-          <a:prstGeom prst="rect">
-            <a:avLst/>
-          </a:prstGeom>
-          <a:noFill/>
-          <a:ln/>
-        </p:spPr>
-        <p:txBody>
-          <a:bodyPr wrap="square" lIns="0" tIns="0" rIns="0" bIns="0" rtlCol="0" anchor="t"/>
-          <a:lstStyle/>
-          <a:p>
-            <a:pPr indent="0" marL="0">
-              <a:buNone/>
-            </a:pPr>
-            <a:r>
-              <a:rPr lang="en-US" sz="2000" b="1" dirty="0">
-                <a:solidFill>
-                  <a:srgbClr val="D40319"/>
+          <p:cNvPr id="32" name="banda WBV marca"/>
+          <p:cNvSpPr/>
+          <p:nvPr/>
+        </p:nvSpPr>
+        <p:spPr>
+          <a:xfrm>
+            <a:off x="457200" y="3749040"/>
+            <a:ext cx="54864" cy="731520"/>
+          </a:xfrm>
+          <a:prstGeom prst="rect">
+            <a:avLst/>
+          </a:prstGeom>
+          <a:solidFill>
+            <a:srgbClr val="0F1C2C"/>
+          </a:solidFill>
+          <a:ln w="12700">
+            <a:solidFill>
+              <a:srgbClr val="0F1C2C"/>
+            </a:solidFill>
+            <a:prstDash val="solid"/>
+          </a:ln>
+        </p:spPr>
+      </p:sp>
+      <p:pic>
+        <p:nvPicPr>
+          <p:cNvPr id="33" name="icono WBV" descr="preencoded.png">    </p:cNvPr>
+          <p:cNvPicPr>
+            <a:picLocks noChangeAspect="1"/>
+          </p:cNvPicPr>
+          <p:nvPr/>
+        </p:nvPicPr>
+        <p:blipFill>
+          <a:blip r:embed="rId1"/>
+          <a:stretch>
+            <a:fillRect/>
+          </a:stretch>
+        </p:blipFill>
+        <p:spPr>
+          <a:xfrm>
+            <a:off x="685800" y="3931920"/>
+            <a:ext cx="365760" cy="365760"/>
+          </a:xfrm>
+          <a:prstGeom prst="rect">
+            <a:avLst/>
+          </a:prstGeom>
+        </p:spPr>
+      </p:pic>
+      <p:sp>
+        <p:nvSpPr>
+          <p:cNvPr id="34" name="banda WBV etiqueta fondo"/>
+          <p:cNvSpPr/>
+          <p:nvPr/>
+        </p:nvSpPr>
+        <p:spPr>
+          <a:xfrm>
+            <a:off x="1234440" y="3995928"/>
+            <a:ext cx="960120" cy="237744"/>
+          </a:xfrm>
+          <a:prstGeom prst="rect">
+            <a:avLst/>
+          </a:prstGeom>
+          <a:solidFill>
+            <a:srgbClr val="FFFFFF"/>
+          </a:solidFill>
+          <a:ln w="12700">
+            <a:solidFill>
+              <a:srgbClr val="0F1C2C"/>
+            </a:solidFill>
+            <a:prstDash val="solid"/>
+          </a:ln>
+        </p:spPr>
+      </p:sp>
+      <p:sp>
+        <p:nvSpPr>
+          <p:cNvPr id="35" name="banda WBV etiqueta"/>
+          <p:cNvSpPr txBox="1"/>
+          <p:nvPr/>
+        </p:nvSpPr>
+        <p:spPr>
+          <a:xfrm>
+            <a:off x="1234440" y="3995928"/>
+            <a:ext cx="960120" cy="237744"/>
+          </a:xfrm>
+          <a:prstGeom prst="rect">
+            <a:avLst/>
+          </a:prstGeom>
+          <a:noFill/>
+          <a:ln/>
+        </p:spPr>
+        <p:txBody>
+          <a:bodyPr wrap="square" lIns="0" tIns="0" rIns="0" bIns="0" rtlCol="0" anchor="ctr"/>
+          <a:lstStyle/>
+          <a:p>
+            <a:pPr algn="ctr" indent="0" marL="0">
+              <a:buNone/>
+            </a:pPr>
+            <a:r>
+              <a:rPr lang="en-US" sz="850" b="1" spc="100" kern="0" dirty="0">
+                <a:solidFill>
+                  <a:srgbClr val="0F1C2C"/>
                 </a:solidFill>
                 <a:latin typeface="Montserrat" pitchFamily="34" charset="0"/>
                 <a:ea typeface="Montserrat" pitchFamily="34" charset="-122"/>
                 <a:cs typeface="Montserrat" pitchFamily="34" charset="-120"/>
               </a:rPr>
-              <a:t>5</a:t>
-            </a:r>
-            <a:endParaRPr lang="en-US" sz="2000" dirty="0"/>
-          </a:p>
-        </p:txBody>
-      </p:sp>
-      <p:sp>
-        <p:nvSpPr>
-          <p:cNvPr id="34" name="texto secuencia 5"/>
-          <p:cNvSpPr txBox="1"/>
-          <p:nvPr/>
-        </p:nvSpPr>
-        <p:spPr>
-          <a:xfrm>
-            <a:off x="7324344" y="3977640"/>
-            <a:ext cx="1280160" cy="411480"/>
-          </a:xfrm>
-          <a:prstGeom prst="rect">
-            <a:avLst/>
-          </a:prstGeom>
-          <a:noFill/>
-          <a:ln/>
-        </p:spPr>
-        <p:txBody>
-          <a:bodyPr wrap="square" lIns="0" tIns="0" rIns="0" bIns="0" rtlCol="0" anchor="t"/>
+              <a:t>WBV · PASIVO</a:t>
+            </a:r>
+            <a:endParaRPr lang="en-US" sz="850" dirty="0"/>
+          </a:p>
+        </p:txBody>
+      </p:sp>
+      <p:sp>
+        <p:nvSpPr>
+          <p:cNvPr id="36" name="banda WBV texto"/>
+          <p:cNvSpPr txBox="1"/>
+          <p:nvPr/>
+        </p:nvSpPr>
+        <p:spPr>
+          <a:xfrm>
+            <a:off x="2377440" y="3749040"/>
+            <a:ext cx="6126480" cy="731520"/>
+          </a:xfrm>
+          <a:prstGeom prst="rect">
+            <a:avLst/>
+          </a:prstGeom>
+          <a:noFill/>
+          <a:ln/>
+        </p:spPr>
+        <p:txBody>
+          <a:bodyPr wrap="square" lIns="0" tIns="0" rIns="0" bIns="0" rtlCol="0" anchor="ctr"/>
           <a:lstStyle/>
           <a:p>
             <a:pPr indent="0" marL="0">
               <a:buNone/>
             </a:pPr>
             <a:r>
-              <a:rPr lang="en-US" sz="850" b="1" dirty="0">
+              <a:rPr lang="en-US" sz="1050" b="1" dirty="0">
                 <a:solidFill>
                   <a:srgbClr val="0F1C2C"/>
                 </a:solidFill>
@@ -5584,26 +5402,23 @@
                 <a:ea typeface="Montserrat" pitchFamily="34" charset="-122"/>
                 <a:cs typeface="Montserrat" pitchFamily="34" charset="-120"/>
               </a:rPr>
-              <a:t>RECTA:</a:t>
-            </a:r>
-            <a:endParaRPr lang="en-US" sz="850" dirty="0"/>
-          </a:p>
-          <a:p>
+              <a:t>Durante toda la sesión, en segundo plano. </a:t>
+            </a:r>
             <a:pPr indent="0" marL="0">
               <a:buNone/>
             </a:pPr>
             <a:r>
-              <a:rPr lang="en-US" sz="850" b="1" dirty="0">
-                <a:solidFill>
-                  <a:srgbClr val="0F1C2C"/>
-                </a:solidFill>
-                <a:latin typeface="Montserrat" pitchFamily="34" charset="0"/>
-                <a:ea typeface="Montserrat" pitchFamily="34" charset="-122"/>
-                <a:cs typeface="Montserrat" pitchFamily="34" charset="-120"/>
-              </a:rPr>
-              <a:t>VALIDACIÓN FINAL</a:t>
-            </a:r>
-            <a:endParaRPr lang="en-US" sz="850" dirty="0"/>
+              <a:rPr lang="en-US" sz="1050" dirty="0">
+                <a:solidFill>
+                  <a:srgbClr val="5C5C5C"/>
+                </a:solidFill>
+                <a:latin typeface="Arial" pitchFamily="34" charset="0"/>
+                <a:ea typeface="Arial" pitchFamily="34" charset="-122"/>
+                <a:cs typeface="Arial" pitchFamily="34" charset="-120"/>
+              </a:rPr>
+              <a:t>Whole Body Vibration Monitor registra la vibración que recibe el operador en cada prueba. No emite alertas ni interviene: sus datos se analizan después.</a:t>
+            </a:r>
+            <a:endParaRPr lang="en-US" sz="1050" dirty="0"/>
           </a:p>
         </p:txBody>
       </p:sp>
@@ -5686,7 +5501,7 @@
         <p:spPr>
           <a:xfrm>
             <a:off x="1920240" y="274320"/>
-            <a:ext cx="5760720" cy="502920"/>
+            <a:ext cx="5394960" cy="502920"/>
           </a:xfrm>
           <a:prstGeom prst="rect">
             <a:avLst/>
@@ -5702,7 +5517,7 @@
               <a:buNone/>
             </a:pPr>
             <a:r>
-              <a:rPr lang="en-US" sz="2000" spc="50" kern="0" dirty="0">
+              <a:rPr lang="en-US" sz="1600" spc="50" kern="0" dirty="0">
                 <a:solidFill>
                   <a:srgbClr val="0F1C2C"/>
                 </a:solidFill>
@@ -5716,7 +5531,7 @@
               <a:buNone/>
             </a:pPr>
             <a:r>
-              <a:rPr lang="en-US" sz="2000" b="1" spc="50" kern="0" dirty="0">
+              <a:rPr lang="en-US" sz="1600" b="1" spc="50" kern="0" dirty="0">
                 <a:solidFill>
                   <a:srgbClr val="0F1C2C"/>
                 </a:solidFill>
@@ -5724,9 +5539,9 @@
                 <a:ea typeface="Montserrat" pitchFamily="34" charset="-122"/>
                 <a:cs typeface="Montserrat" pitchFamily="34" charset="-120"/>
               </a:rPr>
-              <a:t>ENFRENTAMIENTO</a:t>
-            </a:r>
-            <a:endParaRPr lang="en-US" sz="2000" dirty="0"/>
+              <a:t>CRUCE EN CARRILES DISTINTOS</a:t>
+            </a:r>
+            <a:endParaRPr lang="en-US" sz="1600" dirty="0"/>
           </a:p>
         </p:txBody>
       </p:sp>
@@ -5747,7 +5562,7 @@
           <a:solidFill>
             <a:srgbClr val="D9D9D9"/>
           </a:solidFill>
-          <a:ln w="12700">
+          <a:ln w="9525">
             <a:solidFill>
               <a:srgbClr val="D9D9D9"/>
             </a:solidFill>
@@ -5922,8 +5737,8 @@
         </p:blipFill>
         <p:spPr>
           <a:xfrm>
-            <a:off x="1856232" y="2018685"/>
-            <a:ext cx="457200" cy="351750"/>
+            <a:off x="2450592" y="2018685"/>
+            <a:ext cx="365760" cy="351750"/>
           </a:xfrm>
           <a:prstGeom prst="rect">
             <a:avLst/>
@@ -5946,8 +5761,8 @@
         </p:blipFill>
         <p:spPr>
           <a:xfrm>
-            <a:off x="2313432" y="2018685"/>
-            <a:ext cx="868680" cy="351750"/>
+            <a:off x="2816352" y="2018685"/>
+            <a:ext cx="731520" cy="351750"/>
           </a:xfrm>
           <a:prstGeom prst="rect">
             <a:avLst/>
@@ -5970,7 +5785,7 @@
         </p:blipFill>
         <p:spPr>
           <a:xfrm>
-            <a:off x="1005840" y="1990054"/>
+            <a:off x="1600200" y="1990054"/>
             <a:ext cx="822960" cy="409011"/>
           </a:xfrm>
           <a:prstGeom prst="rect">
@@ -5986,7 +5801,7 @@
         </p:nvSpPr>
         <p:spPr>
           <a:xfrm>
-            <a:off x="1042416" y="1990054"/>
+            <a:off x="1636776" y="1990054"/>
             <a:ext cx="411480" cy="409011"/>
           </a:xfrm>
           <a:prstGeom prst="rect">
@@ -6033,8 +5848,8 @@
         </p:blipFill>
         <p:spPr>
           <a:xfrm>
-            <a:off x="3630168" y="2750205"/>
-            <a:ext cx="457200" cy="351750"/>
+            <a:off x="3127248" y="2750205"/>
+            <a:ext cx="365760" cy="351750"/>
           </a:xfrm>
           <a:prstGeom prst="rect">
             <a:avLst/>
@@ -6057,8 +5872,8 @@
         </p:blipFill>
         <p:spPr>
           <a:xfrm>
-            <a:off x="2761488" y="2750205"/>
-            <a:ext cx="868680" cy="351750"/>
+            <a:off x="2395728" y="2750205"/>
+            <a:ext cx="731520" cy="351750"/>
           </a:xfrm>
           <a:prstGeom prst="rect">
             <a:avLst/>
@@ -6081,7 +5896,7 @@
         </p:blipFill>
         <p:spPr>
           <a:xfrm>
-            <a:off x="4114800" y="2721574"/>
+            <a:off x="3520440" y="2721574"/>
             <a:ext cx="822960" cy="409011"/>
           </a:xfrm>
           <a:prstGeom prst="rect">
@@ -6097,7 +5912,7 @@
         </p:nvSpPr>
         <p:spPr>
           <a:xfrm>
-            <a:off x="4489704" y="2721574"/>
+            <a:off x="3895344" y="2721574"/>
             <a:ext cx="411480" cy="409011"/>
           </a:xfrm>
           <a:prstGeom prst="rect">
@@ -6130,14 +5945,37 @@
       </p:sp>
       <p:sp>
         <p:nvSpPr>
-          <p:cNvPr id="17" name="nota P1"/>
-          <p:cNvSpPr txBox="1"/>
-          <p:nvPr/>
-        </p:nvSpPr>
-        <p:spPr>
-          <a:xfrm>
-            <a:off x="731520" y="3401568"/>
-            <a:ext cx="4480560" cy="274320"/>
+          <p:cNvPr id="17" name="punto de cruce"/>
+          <p:cNvSpPr/>
+          <p:nvPr/>
+        </p:nvSpPr>
+        <p:spPr>
+          <a:xfrm>
+            <a:off x="2971800" y="1783080"/>
+            <a:ext cx="0" cy="1554480"/>
+          </a:xfrm>
+          <a:prstGeom prst="line">
+            <a:avLst/>
+          </a:prstGeom>
+          <a:noFill/>
+          <a:ln w="15875">
+            <a:solidFill>
+              <a:srgbClr val="D40319"/>
+            </a:solidFill>
+            <a:prstDash val="sysDash"/>
+          </a:ln>
+        </p:spPr>
+      </p:sp>
+      <p:sp>
+        <p:nvSpPr>
+          <p:cNvPr id="18" name="nota P1"/>
+          <p:cNvSpPr txBox="1"/>
+          <p:nvPr/>
+        </p:nvSpPr>
+        <p:spPr>
+          <a:xfrm>
+            <a:off x="1371600" y="3401568"/>
+            <a:ext cx="3200400" cy="274320"/>
           </a:xfrm>
           <a:prstGeom prst="rect">
             <a:avLst/>
@@ -6155,13 +5993,13 @@
             <a:r>
               <a:rPr lang="en-US" sz="1000" dirty="0">
                 <a:solidFill>
-                  <a:srgbClr val="5C5C5C"/>
+                  <a:srgbClr val="D40319"/>
                 </a:solidFill>
                 <a:latin typeface="Arial" pitchFamily="34" charset="0"/>
                 <a:ea typeface="Arial" pitchFamily="34" charset="-122"/>
                 <a:cs typeface="Arial" pitchFamily="34" charset="-120"/>
               </a:rPr>
-              <a:t>Cada camión en su carril</a:t>
+              <a:t>Punto de cruce · cada camión en su carril</a:t>
             </a:r>
             <a:endParaRPr lang="en-US" sz="1000" dirty="0"/>
           </a:p>
@@ -6169,7 +6007,7 @@
       </p:sp>
       <p:pic>
         <p:nvPicPr>
-          <p:cNvPr id="18" name="leyenda seguridad" descr="preencoded.png">    </p:cNvPr>
+          <p:cNvPr id="19" name="leyenda seguridad" descr="preencoded.png">    </p:cNvPr>
           <p:cNvPicPr>
             <a:picLocks noChangeAspect="1"/>
           </p:cNvPicPr>
@@ -6193,7 +6031,7 @@
       </p:pic>
       <p:sp>
         <p:nvSpPr>
-          <p:cNvPr id="19" name="leyenda seguridad texto"/>
+          <p:cNvPr id="20" name="leyenda seguridad texto"/>
           <p:cNvSpPr txBox="1"/>
           <p:nvPr/>
         </p:nvSpPr>
@@ -6232,7 +6070,7 @@
       </p:sp>
       <p:pic>
         <p:nvPicPr>
-          <p:cNvPr id="20" name="leyenda frenado" descr="preencoded.png">    </p:cNvPr>
+          <p:cNvPr id="21" name="leyenda frenado" descr="preencoded.png">    </p:cNvPr>
           <p:cNvPicPr>
             <a:picLocks noChangeAspect="1"/>
           </p:cNvPicPr>
@@ -6256,7 +6094,7 @@
       </p:pic>
       <p:sp>
         <p:nvSpPr>
-          <p:cNvPr id="21" name="leyenda frenado texto"/>
+          <p:cNvPr id="22" name="leyenda frenado texto"/>
           <p:cNvSpPr txBox="1"/>
           <p:nvPr/>
         </p:nvSpPr>
@@ -6295,7 +6133,7 @@
       </p:sp>
       <p:sp>
         <p:nvSpPr>
-          <p:cNvPr id="22" name="leyenda túnel"/>
+          <p:cNvPr id="23" name="leyenda túnel"/>
           <p:cNvSpPr txBox="1"/>
           <p:nvPr/>
         </p:nvSpPr>
@@ -6334,7 +6172,7 @@
       </p:sp>
       <p:pic>
         <p:nvPicPr>
-          <p:cNvPr id="23" name="bloque Objetivo icono" descr="preencoded.png">    </p:cNvPr>
+          <p:cNvPr id="24" name="bloque Objetivo icono" descr="preencoded.png">    </p:cNvPr>
           <p:cNvPicPr>
             <a:picLocks noChangeAspect="1"/>
           </p:cNvPicPr>
@@ -6358,7 +6196,7 @@
       </p:pic>
       <p:sp>
         <p:nvSpPr>
-          <p:cNvPr id="24" name="bloque Objetivo título"/>
+          <p:cNvPr id="25" name="bloque Objetivo título"/>
           <p:cNvSpPr txBox="1"/>
           <p:nvPr/>
         </p:nvSpPr>
@@ -6397,14 +6235,14 @@
       </p:sp>
       <p:sp>
         <p:nvSpPr>
-          <p:cNvPr id="25" name="bloque Objetivo texto"/>
+          <p:cNvPr id="26" name="bloque Objetivo texto"/>
           <p:cNvSpPr txBox="1"/>
           <p:nvPr/>
         </p:nvSpPr>
         <p:spPr>
           <a:xfrm>
             <a:off x="6355080" y="1335024"/>
-            <a:ext cx="2331720" cy="694944"/>
+            <a:ext cx="2331720" cy="676656"/>
           </a:xfrm>
           <a:prstGeom prst="rect">
             <a:avLst/>
@@ -6420,7 +6258,7 @@
               <a:buNone/>
             </a:pPr>
             <a:r>
-              <a:rPr lang="en-US" sz="1100" dirty="0">
+              <a:rPr lang="en-US" sz="1000" dirty="0">
                 <a:solidFill>
                   <a:srgbClr val="5C5C5C"/>
                 </a:solidFill>
@@ -6428,15 +6266,15 @@
                 <a:ea typeface="Arial" pitchFamily="34" charset="-122"/>
                 <a:cs typeface="Arial" pitchFamily="34" charset="-120"/>
               </a:rPr>
-              <a:t>Comprobar la respuesta del sistema cuando dos camiones se aproximan de frente.</a:t>
-            </a:r>
-            <a:endParaRPr lang="en-US" sz="1100" dirty="0"/>
+              <a:t>Mostrar la base del anticolisión: CMS detecta la interacción cuando los camiones se cruzan en sentidos opuestos.</a:t>
+            </a:r>
+            <a:endParaRPr lang="en-US" sz="1000" dirty="0"/>
           </a:p>
         </p:txBody>
       </p:sp>
       <p:pic>
         <p:nvPicPr>
-          <p:cNvPr id="26" name="bloque Desarrollo icono" descr="preencoded.png">    </p:cNvPr>
+          <p:cNvPr id="27" name="bloque Desarrollo icono" descr="preencoded.png">    </p:cNvPr>
           <p:cNvPicPr>
             <a:picLocks noChangeAspect="1"/>
           </p:cNvPicPr>
@@ -6450,7 +6288,7 @@
         </p:blipFill>
         <p:spPr>
           <a:xfrm>
-            <a:off x="5852160" y="2103120"/>
+            <a:off x="5852160" y="2048256"/>
             <a:ext cx="347472" cy="347472"/>
           </a:xfrm>
           <a:prstGeom prst="rect">
@@ -6460,13 +6298,13 @@
       </p:pic>
       <p:sp>
         <p:nvSpPr>
-          <p:cNvPr id="27" name="bloque Desarrollo título"/>
-          <p:cNvSpPr txBox="1"/>
-          <p:nvPr/>
-        </p:nvSpPr>
-        <p:spPr>
-          <a:xfrm>
-            <a:off x="6355080" y="2084832"/>
+          <p:cNvPr id="28" name="bloque Desarrollo título"/>
+          <p:cNvSpPr txBox="1"/>
+          <p:nvPr/>
+        </p:nvSpPr>
+        <p:spPr>
+          <a:xfrm>
+            <a:off x="6355080" y="2029968"/>
             <a:ext cx="2331720" cy="237744"/>
           </a:xfrm>
           <a:prstGeom prst="rect">
@@ -6499,14 +6337,14 @@
       </p:sp>
       <p:sp>
         <p:nvSpPr>
-          <p:cNvPr id="28" name="bloque Desarrollo texto"/>
-          <p:cNvSpPr txBox="1"/>
-          <p:nvPr/>
-        </p:nvSpPr>
-        <p:spPr>
-          <a:xfrm>
-            <a:off x="6355080" y="2322576"/>
-            <a:ext cx="2331720" cy="694944"/>
+          <p:cNvPr id="29" name="bloque Desarrollo texto"/>
+          <p:cNvSpPr txBox="1"/>
+          <p:nvPr/>
+        </p:nvSpPr>
+        <p:spPr>
+          <a:xfrm>
+            <a:off x="6355080" y="2267712"/>
+            <a:ext cx="2331720" cy="676656"/>
           </a:xfrm>
           <a:prstGeom prst="rect">
             <a:avLst/>
@@ -6522,7 +6360,7 @@
               <a:buNone/>
             </a:pPr>
             <a:r>
-              <a:rPr lang="en-US" sz="1100" dirty="0">
+              <a:rPr lang="en-US" sz="1000" dirty="0">
                 <a:solidFill>
                   <a:srgbClr val="5C5C5C"/>
                 </a:solidFill>
@@ -6530,15 +6368,15 @@
                 <a:ea typeface="Arial" pitchFamily="34" charset="-122"/>
                 <a:cs typeface="Arial" pitchFamily="34" charset="-120"/>
               </a:rPr>
-              <a:t>Los dos camiones avanzan uno hacia el otro, cada uno en su carril, y se detienen a la distancia establecida.</a:t>
-            </a:r>
-            <a:endParaRPr lang="en-US" sz="1100" dirty="0"/>
+              <a:t>Los camiones circulan en sentidos contrarios por carriles distintos y se cruzan en el punto marcado. Sin riesgo latente: el sistema informa, no interviene.</a:t>
+            </a:r>
+            <a:endParaRPr lang="en-US" sz="1000" dirty="0"/>
           </a:p>
         </p:txBody>
       </p:sp>
       <p:pic>
         <p:nvPicPr>
-          <p:cNvPr id="29" name="bloque Seguridad icono" descr="preencoded.png">    </p:cNvPr>
+          <p:cNvPr id="30" name="bloque Seguridad icono" descr="preencoded.png">    </p:cNvPr>
           <p:cNvPicPr>
             <a:picLocks noChangeAspect="1"/>
           </p:cNvPicPr>
@@ -6552,7 +6390,7 @@
         </p:blipFill>
         <p:spPr>
           <a:xfrm>
-            <a:off x="5852160" y="3090672"/>
+            <a:off x="5852160" y="2980944"/>
             <a:ext cx="347472" cy="347472"/>
           </a:xfrm>
           <a:prstGeom prst="rect">
@@ -6562,13 +6400,13 @@
       </p:pic>
       <p:sp>
         <p:nvSpPr>
-          <p:cNvPr id="30" name="bloque Seguridad título"/>
-          <p:cNvSpPr txBox="1"/>
-          <p:nvPr/>
-        </p:nvSpPr>
-        <p:spPr>
-          <a:xfrm>
-            <a:off x="6355080" y="3072384"/>
+          <p:cNvPr id="31" name="bloque Seguridad título"/>
+          <p:cNvSpPr txBox="1"/>
+          <p:nvPr/>
+        </p:nvSpPr>
+        <p:spPr>
+          <a:xfrm>
+            <a:off x="6355080" y="2962656"/>
             <a:ext cx="2331720" cy="237744"/>
           </a:xfrm>
           <a:prstGeom prst="rect">
@@ -6601,14 +6439,14 @@
       </p:sp>
       <p:sp>
         <p:nvSpPr>
-          <p:cNvPr id="31" name="bloque Seguridad texto"/>
-          <p:cNvSpPr txBox="1"/>
-          <p:nvPr/>
-        </p:nvSpPr>
-        <p:spPr>
-          <a:xfrm>
-            <a:off x="6355080" y="3310128"/>
-            <a:ext cx="2331720" cy="694944"/>
+          <p:cNvPr id="32" name="bloque Seguridad texto"/>
+          <p:cNvSpPr txBox="1"/>
+          <p:nvPr/>
+        </p:nvSpPr>
+        <p:spPr>
+          <a:xfrm>
+            <a:off x="6355080" y="3200400"/>
+            <a:ext cx="2331720" cy="676656"/>
           </a:xfrm>
           <a:prstGeom prst="rect">
             <a:avLst/>
@@ -6624,7 +6462,7 @@
               <a:buNone/>
             </a:pPr>
             <a:r>
-              <a:rPr lang="en-US" sz="1100" dirty="0">
+              <a:rPr lang="en-US" sz="1000" dirty="0">
                 <a:solidFill>
                   <a:srgbClr val="5C5C5C"/>
                 </a:solidFill>
@@ -6632,22 +6470,22 @@
                 <a:ea typeface="Arial" pitchFamily="34" charset="-122"/>
                 <a:cs typeface="Arial" pitchFamily="34" charset="-120"/>
               </a:rPr>
-              <a:t>Carriles separados: no hay enfrentamiento directo. Distancia de parada acordada antes de iniciar.</a:t>
-            </a:r>
-            <a:endParaRPr lang="en-US" sz="1100" dirty="0"/>
-          </a:p>
-        </p:txBody>
-      </p:sp>
-      <p:sp>
-        <p:nvSpPr>
-          <p:cNvPr id="32" name="etiqueta productos prueba"/>
-          <p:cNvSpPr txBox="1"/>
-          <p:nvPr/>
-        </p:nvSpPr>
-        <p:spPr>
-          <a:xfrm>
-            <a:off x="6355080" y="4041648"/>
-            <a:ext cx="1097280" cy="201168"/>
+              <a:t>Se mantiene la separación lateral entre carriles. Velocidad reducida y constante.</a:t>
+            </a:r>
+            <a:endParaRPr lang="en-US" sz="1000" dirty="0"/>
+          </a:p>
+        </p:txBody>
+      </p:sp>
+      <p:sp>
+        <p:nvSpPr>
+          <p:cNvPr id="33" name="etiqueta productos fila"/>
+          <p:cNvSpPr txBox="1"/>
+          <p:nvPr/>
+        </p:nvSpPr>
+        <p:spPr>
+          <a:xfrm>
+            <a:off x="6355080" y="3931920"/>
+            <a:ext cx="1371600" cy="201168"/>
           </a:xfrm>
           <a:prstGeom prst="rect">
             <a:avLst/>
@@ -6679,13 +6517,13 @@
       </p:sp>
       <p:sp>
         <p:nvSpPr>
-          <p:cNvPr id="33" name="producto prueba CMS fondo"/>
+          <p:cNvPr id="34" name="producto fila CMS fondo"/>
           <p:cNvSpPr/>
           <p:nvPr/>
         </p:nvSpPr>
         <p:spPr>
           <a:xfrm>
-            <a:off x="6355080" y="4242816"/>
+            <a:off x="6355080" y="4133088"/>
             <a:ext cx="548640" cy="237744"/>
           </a:xfrm>
           <a:prstGeom prst="rect">
@@ -6694,7 +6532,7 @@
           <a:solidFill>
             <a:srgbClr val="D40319"/>
           </a:solidFill>
-          <a:ln w="12700">
+          <a:ln w="9525">
             <a:solidFill>
               <a:srgbClr val="D40319"/>
             </a:solidFill>
@@ -6704,13 +6542,13 @@
       </p:sp>
       <p:sp>
         <p:nvSpPr>
-          <p:cNvPr id="34" name="producto prueba CMS"/>
-          <p:cNvSpPr txBox="1"/>
-          <p:nvPr/>
-        </p:nvSpPr>
-        <p:spPr>
-          <a:xfrm>
-            <a:off x="6355080" y="4242816"/>
+          <p:cNvPr id="35" name="producto fila CMS"/>
+          <p:cNvSpPr txBox="1"/>
+          <p:nvPr/>
+        </p:nvSpPr>
+        <p:spPr>
+          <a:xfrm>
+            <a:off x="6355080" y="4133088"/>
             <a:ext cx="548640" cy="237744"/>
           </a:xfrm>
           <a:prstGeom prst="rect">
@@ -6743,24 +6581,24 @@
       </p:sp>
       <p:sp>
         <p:nvSpPr>
-          <p:cNvPr id="35" name="producto prueba ISA fondo"/>
+          <p:cNvPr id="36" name="producto fila WBV fondo"/>
           <p:cNvSpPr/>
           <p:nvPr/>
         </p:nvSpPr>
         <p:spPr>
           <a:xfrm>
-            <a:off x="6976872" y="4242816"/>
-            <a:ext cx="548640" cy="237744"/>
+            <a:off x="6976872" y="4133088"/>
+            <a:ext cx="960120" cy="237744"/>
           </a:xfrm>
           <a:prstGeom prst="rect">
             <a:avLst/>
           </a:prstGeom>
           <a:solidFill>
-            <a:srgbClr val="D40319"/>
+            <a:srgbClr val="FFFFFF"/>
           </a:solidFill>
           <a:ln w="12700">
             <a:solidFill>
-              <a:srgbClr val="D40319"/>
+              <a:srgbClr val="0F1C2C"/>
             </a:solidFill>
             <a:prstDash val="solid"/>
           </a:ln>
@@ -6768,14 +6606,14 @@
       </p:sp>
       <p:sp>
         <p:nvSpPr>
-          <p:cNvPr id="36" name="producto prueba ISA"/>
-          <p:cNvSpPr txBox="1"/>
-          <p:nvPr/>
-        </p:nvSpPr>
-        <p:spPr>
-          <a:xfrm>
-            <a:off x="6976872" y="4242816"/>
-            <a:ext cx="548640" cy="237744"/>
+          <p:cNvPr id="37" name="producto fila WBV"/>
+          <p:cNvSpPr txBox="1"/>
+          <p:nvPr/>
+        </p:nvSpPr>
+        <p:spPr>
+          <a:xfrm>
+            <a:off x="6976872" y="4133088"/>
+            <a:ext cx="960120" cy="237744"/>
           </a:xfrm>
           <a:prstGeom prst="rect">
             <a:avLst/>
@@ -6793,15 +6631,54 @@
             <a:r>
               <a:rPr lang="en-US" sz="850" b="1" spc="100" kern="0" dirty="0">
                 <a:solidFill>
-                  <a:srgbClr val="FFFFFF"/>
+                  <a:srgbClr val="0F1C2C"/>
                 </a:solidFill>
                 <a:latin typeface="Montserrat" pitchFamily="34" charset="0"/>
                 <a:ea typeface="Montserrat" pitchFamily="34" charset="-122"/>
                 <a:cs typeface="Montserrat" pitchFamily="34" charset="-120"/>
               </a:rPr>
-              <a:t>ISA</a:t>
+              <a:t>WBV · PASIVO</a:t>
             </a:r>
             <a:endParaRPr lang="en-US" sz="850" dirty="0"/>
+          </a:p>
+        </p:txBody>
+      </p:sp>
+      <p:sp>
+        <p:nvSpPr>
+          <p:cNvPr id="38" name="nota WBV pasivo"/>
+          <p:cNvSpPr txBox="1"/>
+          <p:nvPr/>
+        </p:nvSpPr>
+        <p:spPr>
+          <a:xfrm>
+            <a:off x="6355080" y="4407408"/>
+            <a:ext cx="2514600" cy="182880"/>
+          </a:xfrm>
+          <a:prstGeom prst="rect">
+            <a:avLst/>
+          </a:prstGeom>
+          <a:noFill/>
+          <a:ln/>
+        </p:spPr>
+        <p:txBody>
+          <a:bodyPr wrap="square" lIns="0" tIns="0" rIns="0" bIns="0" rtlCol="0" anchor="t"/>
+          <a:lstStyle/>
+          <a:p>
+            <a:pPr indent="0" marL="0">
+              <a:buNone/>
+            </a:pPr>
+            <a:r>
+              <a:rPr lang="en-US" sz="750" dirty="0">
+                <a:solidFill>
+                  <a:srgbClr val="8C8C8C"/>
+                </a:solidFill>
+                <a:latin typeface="Arial" pitchFamily="34" charset="0"/>
+                <a:ea typeface="Arial" pitchFamily="34" charset="-122"/>
+                <a:cs typeface="Arial" pitchFamily="34" charset="-120"/>
+              </a:rPr>
+              <a:t>WBV registra datos en segundo plano durante toda la sesión</a:t>
+            </a:r>
+            <a:endParaRPr lang="en-US" sz="750" dirty="0"/>
           </a:p>
         </p:txBody>
       </p:sp>
@@ -6884,7 +6761,7 @@
         <p:spPr>
           <a:xfrm>
             <a:off x="1920240" y="274320"/>
-            <a:ext cx="5760720" cy="502920"/>
+            <a:ext cx="5394960" cy="502920"/>
           </a:xfrm>
           <a:prstGeom prst="rect">
             <a:avLst/>
@@ -6922,7 +6799,7 @@
                 <a:ea typeface="Montserrat" pitchFamily="34" charset="-122"/>
                 <a:cs typeface="Montserrat" pitchFamily="34" charset="-120"/>
               </a:rPr>
-              <a:t>CRUCE EN CARRILES DISTINTOS</a:t>
+              <a:t>ENFRENTAMIENTO</a:t>
             </a:r>
             <a:endParaRPr lang="en-US" sz="2000" dirty="0"/>
           </a:p>
@@ -6945,7 +6822,7 @@
           <a:solidFill>
             <a:srgbClr val="D9D9D9"/>
           </a:solidFill>
-          <a:ln w="12700">
+          <a:ln w="9525">
             <a:solidFill>
               <a:srgbClr val="D9D9D9"/>
             </a:solidFill>
@@ -7120,8 +6997,8 @@
         </p:blipFill>
         <p:spPr>
           <a:xfrm>
-            <a:off x="2450592" y="2018685"/>
-            <a:ext cx="365760" cy="351750"/>
+            <a:off x="1856232" y="2018685"/>
+            <a:ext cx="411480" cy="351750"/>
           </a:xfrm>
           <a:prstGeom prst="rect">
             <a:avLst/>
@@ -7144,8 +7021,8 @@
         </p:blipFill>
         <p:spPr>
           <a:xfrm>
-            <a:off x="2816352" y="2018685"/>
-            <a:ext cx="731520" cy="351750"/>
+            <a:off x="2267712" y="2018685"/>
+            <a:ext cx="777240" cy="351750"/>
           </a:xfrm>
           <a:prstGeom prst="rect">
             <a:avLst/>
@@ -7168,7 +7045,7 @@
         </p:blipFill>
         <p:spPr>
           <a:xfrm>
-            <a:off x="1600200" y="1990054"/>
+            <a:off x="1005840" y="1990054"/>
             <a:ext cx="822960" cy="409011"/>
           </a:xfrm>
           <a:prstGeom prst="rect">
@@ -7184,7 +7061,7 @@
         </p:nvSpPr>
         <p:spPr>
           <a:xfrm>
-            <a:off x="1636776" y="1990054"/>
+            <a:off x="1042416" y="1990054"/>
             <a:ext cx="411480" cy="409011"/>
           </a:xfrm>
           <a:prstGeom prst="rect">
@@ -7231,8 +7108,8 @@
         </p:blipFill>
         <p:spPr>
           <a:xfrm>
-            <a:off x="3127248" y="2750205"/>
-            <a:ext cx="365760" cy="351750"/>
+            <a:off x="3675888" y="2018685"/>
+            <a:ext cx="411480" cy="351750"/>
           </a:xfrm>
           <a:prstGeom prst="rect">
             <a:avLst/>
@@ -7255,8 +7132,8 @@
         </p:blipFill>
         <p:spPr>
           <a:xfrm>
-            <a:off x="2395728" y="2750205"/>
-            <a:ext cx="731520" cy="351750"/>
+            <a:off x="2898648" y="2018685"/>
+            <a:ext cx="777240" cy="351750"/>
           </a:xfrm>
           <a:prstGeom prst="rect">
             <a:avLst/>
@@ -7279,7 +7156,7 @@
         </p:blipFill>
         <p:spPr>
           <a:xfrm>
-            <a:off x="3520440" y="2721574"/>
+            <a:off x="4114800" y="1990054"/>
             <a:ext cx="822960" cy="409011"/>
           </a:xfrm>
           <a:prstGeom prst="rect">
@@ -7295,7 +7172,7 @@
         </p:nvSpPr>
         <p:spPr>
           <a:xfrm>
-            <a:off x="3895344" y="2721574"/>
+            <a:off x="4489704" y="1990054"/>
             <a:ext cx="411480" cy="409011"/>
           </a:xfrm>
           <a:prstGeom prst="rect">
@@ -7328,37 +7205,14 @@
       </p:sp>
       <p:sp>
         <p:nvSpPr>
-          <p:cNvPr id="17" name="punto de cruce"/>
-          <p:cNvSpPr/>
-          <p:nvPr/>
-        </p:nvSpPr>
-        <p:spPr>
-          <a:xfrm>
-            <a:off x="2971800" y="1783080"/>
-            <a:ext cx="0" cy="1554480"/>
-          </a:xfrm>
-          <a:prstGeom prst="line">
-            <a:avLst/>
-          </a:prstGeom>
-          <a:noFill/>
-          <a:ln w="15875">
-            <a:solidFill>
-              <a:srgbClr val="D40319"/>
-            </a:solidFill>
-            <a:prstDash val="sysDash"/>
-          </a:ln>
-        </p:spPr>
-      </p:sp>
-      <p:sp>
-        <p:nvSpPr>
-          <p:cNvPr id="18" name="nota P2"/>
-          <p:cNvSpPr txBox="1"/>
-          <p:nvPr/>
-        </p:nvSpPr>
-        <p:spPr>
-          <a:xfrm>
-            <a:off x="2286000" y="3401568"/>
-            <a:ext cx="1371600" cy="274320"/>
+          <p:cNvPr id="17" name="nota P2"/>
+          <p:cNvSpPr txBox="1"/>
+          <p:nvPr/>
+        </p:nvSpPr>
+        <p:spPr>
+          <a:xfrm>
+            <a:off x="731520" y="3401568"/>
+            <a:ext cx="4480560" cy="274320"/>
           </a:xfrm>
           <a:prstGeom prst="rect">
             <a:avLst/>
@@ -7376,21 +7230,85 @@
             <a:r>
               <a:rPr lang="en-US" sz="1000" dirty="0">
                 <a:solidFill>
-                  <a:srgbClr val="D40319"/>
+                  <a:srgbClr val="5C5C5C"/>
                 </a:solidFill>
                 <a:latin typeface="Arial" pitchFamily="34" charset="0"/>
                 <a:ea typeface="Arial" pitchFamily="34" charset="-122"/>
                 <a:cs typeface="Arial" pitchFamily="34" charset="-120"/>
               </a:rPr>
-              <a:t>Punto de cruce</a:t>
+              <a:t>Ambos camiones en el mismo carril</a:t>
             </a:r>
             <a:endParaRPr lang="en-US" sz="1000" dirty="0"/>
+          </a:p>
+        </p:txBody>
+      </p:sp>
+      <p:sp>
+        <p:nvSpPr>
+          <p:cNvPr id="18" name="distancia aproximación"/>
+          <p:cNvSpPr/>
+          <p:nvPr/>
+        </p:nvSpPr>
+        <p:spPr>
+          <a:xfrm>
+            <a:off x="1856232" y="2926080"/>
+            <a:ext cx="2231136" cy="0"/>
+          </a:xfrm>
+          <a:prstGeom prst="line">
+            <a:avLst/>
+          </a:prstGeom>
+          <a:noFill/>
+          <a:ln w="12700">
+            <a:solidFill>
+              <a:srgbClr val="8C8C8C"/>
+            </a:solidFill>
+            <a:prstDash val="solid"/>
+            <a:headEnd type="triangle"/>
+            <a:tailEnd type="triangle"/>
+          </a:ln>
+        </p:spPr>
+      </p:sp>
+      <p:sp>
+        <p:nvSpPr>
+          <p:cNvPr id="19" name="etiqueta distancia P2"/>
+          <p:cNvSpPr txBox="1"/>
+          <p:nvPr/>
+        </p:nvSpPr>
+        <p:spPr>
+          <a:xfrm>
+            <a:off x="1828800" y="2990088"/>
+            <a:ext cx="2286000" cy="201168"/>
+          </a:xfrm>
+          <a:prstGeom prst="rect">
+            <a:avLst/>
+          </a:prstGeom>
+          <a:noFill/>
+          <a:ln/>
+        </p:spPr>
+        <p:txBody>
+          <a:bodyPr wrap="square" lIns="0" tIns="0" rIns="0" bIns="0" rtlCol="0" anchor="t"/>
+          <a:lstStyle/>
+          <a:p>
+            <a:pPr algn="ctr" indent="0" marL="0">
+              <a:buNone/>
+            </a:pPr>
+            <a:r>
+              <a:rPr lang="en-US" sz="900" dirty="0">
+                <a:solidFill>
+                  <a:srgbClr val="8C8C8C"/>
+                </a:solidFill>
+                <a:latin typeface="Arial" pitchFamily="34" charset="0"/>
+                <a:ea typeface="Arial" pitchFamily="34" charset="-122"/>
+                <a:cs typeface="Arial" pitchFamily="34" charset="-120"/>
+              </a:rPr>
+              <a:t>Distancia de aproximación</a:t>
+            </a:r>
+            <a:endParaRPr lang="en-US" sz="900" dirty="0"/>
           </a:p>
         </p:txBody>
       </p:sp>
       <p:pic>
         <p:nvPicPr>
-          <p:cNvPr id="19" name="leyenda seguridad" descr="preencoded.png">    </p:cNvPr>
+          <p:cNvPr id="20" name="leyenda seguridad" descr="preencoded.png">    </p:cNvPr>
           <p:cNvPicPr>
             <a:picLocks noChangeAspect="1"/>
           </p:cNvPicPr>
@@ -7414,7 +7332,7 @@
       </p:pic>
       <p:sp>
         <p:nvSpPr>
-          <p:cNvPr id="20" name="leyenda seguridad texto"/>
+          <p:cNvPr id="21" name="leyenda seguridad texto"/>
           <p:cNvSpPr txBox="1"/>
           <p:nvPr/>
         </p:nvSpPr>
@@ -7453,7 +7371,7 @@
       </p:sp>
       <p:pic>
         <p:nvPicPr>
-          <p:cNvPr id="21" name="leyenda frenado" descr="preencoded.png">    </p:cNvPr>
+          <p:cNvPr id="22" name="leyenda frenado" descr="preencoded.png">    </p:cNvPr>
           <p:cNvPicPr>
             <a:picLocks noChangeAspect="1"/>
           </p:cNvPicPr>
@@ -7477,7 +7395,7 @@
       </p:pic>
       <p:sp>
         <p:nvSpPr>
-          <p:cNvPr id="22" name="leyenda frenado texto"/>
+          <p:cNvPr id="23" name="leyenda frenado texto"/>
           <p:cNvSpPr txBox="1"/>
           <p:nvPr/>
         </p:nvSpPr>
@@ -7516,7 +7434,7 @@
       </p:sp>
       <p:sp>
         <p:nvSpPr>
-          <p:cNvPr id="23" name="leyenda túnel"/>
+          <p:cNvPr id="24" name="leyenda túnel"/>
           <p:cNvSpPr txBox="1"/>
           <p:nvPr/>
         </p:nvSpPr>
@@ -7555,7 +7473,7 @@
       </p:sp>
       <p:pic>
         <p:nvPicPr>
-          <p:cNvPr id="24" name="bloque Objetivo icono" descr="preencoded.png">    </p:cNvPr>
+          <p:cNvPr id="25" name="bloque Objetivo icono" descr="preencoded.png">    </p:cNvPr>
           <p:cNvPicPr>
             <a:picLocks noChangeAspect="1"/>
           </p:cNvPicPr>
@@ -7579,7 +7497,7 @@
       </p:pic>
       <p:sp>
         <p:nvSpPr>
-          <p:cNvPr id="25" name="bloque Objetivo título"/>
+          <p:cNvPr id="26" name="bloque Objetivo título"/>
           <p:cNvSpPr txBox="1"/>
           <p:nvPr/>
         </p:nvSpPr>
@@ -7618,14 +7536,14 @@
       </p:sp>
       <p:sp>
         <p:nvSpPr>
-          <p:cNvPr id="26" name="bloque Objetivo texto"/>
+          <p:cNvPr id="27" name="bloque Objetivo texto"/>
           <p:cNvSpPr txBox="1"/>
           <p:nvPr/>
         </p:nvSpPr>
         <p:spPr>
           <a:xfrm>
             <a:off x="6355080" y="1335024"/>
-            <a:ext cx="2331720" cy="694944"/>
+            <a:ext cx="2331720" cy="676656"/>
           </a:xfrm>
           <a:prstGeom prst="rect">
             <a:avLst/>
@@ -7641,7 +7559,7 @@
               <a:buNone/>
             </a:pPr>
             <a:r>
-              <a:rPr lang="en-US" sz="1100" dirty="0">
+              <a:rPr lang="en-US" sz="1000" dirty="0">
                 <a:solidFill>
                   <a:srgbClr val="5C5C5C"/>
                 </a:solidFill>
@@ -7649,15 +7567,15 @@
                 <a:ea typeface="Arial" pitchFamily="34" charset="-122"/>
                 <a:cs typeface="Arial" pitchFamily="34" charset="-120"/>
               </a:rPr>
-              <a:t>Comprobar la detección lateral cuando los camiones se cruzan en sentidos opuestos.</a:t>
-            </a:r>
-            <a:endParaRPr lang="en-US" sz="1100" dirty="0"/>
+              <a:t>Comprobar la respuesta del sistema cuando dos camiones se aproximan de frente y hay que intervenir el vehículo.</a:t>
+            </a:r>
+            <a:endParaRPr lang="en-US" sz="1000" dirty="0"/>
           </a:p>
         </p:txBody>
       </p:sp>
       <p:pic>
         <p:nvPicPr>
-          <p:cNvPr id="27" name="bloque Desarrollo icono" descr="preencoded.png">    </p:cNvPr>
+          <p:cNvPr id="28" name="bloque Desarrollo icono" descr="preencoded.png">    </p:cNvPr>
           <p:cNvPicPr>
             <a:picLocks noChangeAspect="1"/>
           </p:cNvPicPr>
@@ -7671,7 +7589,7 @@
         </p:blipFill>
         <p:spPr>
           <a:xfrm>
-            <a:off x="5852160" y="2103120"/>
+            <a:off x="5852160" y="2048256"/>
             <a:ext cx="347472" cy="347472"/>
           </a:xfrm>
           <a:prstGeom prst="rect">
@@ -7681,13 +7599,13 @@
       </p:pic>
       <p:sp>
         <p:nvSpPr>
-          <p:cNvPr id="28" name="bloque Desarrollo título"/>
-          <p:cNvSpPr txBox="1"/>
-          <p:nvPr/>
-        </p:nvSpPr>
-        <p:spPr>
-          <a:xfrm>
-            <a:off x="6355080" y="2084832"/>
+          <p:cNvPr id="29" name="bloque Desarrollo título"/>
+          <p:cNvSpPr txBox="1"/>
+          <p:nvPr/>
+        </p:nvSpPr>
+        <p:spPr>
+          <a:xfrm>
+            <a:off x="6355080" y="2029968"/>
             <a:ext cx="2331720" cy="237744"/>
           </a:xfrm>
           <a:prstGeom prst="rect">
@@ -7720,14 +7638,14 @@
       </p:sp>
       <p:sp>
         <p:nvSpPr>
-          <p:cNvPr id="29" name="bloque Desarrollo texto"/>
-          <p:cNvSpPr txBox="1"/>
-          <p:nvPr/>
-        </p:nvSpPr>
-        <p:spPr>
-          <a:xfrm>
-            <a:off x="6355080" y="2322576"/>
-            <a:ext cx="2331720" cy="694944"/>
+          <p:cNvPr id="30" name="bloque Desarrollo texto"/>
+          <p:cNvSpPr txBox="1"/>
+          <p:nvPr/>
+        </p:nvSpPr>
+        <p:spPr>
+          <a:xfrm>
+            <a:off x="6355080" y="2267712"/>
+            <a:ext cx="2331720" cy="676656"/>
           </a:xfrm>
           <a:prstGeom prst="rect">
             <a:avLst/>
@@ -7743,7 +7661,7 @@
               <a:buNone/>
             </a:pPr>
             <a:r>
-              <a:rPr lang="en-US" sz="1100" dirty="0">
+              <a:rPr lang="en-US" sz="1000" dirty="0">
                 <a:solidFill>
                   <a:srgbClr val="5C5C5C"/>
                 </a:solidFill>
@@ -7751,15 +7669,15 @@
                 <a:ea typeface="Arial" pitchFamily="34" charset="-122"/>
                 <a:cs typeface="Arial" pitchFamily="34" charset="-120"/>
               </a:rPr>
-              <a:t>Los camiones circulan en sentidos contrarios por carriles distintos y se cruzan a la altura del punto marcado.</a:t>
-            </a:r>
-            <a:endParaRPr lang="en-US" sz="1100" dirty="0"/>
+              <a:t>Los camiones avanzan uno hacia el otro por el mismo carril. El sistema alerta y, al bajar de la distancia de seguridad, ISA interviene los vehículos.</a:t>
+            </a:r>
+            <a:endParaRPr lang="en-US" sz="1000" dirty="0"/>
           </a:p>
         </p:txBody>
       </p:sp>
       <p:pic>
         <p:nvPicPr>
-          <p:cNvPr id="30" name="bloque Seguridad icono" descr="preencoded.png">    </p:cNvPr>
+          <p:cNvPr id="31" name="bloque Seguridad icono" descr="preencoded.png">    </p:cNvPr>
           <p:cNvPicPr>
             <a:picLocks noChangeAspect="1"/>
           </p:cNvPicPr>
@@ -7773,7 +7691,7 @@
         </p:blipFill>
         <p:spPr>
           <a:xfrm>
-            <a:off x="5852160" y="3090672"/>
+            <a:off x="5852160" y="2980944"/>
             <a:ext cx="347472" cy="347472"/>
           </a:xfrm>
           <a:prstGeom prst="rect">
@@ -7783,13 +7701,13 @@
       </p:pic>
       <p:sp>
         <p:nvSpPr>
-          <p:cNvPr id="31" name="bloque Seguridad título"/>
-          <p:cNvSpPr txBox="1"/>
-          <p:nvPr/>
-        </p:nvSpPr>
-        <p:spPr>
-          <a:xfrm>
-            <a:off x="6355080" y="3072384"/>
+          <p:cNvPr id="32" name="bloque Seguridad título"/>
+          <p:cNvSpPr txBox="1"/>
+          <p:nvPr/>
+        </p:nvSpPr>
+        <p:spPr>
+          <a:xfrm>
+            <a:off x="6355080" y="2962656"/>
             <a:ext cx="2331720" cy="237744"/>
           </a:xfrm>
           <a:prstGeom prst="rect">
@@ -7822,14 +7740,14 @@
       </p:sp>
       <p:sp>
         <p:nvSpPr>
-          <p:cNvPr id="32" name="bloque Seguridad texto"/>
-          <p:cNvSpPr txBox="1"/>
-          <p:nvPr/>
-        </p:nvSpPr>
-        <p:spPr>
-          <a:xfrm>
-            <a:off x="6355080" y="3310128"/>
-            <a:ext cx="2331720" cy="694944"/>
+          <p:cNvPr id="33" name="bloque Seguridad texto"/>
+          <p:cNvSpPr txBox="1"/>
+          <p:nvPr/>
+        </p:nvSpPr>
+        <p:spPr>
+          <a:xfrm>
+            <a:off x="6355080" y="3200400"/>
+            <a:ext cx="2331720" cy="676656"/>
           </a:xfrm>
           <a:prstGeom prst="rect">
             <a:avLst/>
@@ -7845,7 +7763,7 @@
               <a:buNone/>
             </a:pPr>
             <a:r>
-              <a:rPr lang="en-US" sz="1100" dirty="0">
+              <a:rPr lang="en-US" sz="1000" dirty="0">
                 <a:solidFill>
                   <a:srgbClr val="5C5C5C"/>
                 </a:solidFill>
@@ -7853,22 +7771,22 @@
                 <a:ea typeface="Arial" pitchFamily="34" charset="-122"/>
                 <a:cs typeface="Arial" pitchFamily="34" charset="-120"/>
               </a:rPr>
-              <a:t>Se mantiene la separación lateral entre carriles. Velocidad reducida y constante.</a:t>
-            </a:r>
-            <a:endParaRPr lang="en-US" sz="1100" dirty="0"/>
-          </a:p>
-        </p:txBody>
-      </p:sp>
-      <p:sp>
-        <p:nvSpPr>
-          <p:cNvPr id="33" name="etiqueta productos prueba"/>
-          <p:cNvSpPr txBox="1"/>
-          <p:nvPr/>
-        </p:nvSpPr>
-        <p:spPr>
-          <a:xfrm>
-            <a:off x="6355080" y="4041648"/>
-            <a:ext cx="1097280" cy="201168"/>
+              <a:t>Sistema configurado y validado previamente. Velocidad reducida y distancia de parada acordada antes de iniciar.</a:t>
+            </a:r>
+            <a:endParaRPr lang="en-US" sz="1000" dirty="0"/>
+          </a:p>
+        </p:txBody>
+      </p:sp>
+      <p:sp>
+        <p:nvSpPr>
+          <p:cNvPr id="34" name="etiqueta productos fila"/>
+          <p:cNvSpPr txBox="1"/>
+          <p:nvPr/>
+        </p:nvSpPr>
+        <p:spPr>
+          <a:xfrm>
+            <a:off x="6355080" y="3931920"/>
+            <a:ext cx="1371600" cy="201168"/>
           </a:xfrm>
           <a:prstGeom prst="rect">
             <a:avLst/>
@@ -7900,13 +7818,13 @@
       </p:sp>
       <p:sp>
         <p:nvSpPr>
-          <p:cNvPr id="34" name="producto prueba CMS fondo"/>
+          <p:cNvPr id="35" name="producto fila CMS fondo"/>
           <p:cNvSpPr/>
           <p:nvPr/>
         </p:nvSpPr>
         <p:spPr>
           <a:xfrm>
-            <a:off x="6355080" y="4242816"/>
+            <a:off x="6355080" y="4133088"/>
             <a:ext cx="548640" cy="237744"/>
           </a:xfrm>
           <a:prstGeom prst="rect">
@@ -7915,7 +7833,7 @@
           <a:solidFill>
             <a:srgbClr val="D40319"/>
           </a:solidFill>
-          <a:ln w="12700">
+          <a:ln w="9525">
             <a:solidFill>
               <a:srgbClr val="D40319"/>
             </a:solidFill>
@@ -7925,13 +7843,13 @@
       </p:sp>
       <p:sp>
         <p:nvSpPr>
-          <p:cNvPr id="35" name="producto prueba CMS"/>
-          <p:cNvSpPr txBox="1"/>
-          <p:nvPr/>
-        </p:nvSpPr>
-        <p:spPr>
-          <a:xfrm>
-            <a:off x="6355080" y="4242816"/>
+          <p:cNvPr id="36" name="producto fila CMS"/>
+          <p:cNvSpPr txBox="1"/>
+          <p:nvPr/>
+        </p:nvSpPr>
+        <p:spPr>
+          <a:xfrm>
+            <a:off x="6355080" y="4133088"/>
             <a:ext cx="548640" cy="237744"/>
           </a:xfrm>
           <a:prstGeom prst="rect">
@@ -7959,6 +7877,173 @@
               <a:t>CMS</a:t>
             </a:r>
             <a:endParaRPr lang="en-US" sz="850" dirty="0"/>
+          </a:p>
+        </p:txBody>
+      </p:sp>
+      <p:sp>
+        <p:nvSpPr>
+          <p:cNvPr id="37" name="producto fila ISA fondo"/>
+          <p:cNvSpPr/>
+          <p:nvPr/>
+        </p:nvSpPr>
+        <p:spPr>
+          <a:xfrm>
+            <a:off x="6976872" y="4133088"/>
+            <a:ext cx="548640" cy="237744"/>
+          </a:xfrm>
+          <a:prstGeom prst="rect">
+            <a:avLst/>
+          </a:prstGeom>
+          <a:solidFill>
+            <a:srgbClr val="D40319"/>
+          </a:solidFill>
+          <a:ln w="9525">
+            <a:solidFill>
+              <a:srgbClr val="D40319"/>
+            </a:solidFill>
+            <a:prstDash val="solid"/>
+          </a:ln>
+        </p:spPr>
+      </p:sp>
+      <p:sp>
+        <p:nvSpPr>
+          <p:cNvPr id="38" name="producto fila ISA"/>
+          <p:cNvSpPr txBox="1"/>
+          <p:nvPr/>
+        </p:nvSpPr>
+        <p:spPr>
+          <a:xfrm>
+            <a:off x="6976872" y="4133088"/>
+            <a:ext cx="548640" cy="237744"/>
+          </a:xfrm>
+          <a:prstGeom prst="rect">
+            <a:avLst/>
+          </a:prstGeom>
+          <a:noFill/>
+          <a:ln/>
+        </p:spPr>
+        <p:txBody>
+          <a:bodyPr wrap="square" lIns="0" tIns="0" rIns="0" bIns="0" rtlCol="0" anchor="ctr"/>
+          <a:lstStyle/>
+          <a:p>
+            <a:pPr algn="ctr" indent="0" marL="0">
+              <a:buNone/>
+            </a:pPr>
+            <a:r>
+              <a:rPr lang="en-US" sz="850" b="1" spc="100" kern="0" dirty="0">
+                <a:solidFill>
+                  <a:srgbClr val="FFFFFF"/>
+                </a:solidFill>
+                <a:latin typeface="Montserrat" pitchFamily="34" charset="0"/>
+                <a:ea typeface="Montserrat" pitchFamily="34" charset="-122"/>
+                <a:cs typeface="Montserrat" pitchFamily="34" charset="-120"/>
+              </a:rPr>
+              <a:t>ISA</a:t>
+            </a:r>
+            <a:endParaRPr lang="en-US" sz="850" dirty="0"/>
+          </a:p>
+        </p:txBody>
+      </p:sp>
+      <p:sp>
+        <p:nvSpPr>
+          <p:cNvPr id="39" name="producto fila WBV fondo"/>
+          <p:cNvSpPr/>
+          <p:nvPr/>
+        </p:nvSpPr>
+        <p:spPr>
+          <a:xfrm>
+            <a:off x="7598664" y="4133088"/>
+            <a:ext cx="960120" cy="237744"/>
+          </a:xfrm>
+          <a:prstGeom prst="rect">
+            <a:avLst/>
+          </a:prstGeom>
+          <a:solidFill>
+            <a:srgbClr val="FFFFFF"/>
+          </a:solidFill>
+          <a:ln w="12700">
+            <a:solidFill>
+              <a:srgbClr val="0F1C2C"/>
+            </a:solidFill>
+            <a:prstDash val="solid"/>
+          </a:ln>
+        </p:spPr>
+      </p:sp>
+      <p:sp>
+        <p:nvSpPr>
+          <p:cNvPr id="40" name="producto fila WBV"/>
+          <p:cNvSpPr txBox="1"/>
+          <p:nvPr/>
+        </p:nvSpPr>
+        <p:spPr>
+          <a:xfrm>
+            <a:off x="7598664" y="4133088"/>
+            <a:ext cx="960120" cy="237744"/>
+          </a:xfrm>
+          <a:prstGeom prst="rect">
+            <a:avLst/>
+          </a:prstGeom>
+          <a:noFill/>
+          <a:ln/>
+        </p:spPr>
+        <p:txBody>
+          <a:bodyPr wrap="square" lIns="0" tIns="0" rIns="0" bIns="0" rtlCol="0" anchor="ctr"/>
+          <a:lstStyle/>
+          <a:p>
+            <a:pPr algn="ctr" indent="0" marL="0">
+              <a:buNone/>
+            </a:pPr>
+            <a:r>
+              <a:rPr lang="en-US" sz="850" b="1" spc="100" kern="0" dirty="0">
+                <a:solidFill>
+                  <a:srgbClr val="0F1C2C"/>
+                </a:solidFill>
+                <a:latin typeface="Montserrat" pitchFamily="34" charset="0"/>
+                <a:ea typeface="Montserrat" pitchFamily="34" charset="-122"/>
+                <a:cs typeface="Montserrat" pitchFamily="34" charset="-120"/>
+              </a:rPr>
+              <a:t>WBV · PASIVO</a:t>
+            </a:r>
+            <a:endParaRPr lang="en-US" sz="850" dirty="0"/>
+          </a:p>
+        </p:txBody>
+      </p:sp>
+      <p:sp>
+        <p:nvSpPr>
+          <p:cNvPr id="41" name="nota WBV pasivo"/>
+          <p:cNvSpPr txBox="1"/>
+          <p:nvPr/>
+        </p:nvSpPr>
+        <p:spPr>
+          <a:xfrm>
+            <a:off x="6355080" y="4407408"/>
+            <a:ext cx="2514600" cy="182880"/>
+          </a:xfrm>
+          <a:prstGeom prst="rect">
+            <a:avLst/>
+          </a:prstGeom>
+          <a:noFill/>
+          <a:ln/>
+        </p:spPr>
+        <p:txBody>
+          <a:bodyPr wrap="square" lIns="0" tIns="0" rIns="0" bIns="0" rtlCol="0" anchor="t"/>
+          <a:lstStyle/>
+          <a:p>
+            <a:pPr indent="0" marL="0">
+              <a:buNone/>
+            </a:pPr>
+            <a:r>
+              <a:rPr lang="en-US" sz="750" dirty="0">
+                <a:solidFill>
+                  <a:srgbClr val="8C8C8C"/>
+                </a:solidFill>
+                <a:latin typeface="Arial" pitchFamily="34" charset="0"/>
+                <a:ea typeface="Arial" pitchFamily="34" charset="-122"/>
+                <a:cs typeface="Arial" pitchFamily="34" charset="-120"/>
+              </a:rPr>
+              <a:t>WBV registra datos en segundo plano durante toda la sesión</a:t>
+            </a:r>
+            <a:endParaRPr lang="en-US" sz="750" dirty="0"/>
           </a:p>
         </p:txBody>
       </p:sp>
@@ -8041,7 +8126,7 @@
         <p:spPr>
           <a:xfrm>
             <a:off x="1920240" y="274320"/>
-            <a:ext cx="5760720" cy="502920"/>
+            <a:ext cx="5394960" cy="502920"/>
           </a:xfrm>
           <a:prstGeom prst="rect">
             <a:avLst/>
@@ -8102,7 +8187,7 @@
           <a:solidFill>
             <a:srgbClr val="D9D9D9"/>
           </a:solidFill>
-          <a:ln w="12700">
+          <a:ln w="9525">
             <a:solidFill>
               <a:srgbClr val="D9D9D9"/>
             </a:solidFill>
@@ -8823,7 +8908,7 @@
         <p:spPr>
           <a:xfrm>
             <a:off x="6355080" y="1335024"/>
-            <a:ext cx="2331720" cy="694944"/>
+            <a:ext cx="2331720" cy="676656"/>
           </a:xfrm>
           <a:prstGeom prst="rect">
             <a:avLst/>
@@ -8839,7 +8924,7 @@
               <a:buNone/>
             </a:pPr>
             <a:r>
-              <a:rPr lang="en-US" sz="1100" dirty="0">
+              <a:rPr lang="en-US" sz="1000" dirty="0">
                 <a:solidFill>
                   <a:srgbClr val="5C5C5C"/>
                 </a:solidFill>
@@ -8849,7 +8934,7 @@
               </a:rPr>
               <a:t>Comprobar la respuesta del sistema con un camión circulando detrás de otro.</a:t>
             </a:r>
-            <a:endParaRPr lang="en-US" sz="1100" dirty="0"/>
+            <a:endParaRPr lang="en-US" sz="1000" dirty="0"/>
           </a:p>
         </p:txBody>
       </p:sp>
@@ -8869,7 +8954,7 @@
         </p:blipFill>
         <p:spPr>
           <a:xfrm>
-            <a:off x="5852160" y="2103120"/>
+            <a:off x="5852160" y="2048256"/>
             <a:ext cx="347472" cy="347472"/>
           </a:xfrm>
           <a:prstGeom prst="rect">
@@ -8885,7 +8970,7 @@
         </p:nvSpPr>
         <p:spPr>
           <a:xfrm>
-            <a:off x="6355080" y="2084832"/>
+            <a:off x="6355080" y="2029968"/>
             <a:ext cx="2331720" cy="237744"/>
           </a:xfrm>
           <a:prstGeom prst="rect">
@@ -8924,8 +9009,8 @@
         </p:nvSpPr>
         <p:spPr>
           <a:xfrm>
-            <a:off x="6355080" y="2322576"/>
-            <a:ext cx="2331720" cy="694944"/>
+            <a:off x="6355080" y="2267712"/>
+            <a:ext cx="2331720" cy="676656"/>
           </a:xfrm>
           <a:prstGeom prst="rect">
             <a:avLst/>
@@ -8941,7 +9026,7 @@
               <a:buNone/>
             </a:pPr>
             <a:r>
-              <a:rPr lang="en-US" sz="1100" dirty="0">
+              <a:rPr lang="en-US" sz="1000" dirty="0">
                 <a:solidFill>
                   <a:srgbClr val="5C5C5C"/>
                 </a:solidFill>
@@ -8949,9 +9034,9 @@
                 <a:ea typeface="Arial" pitchFamily="34" charset="-122"/>
                 <a:cs typeface="Arial" pitchFamily="34" charset="-120"/>
               </a:rPr>
-              <a:t>El camión B sigue al camión A por el mismo carril, a la distancia indicada, y reduce la separación de forma controlada.</a:t>
-            </a:r>
-            <a:endParaRPr lang="en-US" sz="1100" dirty="0"/>
+              <a:t>El camión B sigue al A por el mismo carril, a la distancia indicada. Cuando la separación baja del umbral, ISA reduce la velocidad del que sigue.</a:t>
+            </a:r>
+            <a:endParaRPr lang="en-US" sz="1000" dirty="0"/>
           </a:p>
         </p:txBody>
       </p:sp>
@@ -8971,7 +9056,7 @@
         </p:blipFill>
         <p:spPr>
           <a:xfrm>
-            <a:off x="5852160" y="3090672"/>
+            <a:off x="5852160" y="2980944"/>
             <a:ext cx="347472" cy="347472"/>
           </a:xfrm>
           <a:prstGeom prst="rect">
@@ -8987,7 +9072,7 @@
         </p:nvSpPr>
         <p:spPr>
           <a:xfrm>
-            <a:off x="6355080" y="3072384"/>
+            <a:off x="6355080" y="2962656"/>
             <a:ext cx="2331720" cy="237744"/>
           </a:xfrm>
           <a:prstGeom prst="rect">
@@ -9026,8 +9111,8 @@
         </p:nvSpPr>
         <p:spPr>
           <a:xfrm>
-            <a:off x="6355080" y="3310128"/>
-            <a:ext cx="2331720" cy="694944"/>
+            <a:off x="6355080" y="3200400"/>
+            <a:ext cx="2331720" cy="676656"/>
           </a:xfrm>
           <a:prstGeom prst="rect">
             <a:avLst/>
@@ -9043,7 +9128,7 @@
               <a:buNone/>
             </a:pPr>
             <a:r>
-              <a:rPr lang="en-US" sz="1100" dirty="0">
+              <a:rPr lang="en-US" sz="1000" dirty="0">
                 <a:solidFill>
                   <a:srgbClr val="5C5C5C"/>
                 </a:solidFill>
@@ -9053,20 +9138,20 @@
               </a:rPr>
               <a:t>Mismo sentido y velocidad reducida. El camión que sigue mantiene siempre margen de frenado.</a:t>
             </a:r>
-            <a:endParaRPr lang="en-US" sz="1100" dirty="0"/>
-          </a:p>
-        </p:txBody>
-      </p:sp>
-      <p:sp>
-        <p:nvSpPr>
-          <p:cNvPr id="34" name="etiqueta productos prueba"/>
-          <p:cNvSpPr txBox="1"/>
-          <p:nvPr/>
-        </p:nvSpPr>
-        <p:spPr>
-          <a:xfrm>
-            <a:off x="6355080" y="4041648"/>
-            <a:ext cx="1097280" cy="201168"/>
+            <a:endParaRPr lang="en-US" sz="1000" dirty="0"/>
+          </a:p>
+        </p:txBody>
+      </p:sp>
+      <p:sp>
+        <p:nvSpPr>
+          <p:cNvPr id="34" name="etiqueta productos fila"/>
+          <p:cNvSpPr txBox="1"/>
+          <p:nvPr/>
+        </p:nvSpPr>
+        <p:spPr>
+          <a:xfrm>
+            <a:off x="6355080" y="3931920"/>
+            <a:ext cx="1371600" cy="201168"/>
           </a:xfrm>
           <a:prstGeom prst="rect">
             <a:avLst/>
@@ -9098,13 +9183,13 @@
       </p:sp>
       <p:sp>
         <p:nvSpPr>
-          <p:cNvPr id="35" name="producto prueba CMS fondo"/>
+          <p:cNvPr id="35" name="producto fila CMS fondo"/>
           <p:cNvSpPr/>
           <p:nvPr/>
         </p:nvSpPr>
         <p:spPr>
           <a:xfrm>
-            <a:off x="6355080" y="4242816"/>
+            <a:off x="6355080" y="4133088"/>
             <a:ext cx="548640" cy="237744"/>
           </a:xfrm>
           <a:prstGeom prst="rect">
@@ -9113,7 +9198,7 @@
           <a:solidFill>
             <a:srgbClr val="D40319"/>
           </a:solidFill>
-          <a:ln w="12700">
+          <a:ln w="9525">
             <a:solidFill>
               <a:srgbClr val="D40319"/>
             </a:solidFill>
@@ -9123,13 +9208,13 @@
       </p:sp>
       <p:sp>
         <p:nvSpPr>
-          <p:cNvPr id="36" name="producto prueba CMS"/>
-          <p:cNvSpPr txBox="1"/>
-          <p:nvPr/>
-        </p:nvSpPr>
-        <p:spPr>
-          <a:xfrm>
-            <a:off x="6355080" y="4242816"/>
+          <p:cNvPr id="36" name="producto fila CMS"/>
+          <p:cNvSpPr txBox="1"/>
+          <p:nvPr/>
+        </p:nvSpPr>
+        <p:spPr>
+          <a:xfrm>
+            <a:off x="6355080" y="4133088"/>
             <a:ext cx="548640" cy="237744"/>
           </a:xfrm>
           <a:prstGeom prst="rect">
@@ -9162,13 +9247,13 @@
       </p:sp>
       <p:sp>
         <p:nvSpPr>
-          <p:cNvPr id="37" name="producto prueba ISA fondo"/>
+          <p:cNvPr id="37" name="producto fila ISA fondo"/>
           <p:cNvSpPr/>
           <p:nvPr/>
         </p:nvSpPr>
         <p:spPr>
           <a:xfrm>
-            <a:off x="6976872" y="4242816"/>
+            <a:off x="6976872" y="4133088"/>
             <a:ext cx="548640" cy="237744"/>
           </a:xfrm>
           <a:prstGeom prst="rect">
@@ -9177,7 +9262,7 @@
           <a:solidFill>
             <a:srgbClr val="D40319"/>
           </a:solidFill>
-          <a:ln w="12700">
+          <a:ln w="9525">
             <a:solidFill>
               <a:srgbClr val="D40319"/>
             </a:solidFill>
@@ -9187,13 +9272,13 @@
       </p:sp>
       <p:sp>
         <p:nvSpPr>
-          <p:cNvPr id="38" name="producto prueba ISA"/>
-          <p:cNvSpPr txBox="1"/>
-          <p:nvPr/>
-        </p:nvSpPr>
-        <p:spPr>
-          <a:xfrm>
-            <a:off x="6976872" y="4242816"/>
+          <p:cNvPr id="38" name="producto fila ISA"/>
+          <p:cNvSpPr txBox="1"/>
+          <p:nvPr/>
+        </p:nvSpPr>
+        <p:spPr>
+          <a:xfrm>
+            <a:off x="6976872" y="4133088"/>
             <a:ext cx="548640" cy="237744"/>
           </a:xfrm>
           <a:prstGeom prst="rect">
@@ -9221,6 +9306,109 @@
               <a:t>ISA</a:t>
             </a:r>
             <a:endParaRPr lang="en-US" sz="850" dirty="0"/>
+          </a:p>
+        </p:txBody>
+      </p:sp>
+      <p:sp>
+        <p:nvSpPr>
+          <p:cNvPr id="39" name="producto fila WBV fondo"/>
+          <p:cNvSpPr/>
+          <p:nvPr/>
+        </p:nvSpPr>
+        <p:spPr>
+          <a:xfrm>
+            <a:off x="7598664" y="4133088"/>
+            <a:ext cx="960120" cy="237744"/>
+          </a:xfrm>
+          <a:prstGeom prst="rect">
+            <a:avLst/>
+          </a:prstGeom>
+          <a:solidFill>
+            <a:srgbClr val="FFFFFF"/>
+          </a:solidFill>
+          <a:ln w="12700">
+            <a:solidFill>
+              <a:srgbClr val="0F1C2C"/>
+            </a:solidFill>
+            <a:prstDash val="solid"/>
+          </a:ln>
+        </p:spPr>
+      </p:sp>
+      <p:sp>
+        <p:nvSpPr>
+          <p:cNvPr id="40" name="producto fila WBV"/>
+          <p:cNvSpPr txBox="1"/>
+          <p:nvPr/>
+        </p:nvSpPr>
+        <p:spPr>
+          <a:xfrm>
+            <a:off x="7598664" y="4133088"/>
+            <a:ext cx="960120" cy="237744"/>
+          </a:xfrm>
+          <a:prstGeom prst="rect">
+            <a:avLst/>
+          </a:prstGeom>
+          <a:noFill/>
+          <a:ln/>
+        </p:spPr>
+        <p:txBody>
+          <a:bodyPr wrap="square" lIns="0" tIns="0" rIns="0" bIns="0" rtlCol="0" anchor="ctr"/>
+          <a:lstStyle/>
+          <a:p>
+            <a:pPr algn="ctr" indent="0" marL="0">
+              <a:buNone/>
+            </a:pPr>
+            <a:r>
+              <a:rPr lang="en-US" sz="850" b="1" spc="100" kern="0" dirty="0">
+                <a:solidFill>
+                  <a:srgbClr val="0F1C2C"/>
+                </a:solidFill>
+                <a:latin typeface="Montserrat" pitchFamily="34" charset="0"/>
+                <a:ea typeface="Montserrat" pitchFamily="34" charset="-122"/>
+                <a:cs typeface="Montserrat" pitchFamily="34" charset="-120"/>
+              </a:rPr>
+              <a:t>WBV · PASIVO</a:t>
+            </a:r>
+            <a:endParaRPr lang="en-US" sz="850" dirty="0"/>
+          </a:p>
+        </p:txBody>
+      </p:sp>
+      <p:sp>
+        <p:nvSpPr>
+          <p:cNvPr id="41" name="nota WBV pasivo"/>
+          <p:cNvSpPr txBox="1"/>
+          <p:nvPr/>
+        </p:nvSpPr>
+        <p:spPr>
+          <a:xfrm>
+            <a:off x="6355080" y="4407408"/>
+            <a:ext cx="2514600" cy="182880"/>
+          </a:xfrm>
+          <a:prstGeom prst="rect">
+            <a:avLst/>
+          </a:prstGeom>
+          <a:noFill/>
+          <a:ln/>
+        </p:spPr>
+        <p:txBody>
+          <a:bodyPr wrap="square" lIns="0" tIns="0" rIns="0" bIns="0" rtlCol="0" anchor="t"/>
+          <a:lstStyle/>
+          <a:p>
+            <a:pPr indent="0" marL="0">
+              <a:buNone/>
+            </a:pPr>
+            <a:r>
+              <a:rPr lang="en-US" sz="750" dirty="0">
+                <a:solidFill>
+                  <a:srgbClr val="8C8C8C"/>
+                </a:solidFill>
+                <a:latin typeface="Arial" pitchFamily="34" charset="0"/>
+                <a:ea typeface="Arial" pitchFamily="34" charset="-122"/>
+                <a:cs typeface="Arial" pitchFamily="34" charset="-120"/>
+              </a:rPr>
+              <a:t>WBV registra datos en segundo plano durante toda la sesión</a:t>
+            </a:r>
+            <a:endParaRPr lang="en-US" sz="750" dirty="0"/>
           </a:p>
         </p:txBody>
       </p:sp>
@@ -9303,7 +9491,7 @@
         <p:spPr>
           <a:xfrm>
             <a:off x="1920240" y="274320"/>
-            <a:ext cx="5760720" cy="502920"/>
+            <a:ext cx="5394960" cy="502920"/>
           </a:xfrm>
           <a:prstGeom prst="rect">
             <a:avLst/>
@@ -9364,7 +9552,7 @@
           <a:solidFill>
             <a:srgbClr val="D9D9D9"/>
           </a:solidFill>
-          <a:ln w="12700">
+          <a:ln w="9525">
             <a:solidFill>
               <a:srgbClr val="D9D9D9"/>
             </a:solidFill>
@@ -10050,7 +10238,7 @@
         <p:spPr>
           <a:xfrm>
             <a:off x="6355080" y="1335024"/>
-            <a:ext cx="2331720" cy="694944"/>
+            <a:ext cx="2331720" cy="676656"/>
           </a:xfrm>
           <a:prstGeom prst="rect">
             <a:avLst/>
@@ -10066,7 +10254,7 @@
               <a:buNone/>
             </a:pPr>
             <a:r>
-              <a:rPr lang="en-US" sz="1100" dirty="0">
+              <a:rPr lang="en-US" sz="1000" dirty="0">
                 <a:solidFill>
                   <a:srgbClr val="5C5C5C"/>
                 </a:solidFill>
@@ -10076,7 +10264,7 @@
               </a:rPr>
               <a:t>Comprobar la detección de un camión que se aproxima desde un lateral, en una intersección.</a:t>
             </a:r>
-            <a:endParaRPr lang="en-US" sz="1100" dirty="0"/>
+            <a:endParaRPr lang="en-US" sz="1000" dirty="0"/>
           </a:p>
         </p:txBody>
       </p:sp>
@@ -10096,7 +10284,7 @@
         </p:blipFill>
         <p:spPr>
           <a:xfrm>
-            <a:off x="5852160" y="2103120"/>
+            <a:off x="5852160" y="2048256"/>
             <a:ext cx="347472" cy="347472"/>
           </a:xfrm>
           <a:prstGeom prst="rect">
@@ -10112,7 +10300,7 @@
         </p:nvSpPr>
         <p:spPr>
           <a:xfrm>
-            <a:off x="6355080" y="2084832"/>
+            <a:off x="6355080" y="2029968"/>
             <a:ext cx="2331720" cy="237744"/>
           </a:xfrm>
           <a:prstGeom prst="rect">
@@ -10151,8 +10339,8 @@
         </p:nvSpPr>
         <p:spPr>
           <a:xfrm>
-            <a:off x="6355080" y="2322576"/>
-            <a:ext cx="2331720" cy="694944"/>
+            <a:off x="6355080" y="2267712"/>
+            <a:ext cx="2331720" cy="676656"/>
           </a:xfrm>
           <a:prstGeom prst="rect">
             <a:avLst/>
@@ -10168,7 +10356,7 @@
               <a:buNone/>
             </a:pPr>
             <a:r>
-              <a:rPr lang="en-US" sz="1100" dirty="0">
+              <a:rPr lang="en-US" sz="1000" dirty="0">
                 <a:solidFill>
                   <a:srgbClr val="5C5C5C"/>
                 </a:solidFill>
@@ -10176,9 +10364,9 @@
                 <a:ea typeface="Arial" pitchFamily="34" charset="-122"/>
                 <a:cs typeface="Arial" pitchFamily="34" charset="-120"/>
               </a:rPr>
-              <a:t>El camión A circula recto; el camión B llega por la vía transversal. Los dos se detienen antes del punto de conflicto.</a:t>
-            </a:r>
-            <a:endParaRPr lang="en-US" sz="1100" dirty="0"/>
+              <a:t>El camión A circula recto; el camión B llega por la vía transversal. ISA interviene los dos vehículos antes del punto de conflicto.</a:t>
+            </a:r>
+            <a:endParaRPr lang="en-US" sz="1000" dirty="0"/>
           </a:p>
         </p:txBody>
       </p:sp>
@@ -10198,7 +10386,7 @@
         </p:blipFill>
         <p:spPr>
           <a:xfrm>
-            <a:off x="5852160" y="3090672"/>
+            <a:off x="5852160" y="2980944"/>
             <a:ext cx="347472" cy="347472"/>
           </a:xfrm>
           <a:prstGeom prst="rect">
@@ -10214,7 +10402,7 @@
         </p:nvSpPr>
         <p:spPr>
           <a:xfrm>
-            <a:off x="6355080" y="3072384"/>
+            <a:off x="6355080" y="2962656"/>
             <a:ext cx="2331720" cy="237744"/>
           </a:xfrm>
           <a:prstGeom prst="rect">
@@ -10253,8 +10441,8 @@
         </p:nvSpPr>
         <p:spPr>
           <a:xfrm>
-            <a:off x="6355080" y="3310128"/>
-            <a:ext cx="2331720" cy="694944"/>
+            <a:off x="6355080" y="3200400"/>
+            <a:ext cx="2331720" cy="676656"/>
           </a:xfrm>
           <a:prstGeom prst="rect">
             <a:avLst/>
@@ -10270,7 +10458,7 @@
               <a:buNone/>
             </a:pPr>
             <a:r>
-              <a:rPr lang="en-US" sz="1100" dirty="0">
+              <a:rPr lang="en-US" sz="1000" dirty="0">
                 <a:solidFill>
                   <a:srgbClr val="5C5C5C"/>
                 </a:solidFill>
@@ -10280,20 +10468,20 @@
               </a:rPr>
               <a:t>Nunca ocupan la intersección a la vez: hay prioridad definida y punto de parada marcado para cada uno.</a:t>
             </a:r>
-            <a:endParaRPr lang="en-US" sz="1100" dirty="0"/>
-          </a:p>
-        </p:txBody>
-      </p:sp>
-      <p:sp>
-        <p:nvSpPr>
-          <p:cNvPr id="33" name="etiqueta productos prueba"/>
-          <p:cNvSpPr txBox="1"/>
-          <p:nvPr/>
-        </p:nvSpPr>
-        <p:spPr>
-          <a:xfrm>
-            <a:off x="6355080" y="4041648"/>
-            <a:ext cx="1097280" cy="201168"/>
+            <a:endParaRPr lang="en-US" sz="1000" dirty="0"/>
+          </a:p>
+        </p:txBody>
+      </p:sp>
+      <p:sp>
+        <p:nvSpPr>
+          <p:cNvPr id="33" name="etiqueta productos fila"/>
+          <p:cNvSpPr txBox="1"/>
+          <p:nvPr/>
+        </p:nvSpPr>
+        <p:spPr>
+          <a:xfrm>
+            <a:off x="6355080" y="3931920"/>
+            <a:ext cx="1371600" cy="201168"/>
           </a:xfrm>
           <a:prstGeom prst="rect">
             <a:avLst/>
@@ -10325,13 +10513,13 @@
       </p:sp>
       <p:sp>
         <p:nvSpPr>
-          <p:cNvPr id="34" name="producto prueba CMS fondo"/>
+          <p:cNvPr id="34" name="producto fila CMS fondo"/>
           <p:cNvSpPr/>
           <p:nvPr/>
         </p:nvSpPr>
         <p:spPr>
           <a:xfrm>
-            <a:off x="6355080" y="4242816"/>
+            <a:off x="6355080" y="4133088"/>
             <a:ext cx="548640" cy="237744"/>
           </a:xfrm>
           <a:prstGeom prst="rect">
@@ -10340,7 +10528,7 @@
           <a:solidFill>
             <a:srgbClr val="D40319"/>
           </a:solidFill>
-          <a:ln w="12700">
+          <a:ln w="9525">
             <a:solidFill>
               <a:srgbClr val="D40319"/>
             </a:solidFill>
@@ -10350,13 +10538,13 @@
       </p:sp>
       <p:sp>
         <p:nvSpPr>
-          <p:cNvPr id="35" name="producto prueba CMS"/>
-          <p:cNvSpPr txBox="1"/>
-          <p:nvPr/>
-        </p:nvSpPr>
-        <p:spPr>
-          <a:xfrm>
-            <a:off x="6355080" y="4242816"/>
+          <p:cNvPr id="35" name="producto fila CMS"/>
+          <p:cNvSpPr txBox="1"/>
+          <p:nvPr/>
+        </p:nvSpPr>
+        <p:spPr>
+          <a:xfrm>
+            <a:off x="6355080" y="4133088"/>
             <a:ext cx="548640" cy="237744"/>
           </a:xfrm>
           <a:prstGeom prst="rect">
@@ -10389,13 +10577,13 @@
       </p:sp>
       <p:sp>
         <p:nvSpPr>
-          <p:cNvPr id="36" name="producto prueba ISA fondo"/>
+          <p:cNvPr id="36" name="producto fila ISA fondo"/>
           <p:cNvSpPr/>
           <p:nvPr/>
         </p:nvSpPr>
         <p:spPr>
           <a:xfrm>
-            <a:off x="6976872" y="4242816"/>
+            <a:off x="6976872" y="4133088"/>
             <a:ext cx="548640" cy="237744"/>
           </a:xfrm>
           <a:prstGeom prst="rect">
@@ -10404,7 +10592,7 @@
           <a:solidFill>
             <a:srgbClr val="D40319"/>
           </a:solidFill>
-          <a:ln w="12700">
+          <a:ln w="9525">
             <a:solidFill>
               <a:srgbClr val="D40319"/>
             </a:solidFill>
@@ -10414,13 +10602,13 @@
       </p:sp>
       <p:sp>
         <p:nvSpPr>
-          <p:cNvPr id="37" name="producto prueba ISA"/>
-          <p:cNvSpPr txBox="1"/>
-          <p:nvPr/>
-        </p:nvSpPr>
-        <p:spPr>
-          <a:xfrm>
-            <a:off x="6976872" y="4242816"/>
+          <p:cNvPr id="37" name="producto fila ISA"/>
+          <p:cNvSpPr txBox="1"/>
+          <p:nvPr/>
+        </p:nvSpPr>
+        <p:spPr>
+          <a:xfrm>
+            <a:off x="6976872" y="4133088"/>
             <a:ext cx="548640" cy="237744"/>
           </a:xfrm>
           <a:prstGeom prst="rect">
@@ -10448,6 +10636,109 @@
               <a:t>ISA</a:t>
             </a:r>
             <a:endParaRPr lang="en-US" sz="850" dirty="0"/>
+          </a:p>
+        </p:txBody>
+      </p:sp>
+      <p:sp>
+        <p:nvSpPr>
+          <p:cNvPr id="38" name="producto fila WBV fondo"/>
+          <p:cNvSpPr/>
+          <p:nvPr/>
+        </p:nvSpPr>
+        <p:spPr>
+          <a:xfrm>
+            <a:off x="7598664" y="4133088"/>
+            <a:ext cx="960120" cy="237744"/>
+          </a:xfrm>
+          <a:prstGeom prst="rect">
+            <a:avLst/>
+          </a:prstGeom>
+          <a:solidFill>
+            <a:srgbClr val="FFFFFF"/>
+          </a:solidFill>
+          <a:ln w="12700">
+            <a:solidFill>
+              <a:srgbClr val="0F1C2C"/>
+            </a:solidFill>
+            <a:prstDash val="solid"/>
+          </a:ln>
+        </p:spPr>
+      </p:sp>
+      <p:sp>
+        <p:nvSpPr>
+          <p:cNvPr id="39" name="producto fila WBV"/>
+          <p:cNvSpPr txBox="1"/>
+          <p:nvPr/>
+        </p:nvSpPr>
+        <p:spPr>
+          <a:xfrm>
+            <a:off x="7598664" y="4133088"/>
+            <a:ext cx="960120" cy="237744"/>
+          </a:xfrm>
+          <a:prstGeom prst="rect">
+            <a:avLst/>
+          </a:prstGeom>
+          <a:noFill/>
+          <a:ln/>
+        </p:spPr>
+        <p:txBody>
+          <a:bodyPr wrap="square" lIns="0" tIns="0" rIns="0" bIns="0" rtlCol="0" anchor="ctr"/>
+          <a:lstStyle/>
+          <a:p>
+            <a:pPr algn="ctr" indent="0" marL="0">
+              <a:buNone/>
+            </a:pPr>
+            <a:r>
+              <a:rPr lang="en-US" sz="850" b="1" spc="100" kern="0" dirty="0">
+                <a:solidFill>
+                  <a:srgbClr val="0F1C2C"/>
+                </a:solidFill>
+                <a:latin typeface="Montserrat" pitchFamily="34" charset="0"/>
+                <a:ea typeface="Montserrat" pitchFamily="34" charset="-122"/>
+                <a:cs typeface="Montserrat" pitchFamily="34" charset="-120"/>
+              </a:rPr>
+              <a:t>WBV · PASIVO</a:t>
+            </a:r>
+            <a:endParaRPr lang="en-US" sz="850" dirty="0"/>
+          </a:p>
+        </p:txBody>
+      </p:sp>
+      <p:sp>
+        <p:nvSpPr>
+          <p:cNvPr id="40" name="nota WBV pasivo"/>
+          <p:cNvSpPr txBox="1"/>
+          <p:nvPr/>
+        </p:nvSpPr>
+        <p:spPr>
+          <a:xfrm>
+            <a:off x="6355080" y="4407408"/>
+            <a:ext cx="2514600" cy="182880"/>
+          </a:xfrm>
+          <a:prstGeom prst="rect">
+            <a:avLst/>
+          </a:prstGeom>
+          <a:noFill/>
+          <a:ln/>
+        </p:spPr>
+        <p:txBody>
+          <a:bodyPr wrap="square" lIns="0" tIns="0" rIns="0" bIns="0" rtlCol="0" anchor="t"/>
+          <a:lstStyle/>
+          <a:p>
+            <a:pPr indent="0" marL="0">
+              <a:buNone/>
+            </a:pPr>
+            <a:r>
+              <a:rPr lang="en-US" sz="750" dirty="0">
+                <a:solidFill>
+                  <a:srgbClr val="8C8C8C"/>
+                </a:solidFill>
+                <a:latin typeface="Arial" pitchFamily="34" charset="0"/>
+                <a:ea typeface="Arial" pitchFamily="34" charset="-122"/>
+                <a:cs typeface="Arial" pitchFamily="34" charset="-120"/>
+              </a:rPr>
+              <a:t>WBV registra datos en segundo plano durante toda la sesión</a:t>
+            </a:r>
+            <a:endParaRPr lang="en-US" sz="750" dirty="0"/>
           </a:p>
         </p:txBody>
       </p:sp>
@@ -10530,7 +10821,7 @@
         <p:spPr>
           <a:xfrm>
             <a:off x="1920240" y="274320"/>
-            <a:ext cx="5760720" cy="502920"/>
+            <a:ext cx="5394960" cy="502920"/>
           </a:xfrm>
           <a:prstGeom prst="rect">
             <a:avLst/>
@@ -10546,7 +10837,7 @@
               <a:buNone/>
             </a:pPr>
             <a:r>
-              <a:rPr lang="en-US" sz="2000" spc="50" kern="0" dirty="0">
+              <a:rPr lang="en-US" sz="1600" spc="50" kern="0" dirty="0">
                 <a:solidFill>
                   <a:srgbClr val="0F1C2C"/>
                 </a:solidFill>
@@ -10560,7 +10851,7 @@
               <a:buNone/>
             </a:pPr>
             <a:r>
-              <a:rPr lang="en-US" sz="2000" b="1" spc="50" kern="0" dirty="0">
+              <a:rPr lang="en-US" sz="1600" b="1" spc="50" kern="0" dirty="0">
                 <a:solidFill>
                   <a:srgbClr val="0F1C2C"/>
                 </a:solidFill>
@@ -10568,9 +10859,9 @@
                 <a:ea typeface="Montserrat" pitchFamily="34" charset="-122"/>
                 <a:cs typeface="Montserrat" pitchFamily="34" charset="-120"/>
               </a:rPr>
-              <a:t>RECTA: VALIDACIÓN FINAL</a:t>
-            </a:r>
-            <a:endParaRPr lang="en-US" sz="2000" dirty="0"/>
+              <a:t>DETECCIÓN DE FATIGA Y MÓVIL</a:t>
+            </a:r>
+            <a:endParaRPr lang="en-US" sz="1600" dirty="0"/>
           </a:p>
         </p:txBody>
       </p:sp>
@@ -10591,7 +10882,7 @@
           <a:solidFill>
             <a:srgbClr val="D9D9D9"/>
           </a:solidFill>
-          <a:ln w="12700">
+          <a:ln w="9525">
             <a:solidFill>
               <a:srgbClr val="D9D9D9"/>
             </a:solidFill>
@@ -10752,7 +11043,7 @@
       </p:sp>
       <p:pic>
         <p:nvPicPr>
-          <p:cNvPr id="9" name="P5 camión A túnel seguridad" descr="preencoded.png">    </p:cNvPr>
+          <p:cNvPr id="9" name="P5 camión A" descr="preencoded.png">    </p:cNvPr>
           <p:cNvPicPr>
             <a:picLocks noChangeAspect="1"/>
           </p:cNvPicPr>
@@ -10766,17 +11057,120 @@
         </p:blipFill>
         <p:spPr>
           <a:xfrm>
-            <a:off x="1810512" y="2018685"/>
-            <a:ext cx="548640" cy="351750"/>
+            <a:off x="960120" y="1990054"/>
+            <a:ext cx="822960" cy="409011"/>
           </a:xfrm>
           <a:prstGeom prst="rect">
             <a:avLst/>
           </a:prstGeom>
         </p:spPr>
       </p:pic>
+      <p:sp>
+        <p:nvSpPr>
+          <p:cNvPr id="10" name="P5 camión A etiqueta"/>
+          <p:cNvSpPr txBox="1"/>
+          <p:nvPr/>
+        </p:nvSpPr>
+        <p:spPr>
+          <a:xfrm>
+            <a:off x="996696" y="1990054"/>
+            <a:ext cx="411480" cy="409011"/>
+          </a:xfrm>
+          <a:prstGeom prst="rect">
+            <a:avLst/>
+          </a:prstGeom>
+          <a:noFill/>
+          <a:ln/>
+        </p:spPr>
+        <p:txBody>
+          <a:bodyPr wrap="square" lIns="0" tIns="0" rIns="0" bIns="0" rtlCol="0" anchor="ctr"/>
+          <a:lstStyle/>
+          <a:p>
+            <a:pPr algn="ctr" indent="0" marL="0">
+              <a:buNone/>
+            </a:pPr>
+            <a:r>
+              <a:rPr lang="en-US" sz="1300" b="1" dirty="0">
+                <a:solidFill>
+                  <a:srgbClr val="8A8A8A"/>
+                </a:solidFill>
+                <a:latin typeface="Montserrat" pitchFamily="34" charset="0"/>
+                <a:ea typeface="Montserrat" pitchFamily="34" charset="-122"/>
+                <a:cs typeface="Montserrat" pitchFamily="34" charset="-120"/>
+              </a:rPr>
+              <a:t>A</a:t>
+            </a:r>
+            <a:endParaRPr lang="en-US" sz="1300" dirty="0"/>
+          </a:p>
+        </p:txBody>
+      </p:sp>
+      <p:sp>
+        <p:nvSpPr>
+          <p:cNvPr id="11" name="velocidad P5 fondo"/>
+          <p:cNvSpPr/>
+          <p:nvPr/>
+        </p:nvSpPr>
+        <p:spPr>
+          <a:xfrm>
+            <a:off x="1051560" y="2697480"/>
+            <a:ext cx="640080" cy="237744"/>
+          </a:xfrm>
+          <a:prstGeom prst="rect">
+            <a:avLst/>
+          </a:prstGeom>
+          <a:solidFill>
+            <a:srgbClr val="D9D9D9"/>
+          </a:solidFill>
+          <a:ln w="9525">
+            <a:solidFill>
+              <a:srgbClr val="D9D9D9"/>
+            </a:solidFill>
+            <a:prstDash val="solid"/>
+          </a:ln>
+        </p:spPr>
+      </p:sp>
+      <p:sp>
+        <p:nvSpPr>
+          <p:cNvPr id="12" name="velocidad P5"/>
+          <p:cNvSpPr txBox="1"/>
+          <p:nvPr/>
+        </p:nvSpPr>
+        <p:spPr>
+          <a:xfrm>
+            <a:off x="1051560" y="2697480"/>
+            <a:ext cx="640080" cy="237744"/>
+          </a:xfrm>
+          <a:prstGeom prst="rect">
+            <a:avLst/>
+          </a:prstGeom>
+          <a:noFill/>
+          <a:ln/>
+        </p:spPr>
+        <p:txBody>
+          <a:bodyPr wrap="square" lIns="0" tIns="0" rIns="0" bIns="0" rtlCol="0" anchor="ctr"/>
+          <a:lstStyle/>
+          <a:p>
+            <a:pPr algn="ctr" indent="0" marL="0">
+              <a:buNone/>
+            </a:pPr>
+            <a:r>
+              <a:rPr lang="en-US" sz="850" b="1" spc="100" kern="0" dirty="0">
+                <a:solidFill>
+                  <a:srgbClr val="0F1C2C"/>
+                </a:solidFill>
+                <a:latin typeface="Montserrat" pitchFamily="34" charset="0"/>
+                <a:ea typeface="Montserrat" pitchFamily="34" charset="-122"/>
+                <a:cs typeface="Montserrat" pitchFamily="34" charset="-120"/>
+              </a:rPr>
+              <a:t>0 KM/H</a:t>
+            </a:r>
+            <a:endParaRPr lang="en-US" sz="850" dirty="0"/>
+          </a:p>
+        </p:txBody>
+      </p:sp>
       <p:pic>
         <p:nvPicPr>
-          <p:cNvPr id="10" name="P5 camión A túnel frenado" descr="preencoded.png">    </p:cNvPr>
+          <p:cNvPr id="13" name="detección de fatiga" descr="/tmp/claude-0/-home-user-MITREPO/21d91df9-1cfc-5dbc-823a-a27b9a33fab4/scratchpad/deck/user_s17_fatiga.png">    </p:cNvPr>
           <p:cNvPicPr>
             <a:picLocks noChangeAspect="1"/>
           </p:cNvPicPr>
@@ -10790,17 +11184,95 @@
         </p:blipFill>
         <p:spPr>
           <a:xfrm>
-            <a:off x="2359152" y="2018685"/>
-            <a:ext cx="2194560" cy="351750"/>
+            <a:off x="2240280" y="1920240"/>
+            <a:ext cx="2240280" cy="1270239"/>
           </a:xfrm>
           <a:prstGeom prst="rect">
             <a:avLst/>
           </a:prstGeom>
         </p:spPr>
       </p:pic>
+      <p:sp>
+        <p:nvSpPr>
+          <p:cNvPr id="14" name="nota P5"/>
+          <p:cNvSpPr txBox="1"/>
+          <p:nvPr/>
+        </p:nvSpPr>
+        <p:spPr>
+          <a:xfrm>
+            <a:off x="731520" y="3401568"/>
+            <a:ext cx="4480560" cy="457200"/>
+          </a:xfrm>
+          <a:prstGeom prst="rect">
+            <a:avLst/>
+          </a:prstGeom>
+          <a:noFill/>
+          <a:ln/>
+        </p:spPr>
+        <p:txBody>
+          <a:bodyPr wrap="square" lIns="0" tIns="0" rIns="0" bIns="0" rtlCol="0" anchor="ctr"/>
+          <a:lstStyle/>
+          <a:p>
+            <a:pPr algn="ctr" indent="0" marL="0">
+              <a:buNone/>
+            </a:pPr>
+            <a:r>
+              <a:rPr lang="en-US" sz="1000" dirty="0">
+                <a:solidFill>
+                  <a:srgbClr val="5C5C5C"/>
+                </a:solidFill>
+                <a:latin typeface="Arial" pitchFamily="34" charset="0"/>
+                <a:ea typeface="Arial" pitchFamily="34" charset="-122"/>
+                <a:cs typeface="Arial" pitchFamily="34" charset="-120"/>
+              </a:rPr>
+              <a:t>Camión detenido: el operador reproduce en cabina los eventos de fatiga y uso del móvil</a:t>
+            </a:r>
+            <a:endParaRPr lang="en-US" sz="1000" dirty="0"/>
+          </a:p>
+        </p:txBody>
+      </p:sp>
+      <p:sp>
+        <p:nvSpPr>
+          <p:cNvPr id="15" name="fuente imágenes P5"/>
+          <p:cNvSpPr txBox="1"/>
+          <p:nvPr/>
+        </p:nvSpPr>
+        <p:spPr>
+          <a:xfrm>
+            <a:off x="731520" y="4160520"/>
+            <a:ext cx="4480560" cy="219456"/>
+          </a:xfrm>
+          <a:prstGeom prst="rect">
+            <a:avLst/>
+          </a:prstGeom>
+          <a:noFill/>
+          <a:ln/>
+        </p:spPr>
+        <p:txBody>
+          <a:bodyPr wrap="square" lIns="0" tIns="0" rIns="0" bIns="0" rtlCol="0" anchor="t"/>
+          <a:lstStyle/>
+          <a:p>
+            <a:pPr indent="0" marL="0">
+              <a:buNone/>
+            </a:pPr>
+            <a:r>
+              <a:rPr lang="en-US" sz="800" dirty="0">
+                <a:solidFill>
+                  <a:srgbClr val="B5B5B5"/>
+                </a:solidFill>
+                <a:latin typeface="Arial" pitchFamily="34" charset="0"/>
+                <a:ea typeface="Arial" pitchFamily="34" charset="-122"/>
+                <a:cs typeface="Arial" pitchFamily="34" charset="-120"/>
+              </a:rPr>
+              <a:t>Imágenes: FAS, Fatigue Awareness System. Uso autorizado por los participantes en las pruebas.</a:t>
+            </a:r>
+            <a:endParaRPr lang="en-US" sz="800" dirty="0"/>
+          </a:p>
+        </p:txBody>
+      </p:sp>
       <p:pic>
         <p:nvPicPr>
-          <p:cNvPr id="11" name="P5 camión A" descr="preencoded.png">    </p:cNvPr>
+          <p:cNvPr id="16" name="bloque Objetivo icono" descr="preencoded.png">    </p:cNvPr>
           <p:cNvPicPr>
             <a:picLocks noChangeAspect="1"/>
           </p:cNvPicPr>
@@ -10814,8 +11286,8 @@
         </p:blipFill>
         <p:spPr>
           <a:xfrm>
-            <a:off x="960120" y="1990054"/>
-            <a:ext cx="822960" cy="409011"/>
+            <a:off x="5852160" y="1115568"/>
+            <a:ext cx="347472" cy="347472"/>
           </a:xfrm>
           <a:prstGeom prst="rect">
             <a:avLst/>
@@ -10824,46 +11296,85 @@
       </p:pic>
       <p:sp>
         <p:nvSpPr>
-          <p:cNvPr id="12" name="P5 camión A etiqueta"/>
-          <p:cNvSpPr txBox="1"/>
-          <p:nvPr/>
-        </p:nvSpPr>
-        <p:spPr>
-          <a:xfrm>
-            <a:off x="996696" y="1990054"/>
-            <a:ext cx="411480" cy="409011"/>
-          </a:xfrm>
-          <a:prstGeom prst="rect">
-            <a:avLst/>
-          </a:prstGeom>
-          <a:noFill/>
-          <a:ln/>
-        </p:spPr>
-        <p:txBody>
-          <a:bodyPr wrap="square" lIns="0" tIns="0" rIns="0" bIns="0" rtlCol="0" anchor="ctr"/>
-          <a:lstStyle/>
-          <a:p>
-            <a:pPr algn="ctr" indent="0" marL="0">
-              <a:buNone/>
-            </a:pPr>
-            <a:r>
-              <a:rPr lang="en-US" sz="1300" b="1" dirty="0">
-                <a:solidFill>
-                  <a:srgbClr val="8A8A8A"/>
+          <p:cNvPr id="17" name="bloque Objetivo título"/>
+          <p:cNvSpPr txBox="1"/>
+          <p:nvPr/>
+        </p:nvSpPr>
+        <p:spPr>
+          <a:xfrm>
+            <a:off x="6355080" y="1097280"/>
+            <a:ext cx="2331720" cy="237744"/>
+          </a:xfrm>
+          <a:prstGeom prst="rect">
+            <a:avLst/>
+          </a:prstGeom>
+          <a:noFill/>
+          <a:ln/>
+        </p:spPr>
+        <p:txBody>
+          <a:bodyPr wrap="square" lIns="0" tIns="0" rIns="0" bIns="0" rtlCol="0" anchor="t"/>
+          <a:lstStyle/>
+          <a:p>
+            <a:pPr indent="0" marL="0">
+              <a:buNone/>
+            </a:pPr>
+            <a:r>
+              <a:rPr lang="en-US" sz="1200" b="1" dirty="0">
+                <a:solidFill>
+                  <a:srgbClr val="0F1C2C"/>
                 </a:solidFill>
                 <a:latin typeface="Montserrat" pitchFamily="34" charset="0"/>
                 <a:ea typeface="Montserrat" pitchFamily="34" charset="-122"/>
                 <a:cs typeface="Montserrat" pitchFamily="34" charset="-120"/>
               </a:rPr>
-              <a:t>A</a:t>
-            </a:r>
-            <a:endParaRPr lang="en-US" sz="1300" dirty="0"/>
+              <a:t>OBJETIVO</a:t>
+            </a:r>
+            <a:endParaRPr lang="en-US" sz="1200" dirty="0"/>
+          </a:p>
+        </p:txBody>
+      </p:sp>
+      <p:sp>
+        <p:nvSpPr>
+          <p:cNvPr id="18" name="bloque Objetivo texto"/>
+          <p:cNvSpPr txBox="1"/>
+          <p:nvPr/>
+        </p:nvSpPr>
+        <p:spPr>
+          <a:xfrm>
+            <a:off x="6355080" y="1335024"/>
+            <a:ext cx="2331720" cy="676656"/>
+          </a:xfrm>
+          <a:prstGeom prst="rect">
+            <a:avLst/>
+          </a:prstGeom>
+          <a:noFill/>
+          <a:ln/>
+        </p:spPr>
+        <p:txBody>
+          <a:bodyPr wrap="square" lIns="0" tIns="0" rIns="0" bIns="0" rtlCol="0" anchor="t"/>
+          <a:lstStyle/>
+          <a:p>
+            <a:pPr indent="0" marL="0">
+              <a:buNone/>
+            </a:pPr>
+            <a:r>
+              <a:rPr lang="en-US" sz="1000" dirty="0">
+                <a:solidFill>
+                  <a:srgbClr val="5C5C5C"/>
+                </a:solidFill>
+                <a:latin typeface="Arial" pitchFamily="34" charset="0"/>
+                <a:ea typeface="Arial" pitchFamily="34" charset="-122"/>
+                <a:cs typeface="Arial" pitchFamily="34" charset="-120"/>
+              </a:rPr>
+              <a:t>Validar el funcionamiento de la detección de fatiga y de uso del móvil en cabina.</a:t>
+            </a:r>
+            <a:endParaRPr lang="en-US" sz="1000" dirty="0"/>
           </a:p>
         </p:txBody>
       </p:sp>
       <p:pic>
         <p:nvPicPr>
-          <p:cNvPr id="13" name="P5 camión B túnel seguridad" descr="preencoded.png">    </p:cNvPr>
+          <p:cNvPr id="19" name="bloque Desarrollo icono" descr="preencoded.png">    </p:cNvPr>
           <p:cNvPicPr>
             <a:picLocks noChangeAspect="1"/>
           </p:cNvPicPr>
@@ -10877,17 +11388,95 @@
         </p:blipFill>
         <p:spPr>
           <a:xfrm>
-            <a:off x="1810512" y="2750205"/>
-            <a:ext cx="548640" cy="351750"/>
+            <a:off x="5852160" y="2048256"/>
+            <a:ext cx="347472" cy="347472"/>
           </a:xfrm>
           <a:prstGeom prst="rect">
             <a:avLst/>
           </a:prstGeom>
         </p:spPr>
       </p:pic>
+      <p:sp>
+        <p:nvSpPr>
+          <p:cNvPr id="20" name="bloque Desarrollo título"/>
+          <p:cNvSpPr txBox="1"/>
+          <p:nvPr/>
+        </p:nvSpPr>
+        <p:spPr>
+          <a:xfrm>
+            <a:off x="6355080" y="2029968"/>
+            <a:ext cx="2331720" cy="237744"/>
+          </a:xfrm>
+          <a:prstGeom prst="rect">
+            <a:avLst/>
+          </a:prstGeom>
+          <a:noFill/>
+          <a:ln/>
+        </p:spPr>
+        <p:txBody>
+          <a:bodyPr wrap="square" lIns="0" tIns="0" rIns="0" bIns="0" rtlCol="0" anchor="t"/>
+          <a:lstStyle/>
+          <a:p>
+            <a:pPr indent="0" marL="0">
+              <a:buNone/>
+            </a:pPr>
+            <a:r>
+              <a:rPr lang="en-US" sz="1200" b="1" dirty="0">
+                <a:solidFill>
+                  <a:srgbClr val="0F1C2C"/>
+                </a:solidFill>
+                <a:latin typeface="Montserrat" pitchFamily="34" charset="0"/>
+                <a:ea typeface="Montserrat" pitchFamily="34" charset="-122"/>
+                <a:cs typeface="Montserrat" pitchFamily="34" charset="-120"/>
+              </a:rPr>
+              <a:t>DESARROLLO</a:t>
+            </a:r>
+            <a:endParaRPr lang="en-US" sz="1200" dirty="0"/>
+          </a:p>
+        </p:txBody>
+      </p:sp>
+      <p:sp>
+        <p:nvSpPr>
+          <p:cNvPr id="21" name="bloque Desarrollo texto"/>
+          <p:cNvSpPr txBox="1"/>
+          <p:nvPr/>
+        </p:nvSpPr>
+        <p:spPr>
+          <a:xfrm>
+            <a:off x="6355080" y="2267712"/>
+            <a:ext cx="2331720" cy="676656"/>
+          </a:xfrm>
+          <a:prstGeom prst="rect">
+            <a:avLst/>
+          </a:prstGeom>
+          <a:noFill/>
+          <a:ln/>
+        </p:spPr>
+        <p:txBody>
+          <a:bodyPr wrap="square" lIns="0" tIns="0" rIns="0" bIns="0" rtlCol="0" anchor="t"/>
+          <a:lstStyle/>
+          <a:p>
+            <a:pPr indent="0" marL="0">
+              <a:buNone/>
+            </a:pPr>
+            <a:r>
+              <a:rPr lang="en-US" sz="1000" dirty="0">
+                <a:solidFill>
+                  <a:srgbClr val="5C5C5C"/>
+                </a:solidFill>
+                <a:latin typeface="Arial" pitchFamily="34" charset="0"/>
+                <a:ea typeface="Arial" pitchFamily="34" charset="-122"/>
+                <a:cs typeface="Arial" pitchFamily="34" charset="-120"/>
+              </a:rPr>
+              <a:t>Con el camión detenido, el operador reproduce en cabina los gestos que identifican los eventos: somnolencia, cabeceo y uso del teléfono.</a:t>
+            </a:r>
+            <a:endParaRPr lang="en-US" sz="1000" dirty="0"/>
+          </a:p>
+        </p:txBody>
+      </p:sp>
       <p:pic>
         <p:nvPicPr>
-          <p:cNvPr id="14" name="P5 camión B túnel frenado" descr="preencoded.png">    </p:cNvPr>
+          <p:cNvPr id="22" name="bloque Seguridad icono" descr="preencoded.png">    </p:cNvPr>
           <p:cNvPicPr>
             <a:picLocks noChangeAspect="1"/>
           </p:cNvPicPr>
@@ -10901,146 +11490,75 @@
         </p:blipFill>
         <p:spPr>
           <a:xfrm>
-            <a:off x="2359152" y="2750205"/>
-            <a:ext cx="2194560" cy="351750"/>
+            <a:off x="5852160" y="2980944"/>
+            <a:ext cx="347472" cy="347472"/>
           </a:xfrm>
           <a:prstGeom prst="rect">
             <a:avLst/>
           </a:prstGeom>
         </p:spPr>
       </p:pic>
-      <p:pic>
-        <p:nvPicPr>
-          <p:cNvPr id="15" name="P5 camión B" descr="preencoded.png">    </p:cNvPr>
-          <p:cNvPicPr>
-            <a:picLocks noChangeAspect="1"/>
-          </p:cNvPicPr>
-          <p:nvPr/>
-        </p:nvPicPr>
-        <p:blipFill>
-          <a:blip r:embed="rId6"/>
-          <a:stretch>
-            <a:fillRect/>
-          </a:stretch>
-        </p:blipFill>
-        <p:spPr>
-          <a:xfrm>
-            <a:off x="960120" y="2721574"/>
-            <a:ext cx="822960" cy="409011"/>
-          </a:xfrm>
-          <a:prstGeom prst="rect">
-            <a:avLst/>
-          </a:prstGeom>
-        </p:spPr>
-      </p:pic>
-      <p:sp>
-        <p:nvSpPr>
-          <p:cNvPr id="16" name="P5 camión B etiqueta"/>
-          <p:cNvSpPr txBox="1"/>
-          <p:nvPr/>
-        </p:nvSpPr>
-        <p:spPr>
-          <a:xfrm>
-            <a:off x="996696" y="2721574"/>
-            <a:ext cx="411480" cy="409011"/>
-          </a:xfrm>
-          <a:prstGeom prst="rect">
-            <a:avLst/>
-          </a:prstGeom>
-          <a:noFill/>
-          <a:ln/>
-        </p:spPr>
-        <p:txBody>
-          <a:bodyPr wrap="square" lIns="0" tIns="0" rIns="0" bIns="0" rtlCol="0" anchor="ctr"/>
-          <a:lstStyle/>
-          <a:p>
-            <a:pPr algn="ctr" indent="0" marL="0">
-              <a:buNone/>
-            </a:pPr>
-            <a:r>
-              <a:rPr lang="en-US" sz="1300" b="1" dirty="0">
-                <a:solidFill>
-                  <a:srgbClr val="8A8A8A"/>
+      <p:sp>
+        <p:nvSpPr>
+          <p:cNvPr id="23" name="bloque Seguridad título"/>
+          <p:cNvSpPr txBox="1"/>
+          <p:nvPr/>
+        </p:nvSpPr>
+        <p:spPr>
+          <a:xfrm>
+            <a:off x="6355080" y="2962656"/>
+            <a:ext cx="2331720" cy="237744"/>
+          </a:xfrm>
+          <a:prstGeom prst="rect">
+            <a:avLst/>
+          </a:prstGeom>
+          <a:noFill/>
+          <a:ln/>
+        </p:spPr>
+        <p:txBody>
+          <a:bodyPr wrap="square" lIns="0" tIns="0" rIns="0" bIns="0" rtlCol="0" anchor="t"/>
+          <a:lstStyle/>
+          <a:p>
+            <a:pPr indent="0" marL="0">
+              <a:buNone/>
+            </a:pPr>
+            <a:r>
+              <a:rPr lang="en-US" sz="1200" b="1" dirty="0">
+                <a:solidFill>
+                  <a:srgbClr val="0F1C2C"/>
                 </a:solidFill>
                 <a:latin typeface="Montserrat" pitchFamily="34" charset="0"/>
                 <a:ea typeface="Montserrat" pitchFamily="34" charset="-122"/>
                 <a:cs typeface="Montserrat" pitchFamily="34" charset="-120"/>
               </a:rPr>
-              <a:t>B</a:t>
-            </a:r>
-            <a:endParaRPr lang="en-US" sz="1300" dirty="0"/>
-          </a:p>
-        </p:txBody>
-      </p:sp>
-      <p:sp>
-        <p:nvSpPr>
-          <p:cNvPr id="17" name="meta"/>
-          <p:cNvSpPr/>
-          <p:nvPr/>
-        </p:nvSpPr>
-        <p:spPr>
-          <a:xfrm>
-            <a:off x="4983480" y="1783080"/>
-            <a:ext cx="0" cy="1554480"/>
-          </a:xfrm>
-          <a:prstGeom prst="line">
-            <a:avLst/>
-          </a:prstGeom>
-          <a:noFill/>
-          <a:ln w="25400">
-            <a:solidFill>
-              <a:srgbClr val="2E8B3A"/>
-            </a:solidFill>
-            <a:prstDash val="sysDash"/>
-          </a:ln>
-        </p:spPr>
-      </p:sp>
-      <p:pic>
-        <p:nvPicPr>
-          <p:cNvPr id="18" name="icono meta" descr="preencoded.png">    </p:cNvPr>
-          <p:cNvPicPr>
-            <a:picLocks noChangeAspect="1"/>
-          </p:cNvPicPr>
-          <p:nvPr/>
-        </p:nvPicPr>
-        <p:blipFill>
-          <a:blip r:embed="rId7"/>
-          <a:stretch>
-            <a:fillRect/>
-          </a:stretch>
-        </p:blipFill>
-        <p:spPr>
-          <a:xfrm>
-            <a:off x="4846320" y="3364992"/>
-            <a:ext cx="274320" cy="274320"/>
-          </a:xfrm>
-          <a:prstGeom prst="rect">
-            <a:avLst/>
-          </a:prstGeom>
-        </p:spPr>
-      </p:pic>
-      <p:sp>
-        <p:nvSpPr>
-          <p:cNvPr id="19" name="nota P5"/>
-          <p:cNvSpPr txBox="1"/>
-          <p:nvPr/>
-        </p:nvSpPr>
-        <p:spPr>
-          <a:xfrm>
-            <a:off x="731520" y="3401568"/>
-            <a:ext cx="3931920" cy="274320"/>
-          </a:xfrm>
-          <a:prstGeom prst="rect">
-            <a:avLst/>
-          </a:prstGeom>
-          <a:noFill/>
-          <a:ln/>
-        </p:spPr>
-        <p:txBody>
-          <a:bodyPr wrap="square" lIns="0" tIns="0" rIns="0" bIns="0" rtlCol="0" anchor="ctr"/>
-          <a:lstStyle/>
-          <a:p>
-            <a:pPr algn="ctr" indent="0" marL="0">
+              <a:t>SEGURIDAD</a:t>
+            </a:r>
+            <a:endParaRPr lang="en-US" sz="1200" dirty="0"/>
+          </a:p>
+        </p:txBody>
+      </p:sp>
+      <p:sp>
+        <p:nvSpPr>
+          <p:cNvPr id="24" name="bloque Seguridad texto"/>
+          <p:cNvSpPr txBox="1"/>
+          <p:nvPr/>
+        </p:nvSpPr>
+        <p:spPr>
+          <a:xfrm>
+            <a:off x="6355080" y="3200400"/>
+            <a:ext cx="2331720" cy="676656"/>
+          </a:xfrm>
+          <a:prstGeom prst="rect">
+            <a:avLst/>
+          </a:prstGeom>
+          <a:noFill/>
+          <a:ln/>
+        </p:spPr>
+        <p:txBody>
+          <a:bodyPr wrap="square" lIns="0" tIns="0" rIns="0" bIns="0" rtlCol="0" anchor="t"/>
+          <a:lstStyle/>
+          <a:p>
+            <a:pPr indent="0" marL="0">
               <a:buNone/>
             </a:pPr>
             <a:r>
@@ -11052,62 +11570,38 @@
                 <a:ea typeface="Arial" pitchFamily="34" charset="-122"/>
                 <a:cs typeface="Arial" pitchFamily="34" charset="-120"/>
               </a:rPr>
-              <a:t>Tramo recto a velocidad constante</a:t>
+              <a:t>Camión detenido, a 0 km/h, durante toda la prueba. En operación normal las alertas están definidas para la marcha.</a:t>
             </a:r>
             <a:endParaRPr lang="en-US" sz="1000" dirty="0"/>
           </a:p>
         </p:txBody>
       </p:sp>
-      <p:pic>
-        <p:nvPicPr>
-          <p:cNvPr id="20" name="leyenda seguridad" descr="preencoded.png">    </p:cNvPr>
-          <p:cNvPicPr>
-            <a:picLocks noChangeAspect="1"/>
-          </p:cNvPicPr>
-          <p:nvPr/>
-        </p:nvPicPr>
-        <p:blipFill>
-          <a:blip r:embed="rId8"/>
-          <a:stretch>
-            <a:fillRect/>
-          </a:stretch>
-        </p:blipFill>
-        <p:spPr>
-          <a:xfrm>
-            <a:off x="731520" y="4206240"/>
-            <a:ext cx="274320" cy="128016"/>
-          </a:xfrm>
-          <a:prstGeom prst="rect">
-            <a:avLst/>
-          </a:prstGeom>
-        </p:spPr>
-      </p:pic>
-      <p:sp>
-        <p:nvSpPr>
-          <p:cNvPr id="21" name="leyenda seguridad texto"/>
-          <p:cNvSpPr txBox="1"/>
-          <p:nvPr/>
-        </p:nvSpPr>
-        <p:spPr>
-          <a:xfrm>
-            <a:off x="1078992" y="4160520"/>
-            <a:ext cx="1463040" cy="219456"/>
-          </a:xfrm>
-          <a:prstGeom prst="rect">
-            <a:avLst/>
-          </a:prstGeom>
-          <a:noFill/>
-          <a:ln/>
-        </p:spPr>
-        <p:txBody>
-          <a:bodyPr wrap="square" lIns="0" tIns="0" rIns="0" bIns="0" rtlCol="0" anchor="ctr"/>
+      <p:sp>
+        <p:nvSpPr>
+          <p:cNvPr id="25" name="etiqueta productos fila"/>
+          <p:cNvSpPr txBox="1"/>
+          <p:nvPr/>
+        </p:nvSpPr>
+        <p:spPr>
+          <a:xfrm>
+            <a:off x="6355080" y="3931920"/>
+            <a:ext cx="1371600" cy="201168"/>
+          </a:xfrm>
+          <a:prstGeom prst="rect">
+            <a:avLst/>
+          </a:prstGeom>
+          <a:noFill/>
+          <a:ln/>
+        </p:spPr>
+        <p:txBody>
+          <a:bodyPr wrap="square" lIns="0" tIns="0" rIns="0" bIns="0" rtlCol="0" anchor="t"/>
           <a:lstStyle/>
           <a:p>
             <a:pPr indent="0" marL="0">
               <a:buNone/>
             </a:pPr>
             <a:r>
-              <a:rPr lang="en-US" sz="900" dirty="0">
+              <a:rPr lang="en-US" sz="800" spc="250" kern="0" dirty="0">
                 <a:solidFill>
                   <a:srgbClr val="8C8C8C"/>
                 </a:solidFill>
@@ -11115,453 +11609,6 @@
                 <a:ea typeface="Arial" pitchFamily="34" charset="-122"/>
                 <a:cs typeface="Arial" pitchFamily="34" charset="-120"/>
               </a:rPr>
-              <a:t>Distancia de seguridad</a:t>
-            </a:r>
-            <a:endParaRPr lang="en-US" sz="900" dirty="0"/>
-          </a:p>
-        </p:txBody>
-      </p:sp>
-      <p:pic>
-        <p:nvPicPr>
-          <p:cNvPr id="22" name="leyenda frenado" descr="preencoded.png">    </p:cNvPr>
-          <p:cNvPicPr>
-            <a:picLocks noChangeAspect="1"/>
-          </p:cNvPicPr>
-          <p:nvPr/>
-        </p:nvPicPr>
-        <p:blipFill>
-          <a:blip r:embed="rId9"/>
-          <a:stretch>
-            <a:fillRect/>
-          </a:stretch>
-        </p:blipFill>
-        <p:spPr>
-          <a:xfrm>
-            <a:off x="2560320" y="4206240"/>
-            <a:ext cx="274320" cy="128016"/>
-          </a:xfrm>
-          <a:prstGeom prst="rect">
-            <a:avLst/>
-          </a:prstGeom>
-        </p:spPr>
-      </p:pic>
-      <p:sp>
-        <p:nvSpPr>
-          <p:cNvPr id="23" name="leyenda frenado texto"/>
-          <p:cNvSpPr txBox="1"/>
-          <p:nvPr/>
-        </p:nvSpPr>
-        <p:spPr>
-          <a:xfrm>
-            <a:off x="2907792" y="4160520"/>
-            <a:ext cx="1463040" cy="219456"/>
-          </a:xfrm>
-          <a:prstGeom prst="rect">
-            <a:avLst/>
-          </a:prstGeom>
-          <a:noFill/>
-          <a:ln/>
-        </p:spPr>
-        <p:txBody>
-          <a:bodyPr wrap="square" lIns="0" tIns="0" rIns="0" bIns="0" rtlCol="0" anchor="ctr"/>
-          <a:lstStyle/>
-          <a:p>
-            <a:pPr indent="0" marL="0">
-              <a:buNone/>
-            </a:pPr>
-            <a:r>
-              <a:rPr lang="en-US" sz="900" dirty="0">
-                <a:solidFill>
-                  <a:srgbClr val="8C8C8C"/>
-                </a:solidFill>
-                <a:latin typeface="Arial" pitchFamily="34" charset="0"/>
-                <a:ea typeface="Arial" pitchFamily="34" charset="-122"/>
-                <a:cs typeface="Arial" pitchFamily="34" charset="-120"/>
-              </a:rPr>
-              <a:t>Distancia de frenado</a:t>
-            </a:r>
-            <a:endParaRPr lang="en-US" sz="900" dirty="0"/>
-          </a:p>
-        </p:txBody>
-      </p:sp>
-      <p:sp>
-        <p:nvSpPr>
-          <p:cNvPr id="24" name="leyenda túnel"/>
-          <p:cNvSpPr txBox="1"/>
-          <p:nvPr/>
-        </p:nvSpPr>
-        <p:spPr>
-          <a:xfrm>
-            <a:off x="4343400" y="4160520"/>
-            <a:ext cx="1188720" cy="219456"/>
-          </a:xfrm>
-          <a:prstGeom prst="rect">
-            <a:avLst/>
-          </a:prstGeom>
-          <a:noFill/>
-          <a:ln/>
-        </p:spPr>
-        <p:txBody>
-          <a:bodyPr wrap="square" lIns="0" tIns="0" rIns="0" bIns="0" rtlCol="0" anchor="ctr"/>
-          <a:lstStyle/>
-          <a:p>
-            <a:pPr indent="0" marL="0">
-              <a:buNone/>
-            </a:pPr>
-            <a:r>
-              <a:rPr lang="en-US" sz="900" dirty="0">
-                <a:solidFill>
-                  <a:srgbClr val="B5B5B5"/>
-                </a:solidFill>
-                <a:latin typeface="Arial" pitchFamily="34" charset="0"/>
-                <a:ea typeface="Arial" pitchFamily="34" charset="-122"/>
-                <a:cs typeface="Arial" pitchFamily="34" charset="-120"/>
-              </a:rPr>
-              <a:t>Túnel virtual</a:t>
-            </a:r>
-            <a:endParaRPr lang="en-US" sz="900" dirty="0"/>
-          </a:p>
-        </p:txBody>
-      </p:sp>
-      <p:pic>
-        <p:nvPicPr>
-          <p:cNvPr id="25" name="bloque Objetivo icono" descr="preencoded.png">    </p:cNvPr>
-          <p:cNvPicPr>
-            <a:picLocks noChangeAspect="1"/>
-          </p:cNvPicPr>
-          <p:nvPr/>
-        </p:nvPicPr>
-        <p:blipFill>
-          <a:blip r:embed="rId10"/>
-          <a:stretch>
-            <a:fillRect/>
-          </a:stretch>
-        </p:blipFill>
-        <p:spPr>
-          <a:xfrm>
-            <a:off x="5852160" y="1115568"/>
-            <a:ext cx="347472" cy="347472"/>
-          </a:xfrm>
-          <a:prstGeom prst="rect">
-            <a:avLst/>
-          </a:prstGeom>
-        </p:spPr>
-      </p:pic>
-      <p:sp>
-        <p:nvSpPr>
-          <p:cNvPr id="26" name="bloque Objetivo título"/>
-          <p:cNvSpPr txBox="1"/>
-          <p:nvPr/>
-        </p:nvSpPr>
-        <p:spPr>
-          <a:xfrm>
-            <a:off x="6355080" y="1097280"/>
-            <a:ext cx="2331720" cy="237744"/>
-          </a:xfrm>
-          <a:prstGeom prst="rect">
-            <a:avLst/>
-          </a:prstGeom>
-          <a:noFill/>
-          <a:ln/>
-        </p:spPr>
-        <p:txBody>
-          <a:bodyPr wrap="square" lIns="0" tIns="0" rIns="0" bIns="0" rtlCol="0" anchor="t"/>
-          <a:lstStyle/>
-          <a:p>
-            <a:pPr indent="0" marL="0">
-              <a:buNone/>
-            </a:pPr>
-            <a:r>
-              <a:rPr lang="en-US" sz="1200" b="1" dirty="0">
-                <a:solidFill>
-                  <a:srgbClr val="0F1C2C"/>
-                </a:solidFill>
-                <a:latin typeface="Montserrat" pitchFamily="34" charset="0"/>
-                <a:ea typeface="Montserrat" pitchFamily="34" charset="-122"/>
-                <a:cs typeface="Montserrat" pitchFamily="34" charset="-120"/>
-              </a:rPr>
-              <a:t>OBJETIVO</a:t>
-            </a:r>
-            <a:endParaRPr lang="en-US" sz="1200" dirty="0"/>
-          </a:p>
-        </p:txBody>
-      </p:sp>
-      <p:sp>
-        <p:nvSpPr>
-          <p:cNvPr id="27" name="bloque Objetivo texto"/>
-          <p:cNvSpPr txBox="1"/>
-          <p:nvPr/>
-        </p:nvSpPr>
-        <p:spPr>
-          <a:xfrm>
-            <a:off x="6355080" y="1335024"/>
-            <a:ext cx="2331720" cy="694944"/>
-          </a:xfrm>
-          <a:prstGeom prst="rect">
-            <a:avLst/>
-          </a:prstGeom>
-          <a:noFill/>
-          <a:ln/>
-        </p:spPr>
-        <p:txBody>
-          <a:bodyPr wrap="square" lIns="0" tIns="0" rIns="0" bIns="0" rtlCol="0" anchor="t"/>
-          <a:lstStyle/>
-          <a:p>
-            <a:pPr indent="0" marL="0">
-              <a:buNone/>
-            </a:pPr>
-            <a:r>
-              <a:rPr lang="en-US" sz="1100" dirty="0">
-                <a:solidFill>
-                  <a:srgbClr val="5C5C5C"/>
-                </a:solidFill>
-                <a:latin typeface="Arial" pitchFamily="34" charset="0"/>
-                <a:ea typeface="Arial" pitchFamily="34" charset="-122"/>
-                <a:cs typeface="Arial" pitchFamily="34" charset="-120"/>
-              </a:rPr>
-              <a:t>Validar el funcionamiento completo del sistema en un recorrido recto, sin interacción entre camiones.</a:t>
-            </a:r>
-            <a:endParaRPr lang="en-US" sz="1100" dirty="0"/>
-          </a:p>
-        </p:txBody>
-      </p:sp>
-      <p:pic>
-        <p:nvPicPr>
-          <p:cNvPr id="28" name="bloque Desarrollo icono" descr="preencoded.png">    </p:cNvPr>
-          <p:cNvPicPr>
-            <a:picLocks noChangeAspect="1"/>
-          </p:cNvPicPr>
-          <p:nvPr/>
-        </p:nvPicPr>
-        <p:blipFill>
-          <a:blip r:embed="rId11"/>
-          <a:stretch>
-            <a:fillRect/>
-          </a:stretch>
-        </p:blipFill>
-        <p:spPr>
-          <a:xfrm>
-            <a:off x="5852160" y="2103120"/>
-            <a:ext cx="347472" cy="347472"/>
-          </a:xfrm>
-          <a:prstGeom prst="rect">
-            <a:avLst/>
-          </a:prstGeom>
-        </p:spPr>
-      </p:pic>
-      <p:sp>
-        <p:nvSpPr>
-          <p:cNvPr id="29" name="bloque Desarrollo título"/>
-          <p:cNvSpPr txBox="1"/>
-          <p:nvPr/>
-        </p:nvSpPr>
-        <p:spPr>
-          <a:xfrm>
-            <a:off x="6355080" y="2084832"/>
-            <a:ext cx="2331720" cy="237744"/>
-          </a:xfrm>
-          <a:prstGeom prst="rect">
-            <a:avLst/>
-          </a:prstGeom>
-          <a:noFill/>
-          <a:ln/>
-        </p:spPr>
-        <p:txBody>
-          <a:bodyPr wrap="square" lIns="0" tIns="0" rIns="0" bIns="0" rtlCol="0" anchor="t"/>
-          <a:lstStyle/>
-          <a:p>
-            <a:pPr indent="0" marL="0">
-              <a:buNone/>
-            </a:pPr>
-            <a:r>
-              <a:rPr lang="en-US" sz="1200" b="1" dirty="0">
-                <a:solidFill>
-                  <a:srgbClr val="0F1C2C"/>
-                </a:solidFill>
-                <a:latin typeface="Montserrat" pitchFamily="34" charset="0"/>
-                <a:ea typeface="Montserrat" pitchFamily="34" charset="-122"/>
-                <a:cs typeface="Montserrat" pitchFamily="34" charset="-120"/>
-              </a:rPr>
-              <a:t>DESARROLLO</a:t>
-            </a:r>
-            <a:endParaRPr lang="en-US" sz="1200" dirty="0"/>
-          </a:p>
-        </p:txBody>
-      </p:sp>
-      <p:sp>
-        <p:nvSpPr>
-          <p:cNvPr id="30" name="bloque Desarrollo texto"/>
-          <p:cNvSpPr txBox="1"/>
-          <p:nvPr/>
-        </p:nvSpPr>
-        <p:spPr>
-          <a:xfrm>
-            <a:off x="6355080" y="2322576"/>
-            <a:ext cx="2331720" cy="694944"/>
-          </a:xfrm>
-          <a:prstGeom prst="rect">
-            <a:avLst/>
-          </a:prstGeom>
-          <a:noFill/>
-          <a:ln/>
-        </p:spPr>
-        <p:txBody>
-          <a:bodyPr wrap="square" lIns="0" tIns="0" rIns="0" bIns="0" rtlCol="0" anchor="t"/>
-          <a:lstStyle/>
-          <a:p>
-            <a:pPr indent="0" marL="0">
-              <a:buNone/>
-            </a:pPr>
-            <a:r>
-              <a:rPr lang="en-US" sz="1100" dirty="0">
-                <a:solidFill>
-                  <a:srgbClr val="5C5C5C"/>
-                </a:solidFill>
-                <a:latin typeface="Arial" pitchFamily="34" charset="0"/>
-                <a:ea typeface="Arial" pitchFamily="34" charset="-122"/>
-                <a:cs typeface="Arial" pitchFamily="34" charset="-120"/>
-              </a:rPr>
-              <a:t>Cada camión realiza un tramo recto a velocidad constante. Se comprueba que el sistema responde como en las pruebas anteriores.</a:t>
-            </a:r>
-            <a:endParaRPr lang="en-US" sz="1100" dirty="0"/>
-          </a:p>
-        </p:txBody>
-      </p:sp>
-      <p:pic>
-        <p:nvPicPr>
-          <p:cNvPr id="31" name="bloque Seguridad icono" descr="preencoded.png">    </p:cNvPr>
-          <p:cNvPicPr>
-            <a:picLocks noChangeAspect="1"/>
-          </p:cNvPicPr>
-          <p:nvPr/>
-        </p:nvPicPr>
-        <p:blipFill>
-          <a:blip r:embed="rId12"/>
-          <a:stretch>
-            <a:fillRect/>
-          </a:stretch>
-        </p:blipFill>
-        <p:spPr>
-          <a:xfrm>
-            <a:off x="5852160" y="3090672"/>
-            <a:ext cx="347472" cy="347472"/>
-          </a:xfrm>
-          <a:prstGeom prst="rect">
-            <a:avLst/>
-          </a:prstGeom>
-        </p:spPr>
-      </p:pic>
-      <p:sp>
-        <p:nvSpPr>
-          <p:cNvPr id="32" name="bloque Seguridad título"/>
-          <p:cNvSpPr txBox="1"/>
-          <p:nvPr/>
-        </p:nvSpPr>
-        <p:spPr>
-          <a:xfrm>
-            <a:off x="6355080" y="3072384"/>
-            <a:ext cx="2331720" cy="237744"/>
-          </a:xfrm>
-          <a:prstGeom prst="rect">
-            <a:avLst/>
-          </a:prstGeom>
-          <a:noFill/>
-          <a:ln/>
-        </p:spPr>
-        <p:txBody>
-          <a:bodyPr wrap="square" lIns="0" tIns="0" rIns="0" bIns="0" rtlCol="0" anchor="t"/>
-          <a:lstStyle/>
-          <a:p>
-            <a:pPr indent="0" marL="0">
-              <a:buNone/>
-            </a:pPr>
-            <a:r>
-              <a:rPr lang="en-US" sz="1200" b="1" dirty="0">
-                <a:solidFill>
-                  <a:srgbClr val="0F1C2C"/>
-                </a:solidFill>
-                <a:latin typeface="Montserrat" pitchFamily="34" charset="0"/>
-                <a:ea typeface="Montserrat" pitchFamily="34" charset="-122"/>
-                <a:cs typeface="Montserrat" pitchFamily="34" charset="-120"/>
-              </a:rPr>
-              <a:t>SEGURIDAD</a:t>
-            </a:r>
-            <a:endParaRPr lang="en-US" sz="1200" dirty="0"/>
-          </a:p>
-        </p:txBody>
-      </p:sp>
-      <p:sp>
-        <p:nvSpPr>
-          <p:cNvPr id="33" name="bloque Seguridad texto"/>
-          <p:cNvSpPr txBox="1"/>
-          <p:nvPr/>
-        </p:nvSpPr>
-        <p:spPr>
-          <a:xfrm>
-            <a:off x="6355080" y="3310128"/>
-            <a:ext cx="2331720" cy="694944"/>
-          </a:xfrm>
-          <a:prstGeom prst="rect">
-            <a:avLst/>
-          </a:prstGeom>
-          <a:noFill/>
-          <a:ln/>
-        </p:spPr>
-        <p:txBody>
-          <a:bodyPr wrap="square" lIns="0" tIns="0" rIns="0" bIns="0" rtlCol="0" anchor="t"/>
-          <a:lstStyle/>
-          <a:p>
-            <a:pPr indent="0" marL="0">
-              <a:buNone/>
-            </a:pPr>
-            <a:r>
-              <a:rPr lang="en-US" sz="1100" dirty="0">
-                <a:solidFill>
-                  <a:srgbClr val="5C5C5C"/>
-                </a:solidFill>
-                <a:latin typeface="Arial" pitchFamily="34" charset="0"/>
-                <a:ea typeface="Arial" pitchFamily="34" charset="-122"/>
-                <a:cs typeface="Arial" pitchFamily="34" charset="-120"/>
-              </a:rPr>
-              <a:t>Un camión en pista cada vez. Se da por terminada la sesión cuando los dos han completado la recta.</a:t>
-            </a:r>
-            <a:endParaRPr lang="en-US" sz="1100" dirty="0"/>
-          </a:p>
-        </p:txBody>
-      </p:sp>
-      <p:sp>
-        <p:nvSpPr>
-          <p:cNvPr id="34" name="etiqueta productos prueba"/>
-          <p:cNvSpPr txBox="1"/>
-          <p:nvPr/>
-        </p:nvSpPr>
-        <p:spPr>
-          <a:xfrm>
-            <a:off x="6355080" y="4041648"/>
-            <a:ext cx="1097280" cy="201168"/>
-          </a:xfrm>
-          <a:prstGeom prst="rect">
-            <a:avLst/>
-          </a:prstGeom>
-          <a:noFill/>
-          <a:ln/>
-        </p:spPr>
-        <p:txBody>
-          <a:bodyPr wrap="square" lIns="0" tIns="0" rIns="0" bIns="0" rtlCol="0" anchor="t"/>
-          <a:lstStyle/>
-          <a:p>
-            <a:pPr indent="0" marL="0">
-              <a:buNone/>
-            </a:pPr>
-            <a:r>
-              <a:rPr lang="en-US" sz="800" spc="250" kern="0" dirty="0">
-                <a:solidFill>
-                  <a:srgbClr val="8C8C8C"/>
-                </a:solidFill>
-                <a:latin typeface="Arial" pitchFamily="34" charset="0"/>
-                <a:ea typeface="Arial" pitchFamily="34" charset="-122"/>
-                <a:cs typeface="Arial" pitchFamily="34" charset="-120"/>
-              </a:rPr>
               <a:t>PRODUCTOS</a:t>
             </a:r>
             <a:endParaRPr lang="en-US" sz="800" dirty="0"/>
@@ -11570,13 +11617,13 @@
       </p:sp>
       <p:sp>
         <p:nvSpPr>
-          <p:cNvPr id="35" name="producto prueba WBV fondo"/>
+          <p:cNvPr id="26" name="producto fila FAS fondo"/>
           <p:cNvSpPr/>
           <p:nvPr/>
         </p:nvSpPr>
         <p:spPr>
           <a:xfrm>
-            <a:off x="6355080" y="4242816"/>
+            <a:off x="6355080" y="4133088"/>
             <a:ext cx="548640" cy="237744"/>
           </a:xfrm>
           <a:prstGeom prst="rect">
@@ -11585,7 +11632,7 @@
           <a:solidFill>
             <a:srgbClr val="D40319"/>
           </a:solidFill>
-          <a:ln w="12700">
+          <a:ln w="9525">
             <a:solidFill>
               <a:srgbClr val="D40319"/>
             </a:solidFill>
@@ -11595,13 +11642,13 @@
       </p:sp>
       <p:sp>
         <p:nvSpPr>
-          <p:cNvPr id="36" name="producto prueba WBV"/>
-          <p:cNvSpPr txBox="1"/>
-          <p:nvPr/>
-        </p:nvSpPr>
-        <p:spPr>
-          <a:xfrm>
-            <a:off x="6355080" y="4242816"/>
+          <p:cNvPr id="27" name="producto fila FAS"/>
+          <p:cNvSpPr txBox="1"/>
+          <p:nvPr/>
+        </p:nvSpPr>
+        <p:spPr>
+          <a:xfrm>
+            <a:off x="6355080" y="4133088"/>
             <a:ext cx="548640" cy="237744"/>
           </a:xfrm>
           <a:prstGeom prst="rect">
@@ -11626,7 +11673,7 @@
                 <a:ea typeface="Montserrat" pitchFamily="34" charset="-122"/>
                 <a:cs typeface="Montserrat" pitchFamily="34" charset="-120"/>
               </a:rPr>
-              <a:t>WBV</a:t>
+              <a:t>FAS</a:t>
             </a:r>
             <a:endParaRPr lang="en-US" sz="850" dirty="0"/>
           </a:p>
@@ -11634,24 +11681,24 @@
       </p:sp>
       <p:sp>
         <p:nvSpPr>
-          <p:cNvPr id="37" name="producto prueba FAS fondo"/>
+          <p:cNvPr id="28" name="producto fila WBV fondo"/>
           <p:cNvSpPr/>
           <p:nvPr/>
         </p:nvSpPr>
         <p:spPr>
           <a:xfrm>
-            <a:off x="6976872" y="4242816"/>
-            <a:ext cx="548640" cy="237744"/>
+            <a:off x="6976872" y="4133088"/>
+            <a:ext cx="960120" cy="237744"/>
           </a:xfrm>
           <a:prstGeom prst="rect">
             <a:avLst/>
           </a:prstGeom>
           <a:solidFill>
-            <a:srgbClr val="D40319"/>
+            <a:srgbClr val="FFFFFF"/>
           </a:solidFill>
           <a:ln w="12700">
             <a:solidFill>
-              <a:srgbClr val="D40319"/>
+              <a:srgbClr val="0F1C2C"/>
             </a:solidFill>
             <a:prstDash val="solid"/>
           </a:ln>
@@ -11659,14 +11706,14 @@
       </p:sp>
       <p:sp>
         <p:nvSpPr>
-          <p:cNvPr id="38" name="producto prueba FAS"/>
-          <p:cNvSpPr txBox="1"/>
-          <p:nvPr/>
-        </p:nvSpPr>
-        <p:spPr>
-          <a:xfrm>
-            <a:off x="6976872" y="4242816"/>
-            <a:ext cx="548640" cy="237744"/>
+          <p:cNvPr id="29" name="producto fila WBV"/>
+          <p:cNvSpPr txBox="1"/>
+          <p:nvPr/>
+        </p:nvSpPr>
+        <p:spPr>
+          <a:xfrm>
+            <a:off x="6976872" y="4133088"/>
+            <a:ext cx="960120" cy="237744"/>
           </a:xfrm>
           <a:prstGeom prst="rect">
             <a:avLst/>
@@ -11684,15 +11731,54 @@
             <a:r>
               <a:rPr lang="en-US" sz="850" b="1" spc="100" kern="0" dirty="0">
                 <a:solidFill>
-                  <a:srgbClr val="FFFFFF"/>
+                  <a:srgbClr val="0F1C2C"/>
                 </a:solidFill>
                 <a:latin typeface="Montserrat" pitchFamily="34" charset="0"/>
                 <a:ea typeface="Montserrat" pitchFamily="34" charset="-122"/>
                 <a:cs typeface="Montserrat" pitchFamily="34" charset="-120"/>
               </a:rPr>
-              <a:t>FAS</a:t>
+              <a:t>WBV · PASIVO</a:t>
             </a:r>
             <a:endParaRPr lang="en-US" sz="850" dirty="0"/>
+          </a:p>
+        </p:txBody>
+      </p:sp>
+      <p:sp>
+        <p:nvSpPr>
+          <p:cNvPr id="30" name="nota WBV pasivo"/>
+          <p:cNvSpPr txBox="1"/>
+          <p:nvPr/>
+        </p:nvSpPr>
+        <p:spPr>
+          <a:xfrm>
+            <a:off x="6355080" y="4407408"/>
+            <a:ext cx="2514600" cy="182880"/>
+          </a:xfrm>
+          <a:prstGeom prst="rect">
+            <a:avLst/>
+          </a:prstGeom>
+          <a:noFill/>
+          <a:ln/>
+        </p:spPr>
+        <p:txBody>
+          <a:bodyPr wrap="square" lIns="0" tIns="0" rIns="0" bIns="0" rtlCol="0" anchor="t"/>
+          <a:lstStyle/>
+          <a:p>
+            <a:pPr indent="0" marL="0">
+              <a:buNone/>
+            </a:pPr>
+            <a:r>
+              <a:rPr lang="en-US" sz="750" dirty="0">
+                <a:solidFill>
+                  <a:srgbClr val="8C8C8C"/>
+                </a:solidFill>
+                <a:latin typeface="Arial" pitchFamily="34" charset="0"/>
+                <a:ea typeface="Arial" pitchFamily="34" charset="-122"/>
+                <a:cs typeface="Arial" pitchFamily="34" charset="-120"/>
+              </a:rPr>
+              <a:t>WBV registra datos en segundo plano durante toda la sesión</a:t>
+            </a:r>
+            <a:endParaRPr lang="en-US" sz="750" dirty="0"/>
           </a:p>
         </p:txBody>
       </p:sp>
@@ -11775,7 +11861,7 @@
         <p:spPr>
           <a:xfrm>
             <a:off x="1920240" y="274320"/>
-            <a:ext cx="5760720" cy="502920"/>
+            <a:ext cx="5394960" cy="502920"/>
           </a:xfrm>
           <a:prstGeom prst="rect">
             <a:avLst/>
@@ -12412,7 +12498,7 @@
                 <a:ea typeface="Arial" pitchFamily="34" charset="-122"/>
                 <a:cs typeface="Arial" pitchFamily="34" charset="-120"/>
               </a:rPr>
-              <a:t>Enfrentamiento</a:t>
+              <a:t>Cruce en carriles distintos</a:t>
             </a:r>
             <a:endParaRPr lang="en-US" sz="1150" dirty="0"/>
           </a:p>
@@ -12490,7 +12576,7 @@
                 <a:ea typeface="Arial" pitchFamily="34" charset="-122"/>
                 <a:cs typeface="Arial" pitchFamily="34" charset="-120"/>
               </a:rPr>
-              <a:t>Cruce en carriles distintos</a:t>
+              <a:t>Enfrentamiento</a:t>
             </a:r>
             <a:endParaRPr lang="en-US" sz="1150" dirty="0"/>
           </a:p>
@@ -12724,7 +12810,7 @@
                 <a:ea typeface="Arial" pitchFamily="34" charset="-122"/>
                 <a:cs typeface="Arial" pitchFamily="34" charset="-120"/>
               </a:rPr>
-              <a:t>Recta: validación final</a:t>
+              <a:t>Detección de fatiga y móvil</a:t>
             </a:r>
             <a:endParaRPr lang="en-US" sz="1150" dirty="0"/>
           </a:p>
@@ -12732,14 +12818,14 @@
       </p:sp>
       <p:sp>
         <p:nvSpPr>
-          <p:cNvPr id="29" name="etiqueta productos cierre"/>
-          <p:cNvSpPr txBox="1"/>
-          <p:nvPr/>
-        </p:nvSpPr>
-        <p:spPr>
-          <a:xfrm>
-            <a:off x="4937760" y="3977640"/>
-            <a:ext cx="1828800" cy="201168"/>
+          <p:cNvPr id="29" name="etiqueta productos fila"/>
+          <p:cNvSpPr txBox="1"/>
+          <p:nvPr/>
+        </p:nvSpPr>
+        <p:spPr>
+          <a:xfrm>
+            <a:off x="4937760" y="3931920"/>
+            <a:ext cx="1371600" cy="201168"/>
           </a:xfrm>
           <a:prstGeom prst="rect">
             <a:avLst/>
@@ -12771,13 +12857,13 @@
       </p:sp>
       <p:sp>
         <p:nvSpPr>
-          <p:cNvPr id="30" name="producto cierre CMS fondo"/>
+          <p:cNvPr id="30" name="producto fila CMS fondo"/>
           <p:cNvSpPr/>
           <p:nvPr/>
         </p:nvSpPr>
         <p:spPr>
           <a:xfrm>
-            <a:off x="4937760" y="4187952"/>
+            <a:off x="4937760" y="4133088"/>
             <a:ext cx="548640" cy="237744"/>
           </a:xfrm>
           <a:prstGeom prst="rect">
@@ -12786,7 +12872,7 @@
           <a:solidFill>
             <a:srgbClr val="D40319"/>
           </a:solidFill>
-          <a:ln w="12700">
+          <a:ln w="9525">
             <a:solidFill>
               <a:srgbClr val="D40319"/>
             </a:solidFill>
@@ -12796,13 +12882,13 @@
       </p:sp>
       <p:sp>
         <p:nvSpPr>
-          <p:cNvPr id="31" name="producto cierre CMS"/>
-          <p:cNvSpPr txBox="1"/>
-          <p:nvPr/>
-        </p:nvSpPr>
-        <p:spPr>
-          <a:xfrm>
-            <a:off x="4937760" y="4187952"/>
+          <p:cNvPr id="31" name="producto fila CMS"/>
+          <p:cNvSpPr txBox="1"/>
+          <p:nvPr/>
+        </p:nvSpPr>
+        <p:spPr>
+          <a:xfrm>
+            <a:off x="4937760" y="4133088"/>
             <a:ext cx="548640" cy="237744"/>
           </a:xfrm>
           <a:prstGeom prst="rect">
@@ -12835,13 +12921,13 @@
       </p:sp>
       <p:sp>
         <p:nvSpPr>
-          <p:cNvPr id="32" name="producto cierre ISA fondo"/>
+          <p:cNvPr id="32" name="producto fila ISA fondo"/>
           <p:cNvSpPr/>
           <p:nvPr/>
         </p:nvSpPr>
         <p:spPr>
           <a:xfrm>
-            <a:off x="5559552" y="4187952"/>
+            <a:off x="5559552" y="4133088"/>
             <a:ext cx="548640" cy="237744"/>
           </a:xfrm>
           <a:prstGeom prst="rect">
@@ -12850,7 +12936,7 @@
           <a:solidFill>
             <a:srgbClr val="D40319"/>
           </a:solidFill>
-          <a:ln w="12700">
+          <a:ln w="9525">
             <a:solidFill>
               <a:srgbClr val="D40319"/>
             </a:solidFill>
@@ -12860,13 +12946,13 @@
       </p:sp>
       <p:sp>
         <p:nvSpPr>
-          <p:cNvPr id="33" name="producto cierre ISA"/>
-          <p:cNvSpPr txBox="1"/>
-          <p:nvPr/>
-        </p:nvSpPr>
-        <p:spPr>
-          <a:xfrm>
-            <a:off x="5559552" y="4187952"/>
+          <p:cNvPr id="33" name="producto fila ISA"/>
+          <p:cNvSpPr txBox="1"/>
+          <p:nvPr/>
+        </p:nvSpPr>
+        <p:spPr>
+          <a:xfrm>
+            <a:off x="5559552" y="4133088"/>
             <a:ext cx="548640" cy="237744"/>
           </a:xfrm>
           <a:prstGeom prst="rect">
@@ -12899,13 +12985,13 @@
       </p:sp>
       <p:sp>
         <p:nvSpPr>
-          <p:cNvPr id="34" name="producto cierre WBV fondo"/>
+          <p:cNvPr id="34" name="producto fila FAS fondo"/>
           <p:cNvSpPr/>
           <p:nvPr/>
         </p:nvSpPr>
         <p:spPr>
           <a:xfrm>
-            <a:off x="6181344" y="4187952"/>
+            <a:off x="6181344" y="4133088"/>
             <a:ext cx="548640" cy="237744"/>
           </a:xfrm>
           <a:prstGeom prst="rect">
@@ -12914,7 +13000,7 @@
           <a:solidFill>
             <a:srgbClr val="D40319"/>
           </a:solidFill>
-          <a:ln w="12700">
+          <a:ln w="9525">
             <a:solidFill>
               <a:srgbClr val="D40319"/>
             </a:solidFill>
@@ -12924,13 +13010,13 @@
       </p:sp>
       <p:sp>
         <p:nvSpPr>
-          <p:cNvPr id="35" name="producto cierre WBV"/>
-          <p:cNvSpPr txBox="1"/>
-          <p:nvPr/>
-        </p:nvSpPr>
-        <p:spPr>
-          <a:xfrm>
-            <a:off x="6181344" y="4187952"/>
+          <p:cNvPr id="35" name="producto fila FAS"/>
+          <p:cNvSpPr txBox="1"/>
+          <p:nvPr/>
+        </p:nvSpPr>
+        <p:spPr>
+          <a:xfrm>
+            <a:off x="6181344" y="4133088"/>
             <a:ext cx="548640" cy="237744"/>
           </a:xfrm>
           <a:prstGeom prst="rect">
@@ -12955,7 +13041,7 @@
                 <a:ea typeface="Montserrat" pitchFamily="34" charset="-122"/>
                 <a:cs typeface="Montserrat" pitchFamily="34" charset="-120"/>
               </a:rPr>
-              <a:t>WBV</a:t>
+              <a:t>FAS</a:t>
             </a:r>
             <a:endParaRPr lang="en-US" sz="850" dirty="0"/>
           </a:p>
@@ -12963,24 +13049,24 @@
       </p:sp>
       <p:sp>
         <p:nvSpPr>
-          <p:cNvPr id="36" name="producto cierre FAS fondo"/>
+          <p:cNvPr id="36" name="producto fila WBV fondo"/>
           <p:cNvSpPr/>
           <p:nvPr/>
         </p:nvSpPr>
         <p:spPr>
           <a:xfrm>
-            <a:off x="6803136" y="4187952"/>
-            <a:ext cx="548640" cy="237744"/>
+            <a:off x="6803136" y="4133088"/>
+            <a:ext cx="960120" cy="237744"/>
           </a:xfrm>
           <a:prstGeom prst="rect">
             <a:avLst/>
           </a:prstGeom>
           <a:solidFill>
-            <a:srgbClr val="D40319"/>
+            <a:srgbClr val="FFFFFF"/>
           </a:solidFill>
           <a:ln w="12700">
             <a:solidFill>
-              <a:srgbClr val="D40319"/>
+              <a:srgbClr val="0F1C2C"/>
             </a:solidFill>
             <a:prstDash val="solid"/>
           </a:ln>
@@ -12988,14 +13074,14 @@
       </p:sp>
       <p:sp>
         <p:nvSpPr>
-          <p:cNvPr id="37" name="producto cierre FAS"/>
-          <p:cNvSpPr txBox="1"/>
-          <p:nvPr/>
-        </p:nvSpPr>
-        <p:spPr>
-          <a:xfrm>
-            <a:off x="6803136" y="4187952"/>
-            <a:ext cx="548640" cy="237744"/>
+          <p:cNvPr id="37" name="producto fila WBV"/>
+          <p:cNvSpPr txBox="1"/>
+          <p:nvPr/>
+        </p:nvSpPr>
+        <p:spPr>
+          <a:xfrm>
+            <a:off x="6803136" y="4133088"/>
+            <a:ext cx="960120" cy="237744"/>
           </a:xfrm>
           <a:prstGeom prst="rect">
             <a:avLst/>
@@ -13013,13 +13099,13 @@
             <a:r>
               <a:rPr lang="en-US" sz="850" b="1" spc="100" kern="0" dirty="0">
                 <a:solidFill>
-                  <a:srgbClr val="FFFFFF"/>
+                  <a:srgbClr val="0F1C2C"/>
                 </a:solidFill>
                 <a:latin typeface="Montserrat" pitchFamily="34" charset="0"/>
                 <a:ea typeface="Montserrat" pitchFamily="34" charset="-122"/>
                 <a:cs typeface="Montserrat" pitchFamily="34" charset="-120"/>
               </a:rPr>
-              <a:t>FAS</a:t>
+              <a:t>WBV · PASIVO</a:t>
             </a:r>
             <a:endParaRPr lang="en-US" sz="850" dirty="0"/>
           </a:p>
@@ -13104,7 +13190,7 @@
         <p:spPr>
           <a:xfrm>
             <a:off x="1920240" y="274320"/>
-            <a:ext cx="5760720" cy="502920"/>
+            <a:ext cx="5394960" cy="502920"/>
           </a:xfrm>
           <a:prstGeom prst="rect">
             <a:avLst/>
@@ -13644,7 +13730,7 @@
                 <a:ea typeface="Arial" pitchFamily="34" charset="-122"/>
                 <a:cs typeface="Arial" pitchFamily="34" charset="-120"/>
               </a:rPr>
-              <a:t>Productos en la prueba: CMS, ISA, WBV Monitor y FAS</a:t>
+              <a:t>Productos en la prueba: CMS, ISA, FAS y WBV</a:t>
             </a:r>
             <a:endParaRPr lang="en-US" sz="1150" dirty="0"/>
           </a:p>
@@ -13665,7 +13751,7 @@
                 <a:ea typeface="Arial" pitchFamily="34" charset="-122"/>
                 <a:cs typeface="Arial" pitchFamily="34" charset="-120"/>
               </a:rPr>
-              <a:t>Enfrentamiento</a:t>
+              <a:t>Cruce en carriles distintos: así funciona el anticolisión</a:t>
             </a:r>
             <a:endParaRPr lang="en-US" sz="1150" dirty="0"/>
           </a:p>
@@ -13686,7 +13772,7 @@
                 <a:ea typeface="Arial" pitchFamily="34" charset="-122"/>
                 <a:cs typeface="Arial" pitchFamily="34" charset="-120"/>
               </a:rPr>
-              <a:t>Cruce en carriles distintos</a:t>
+              <a:t>Enfrentamiento: el sistema interviene</a:t>
             </a:r>
             <a:endParaRPr lang="en-US" sz="1150" dirty="0"/>
           </a:p>
@@ -13749,7 +13835,7 @@
                 <a:ea typeface="Arial" pitchFamily="34" charset="-122"/>
                 <a:cs typeface="Arial" pitchFamily="34" charset="-120"/>
               </a:rPr>
-              <a:t>Recta: validación final</a:t>
+              <a:t>Detección de fatiga y uso del móvil</a:t>
             </a:r>
             <a:endParaRPr lang="en-US" sz="1150" dirty="0"/>
           </a:p>
@@ -13949,7 +14035,7 @@
         <p:spPr>
           <a:xfrm>
             <a:off x="1920240" y="274320"/>
-            <a:ext cx="5760720" cy="502920"/>
+            <a:ext cx="5394960" cy="502920"/>
           </a:xfrm>
           <a:prstGeom prst="rect">
             <a:avLst/>
@@ -14010,7 +14096,7 @@
           <a:solidFill>
             <a:srgbClr val="D9D9D9"/>
           </a:solidFill>
-          <a:ln w="12700">
+          <a:ln w="9525">
             <a:solidFill>
               <a:srgbClr val="D9D9D9"/>
             </a:solidFill>
@@ -14411,7 +14497,7 @@
         <p:spPr>
           <a:xfrm>
             <a:off x="1920240" y="274320"/>
-            <a:ext cx="5760720" cy="502920"/>
+            <a:ext cx="5394960" cy="502920"/>
           </a:xfrm>
           <a:prstGeom prst="rect">
             <a:avLst/>
@@ -14472,7 +14558,7 @@
           <a:solidFill>
             <a:srgbClr val="D9D9D9"/>
           </a:solidFill>
-          <a:ln w="12700">
+          <a:ln w="9525">
             <a:solidFill>
               <a:srgbClr val="D9D9D9"/>
             </a:solidFill>
@@ -15384,7 +15470,7 @@
         <p:spPr>
           <a:xfrm>
             <a:off x="1920240" y="274320"/>
-            <a:ext cx="5760720" cy="502920"/>
+            <a:ext cx="5394960" cy="502920"/>
           </a:xfrm>
           <a:prstGeom prst="rect">
             <a:avLst/>
@@ -15445,7 +15531,7 @@
           <a:solidFill>
             <a:srgbClr val="D9D9D9"/>
           </a:solidFill>
-          <a:ln w="12700">
+          <a:ln w="9525">
             <a:solidFill>
               <a:srgbClr val="D9D9D9"/>
             </a:solidFill>
@@ -15846,7 +15932,7 @@
         <p:spPr>
           <a:xfrm>
             <a:off x="1920240" y="274320"/>
-            <a:ext cx="5760720" cy="502920"/>
+            <a:ext cx="5394960" cy="502920"/>
           </a:xfrm>
           <a:prstGeom prst="rect">
             <a:avLst/>
@@ -15907,7 +15993,7 @@
           <a:solidFill>
             <a:srgbClr val="D9D9D9"/>
           </a:solidFill>
-          <a:ln w="12700">
+          <a:ln w="9525">
             <a:solidFill>
               <a:srgbClr val="D9D9D9"/>
             </a:solidFill>
@@ -16857,7 +16943,7 @@
         <p:spPr>
           <a:xfrm>
             <a:off x="1920240" y="274320"/>
-            <a:ext cx="5760720" cy="502920"/>
+            <a:ext cx="5394960" cy="502920"/>
           </a:xfrm>
           <a:prstGeom prst="rect">
             <a:avLst/>
@@ -16918,7 +17004,7 @@
           <a:solidFill>
             <a:srgbClr val="D9D9D9"/>
           </a:solidFill>
-          <a:ln w="12700">
+          <a:ln w="9525">
             <a:solidFill>
               <a:srgbClr val="D9D9D9"/>
             </a:solidFill>
@@ -17430,7 +17516,7 @@
         <p:spPr>
           <a:xfrm>
             <a:off x="1920240" y="274320"/>
-            <a:ext cx="5760720" cy="502920"/>
+            <a:ext cx="5394960" cy="502920"/>
           </a:xfrm>
           <a:prstGeom prst="rect">
             <a:avLst/>
